--- a/output/presentations/10-reasoning-planning.pptx
+++ b/output/presentations/10-reasoning-planning.pptx
@@ -2,22 +2,24 @@
 <file path=ppt/presentation.xml><?xml version="1.0" encoding="utf-8"?>
 <p:presentation xmlns:p="http://schemas.openxmlformats.org/presentationml/2006/main">
   <p:sldMasterIdLst>
-    <p:sldMasterId xmlns:r="http://schemas.openxmlformats.org/officeDocument/2006/relationships" id="2147483648" r:id="R45ad394a302f43ec"/>
+    <p:sldMasterId xmlns:r="http://schemas.openxmlformats.org/officeDocument/2006/relationships" id="2147483648" r:id="R876007588cf54b38"/>
   </p:sldMasterIdLst>
   <p:notesMasterIdLst>
-    <p:notesMasterId xmlns:r="http://schemas.openxmlformats.org/officeDocument/2006/relationships" r:id="R4e9cccf8bfb743e5"/>
+    <p:notesMasterId xmlns:r="http://schemas.openxmlformats.org/officeDocument/2006/relationships" r:id="R3b54a2f252c14085"/>
   </p:notesMasterIdLst>
   <p:sldIdLst>
-    <p:sldId xmlns:r="http://schemas.openxmlformats.org/officeDocument/2006/relationships" id="256" r:id="R4f91ca0132864361"/>
-    <p:sldId xmlns:r="http://schemas.openxmlformats.org/officeDocument/2006/relationships" id="257" r:id="R7f5317db497a4995"/>
-    <p:sldId xmlns:r="http://schemas.openxmlformats.org/officeDocument/2006/relationships" id="258" r:id="R1c70514ec21a41be"/>
-    <p:sldId xmlns:r="http://schemas.openxmlformats.org/officeDocument/2006/relationships" id="259" r:id="R5b882c883ebe4207"/>
-    <p:sldId xmlns:r="http://schemas.openxmlformats.org/officeDocument/2006/relationships" id="260" r:id="R1ba5bb46fd7b4c1f"/>
-    <p:sldId xmlns:r="http://schemas.openxmlformats.org/officeDocument/2006/relationships" id="261" r:id="R5604f2ca81e147fc"/>
-    <p:sldId xmlns:r="http://schemas.openxmlformats.org/officeDocument/2006/relationships" id="262" r:id="R92acec49f2594c71"/>
-    <p:sldId xmlns:r="http://schemas.openxmlformats.org/officeDocument/2006/relationships" id="263" r:id="R38792787fbab486c"/>
-    <p:sldId xmlns:r="http://schemas.openxmlformats.org/officeDocument/2006/relationships" id="264" r:id="Re632a9b18a254b1a"/>
-    <p:sldId xmlns:r="http://schemas.openxmlformats.org/officeDocument/2006/relationships" id="265" r:id="Re4091c9456a844d5"/>
+    <p:sldId xmlns:r="http://schemas.openxmlformats.org/officeDocument/2006/relationships" id="256" r:id="R629daa727a2742d6"/>
+    <p:sldId xmlns:r="http://schemas.openxmlformats.org/officeDocument/2006/relationships" id="257" r:id="Rc6993e4dd6df4e2e"/>
+    <p:sldId xmlns:r="http://schemas.openxmlformats.org/officeDocument/2006/relationships" id="258" r:id="R05dd2c803dea4a6e"/>
+    <p:sldId xmlns:r="http://schemas.openxmlformats.org/officeDocument/2006/relationships" id="259" r:id="R61cfb5b89bcb4d89"/>
+    <p:sldId xmlns:r="http://schemas.openxmlformats.org/officeDocument/2006/relationships" id="260" r:id="R66315555965f43e2"/>
+    <p:sldId xmlns:r="http://schemas.openxmlformats.org/officeDocument/2006/relationships" id="261" r:id="Rb2c26bde32b1487d"/>
+    <p:sldId xmlns:r="http://schemas.openxmlformats.org/officeDocument/2006/relationships" id="262" r:id="Rac6b4e0cbe194f38"/>
+    <p:sldId xmlns:r="http://schemas.openxmlformats.org/officeDocument/2006/relationships" id="263" r:id="R4fa4e358f6d84b3b"/>
+    <p:sldId xmlns:r="http://schemas.openxmlformats.org/officeDocument/2006/relationships" id="264" r:id="R6d4e576b212e42a4"/>
+    <p:sldId xmlns:r="http://schemas.openxmlformats.org/officeDocument/2006/relationships" id="265" r:id="Rbe4a2780cb944547"/>
+    <p:sldId xmlns:r="http://schemas.openxmlformats.org/officeDocument/2006/relationships" id="266" r:id="R48e91b7ff9c2454e"/>
+    <p:sldId xmlns:r="http://schemas.openxmlformats.org/officeDocument/2006/relationships" id="267" r:id="R5a60efac25fe4451"/>
   </p:sldIdLst>
   <p:sldSz cx="12192000" cy="6858000"/>
   <p:notesSz cx="6858000" cy="9144000"/>
@@ -461,12 +463,57 @@
           </a:p>
           <a:p xmlns:a="http://schemas.openxmlformats.org/drawingml/2006/main">
             <a:r>
+              <a:t>Edition: 2026-09-09</a:t>
+            </a:r>
+          </a:p>
+          <a:p xmlns:a="http://schemas.openxmlformats.org/drawingml/2006/main">
+            <a:r>
+              <a:t/>
+            </a:r>
+          </a:p>
+          <a:p xmlns:a="http://schemas.openxmlformats.org/drawingml/2006/main">
+            <a:r>
               <a:t>[Sources]</a:t>
             </a:r>
           </a:p>
           <a:p xmlns:a="http://schemas.openxmlformats.org/drawingml/2006/main">
             <a:r>
-              <a:t>- Supplied source presentation: 10-reasoning-planning.pdf</a:t>
+              <a:t>- Original source presentation: 10-reasoning-planning.pdf</a:t>
+            </a:r>
+          </a:p>
+          <a:p xmlns:a="http://schemas.openxmlformats.org/drawingml/2006/main">
+            <a:r>
+              <a:t>- P3: Would this change your answer?. Anthropic/Fellows preprint, arXiv v1, 2026-08-17. https://arxiv.org/abs/2608.16747 CHIVE tests counterfactual prompt changes. Generated explanations remain hypotheses. Official post: August 21.</a:t>
+            </a:r>
+          </a:p>
+          <a:p xmlns:a="http://schemas.openxmlformats.org/drawingml/2006/main">
+            <a:r>
+              <a:t>- R1: Patterns and problems in emerging multiagent systems. Anthropic research post, 2026-08-13. https://www.anthropic.com/research/multiagent-systems Controlled coordination experiments. Compare scope and budgets before interpreting the findings.</a:t>
+            </a:r>
+          </a:p>
+          <a:p xmlns:a="http://schemas.openxmlformats.org/drawingml/2006/main">
+            <a:r>
+              <a:t/>
+            </a:r>
+          </a:p>
+          <a:p xmlns:a="http://schemas.openxmlformats.org/drawingml/2006/main">
+            <a:r>
+              <a:t>[Assessed practice]</a:t>
+            </a:r>
+          </a:p>
+          <a:p xmlns:a="http://schemas.openxmlformats.org/drawingml/2006/main">
+            <a:r>
+              <a:t>Use Lab 7's paired inputs to test a prediction about a misleading cue. Propose an equal-budget comparison with voting and identify a shared-error failure case.</a:t>
+            </a:r>
+          </a:p>
+          <a:p xmlns:a="http://schemas.openxmlformats.org/drawingml/2006/main">
+            <a:r>
+              <a:t>Acceptance: Keep predictions, observations, and interpretations separate. State the limits of a small experiment.</a:t>
+            </a:r>
+          </a:p>
+          <a:p xmlns:a="http://schemas.openxmlformats.org/drawingml/2006/main">
+            <a:r>
+              <a:t>Lab: labs/07_agents_sdk_evaluation.ipynb</a:t>
             </a:r>
           </a:p>
         </p:txBody>
@@ -536,6 +583,136 @@
           <a:lstStyle xmlns:a="http://schemas.openxmlformats.org/drawingml/2006/main"/>
           <a:p xmlns:a="http://schemas.openxmlformats.org/drawingml/2006/main">
             <a:r>
+              <a:t>Use as retrieval practice. Ask for an answer that defines, compares, traces, and evaluates.</a:t>
+            </a:r>
+          </a:p>
+          <a:p xmlns:a="http://schemas.openxmlformats.org/drawingml/2006/main">
+            <a:r>
+              <a:t/>
+            </a:r>
+          </a:p>
+          <a:p xmlns:a="http://schemas.openxmlformats.org/drawingml/2006/main">
+            <a:r>
+              <a:t>Edition: 2026-09-09</a:t>
+            </a:r>
+          </a:p>
+          <a:p xmlns:a="http://schemas.openxmlformats.org/drawingml/2006/main">
+            <a:r>
+              <a:t/>
+            </a:r>
+          </a:p>
+          <a:p xmlns:a="http://schemas.openxmlformats.org/drawingml/2006/main">
+            <a:r>
+              <a:t>[Sources]</a:t>
+            </a:r>
+          </a:p>
+          <a:p xmlns:a="http://schemas.openxmlformats.org/drawingml/2006/main">
+            <a:r>
+              <a:t>- Original source presentation: 10-reasoning-planning.pdf</a:t>
+            </a:r>
+          </a:p>
+          <a:p xmlns:a="http://schemas.openxmlformats.org/drawingml/2006/main">
+            <a:r>
+              <a:t>- P3: Would this change your answer?. Anthropic/Fellows preprint, arXiv v1, 2026-08-17. https://arxiv.org/abs/2608.16747 CHIVE tests counterfactual prompt changes. Generated explanations remain hypotheses. Official post: August 21.</a:t>
+            </a:r>
+          </a:p>
+          <a:p xmlns:a="http://schemas.openxmlformats.org/drawingml/2006/main">
+            <a:r>
+              <a:t>- R1: Patterns and problems in emerging multiagent systems. Anthropic research post, 2026-08-13. https://www.anthropic.com/research/multiagent-systems Controlled coordination experiments. Compare scope and budgets before interpreting the findings.</a:t>
+            </a:r>
+          </a:p>
+          <a:p xmlns:a="http://schemas.openxmlformats.org/drawingml/2006/main">
+            <a:r>
+              <a:t/>
+            </a:r>
+          </a:p>
+          <a:p xmlns:a="http://schemas.openxmlformats.org/drawingml/2006/main">
+            <a:r>
+              <a:t>[Assessed practice]</a:t>
+            </a:r>
+          </a:p>
+          <a:p xmlns:a="http://schemas.openxmlformats.org/drawingml/2006/main">
+            <a:r>
+              <a:t>Use Lab 7's paired inputs to test a prediction about a misleading cue. Propose an equal-budget comparison with voting and identify a shared-error failure case.</a:t>
+            </a:r>
+          </a:p>
+          <a:p xmlns:a="http://schemas.openxmlformats.org/drawingml/2006/main">
+            <a:r>
+              <a:t>Acceptance: Keep predictions, observations, and interpretations separate. State the limits of a small experiment.</a:t>
+            </a:r>
+          </a:p>
+          <a:p xmlns:a="http://schemas.openxmlformats.org/drawingml/2006/main">
+            <a:r>
+              <a:t>Lab: labs/07_agents_sdk_evaluation.ipynb</a:t>
+            </a:r>
+          </a:p>
+        </p:txBody>
+      </p:sp>
+      <p:sp>
+        <p:nvSpPr>
+          <p:cNvPr id="4" name="Slide Number Placeholder 3"/>
+          <p:cNvSpPr>
+            <a:spLocks xmlns:a="http://schemas.openxmlformats.org/drawingml/2006/main" noGrp="1"/>
+          </p:cNvSpPr>
+          <p:nvPr>
+            <p:ph type="sldNum" idx="5"/>
+          </p:nvPr>
+        </p:nvSpPr>
+        <p:spPr/>
+        <p:txBody>
+          <a:bodyPr xmlns:a="http://schemas.openxmlformats.org/drawingml/2006/main"/>
+          <a:lstStyle xmlns:a="http://schemas.openxmlformats.org/drawingml/2006/main"/>
+          <a:p xmlns:a="http://schemas.openxmlformats.org/drawingml/2006/main"/>
+        </p:txBody>
+      </p:sp>
+    </p:spTree>
+  </p:cSld>
+  <p:clrMapOvr>
+    <a:masterClrMapping xmlns:a="http://schemas.openxmlformats.org/drawingml/2006/main"/>
+  </p:clrMapOvr>
+</p:notes>
+</file>
+
+<file path=ppt/notesSlides/notesSlide11.xml><?xml version="1.0" encoding="utf-8"?>
+<p:notes xmlns:p="http://schemas.openxmlformats.org/presentationml/2006/main">
+  <p:cSld>
+    <p:spTree>
+      <p:nvGrpSpPr>
+        <p:cNvPr id="1" name=""/>
+        <p:cNvGrpSpPr/>
+        <p:nvPr/>
+      </p:nvGrpSpPr>
+      <p:grpSpPr>
+        <a:xfrm xmlns:a="http://schemas.openxmlformats.org/drawingml/2006/main"/>
+      </p:grpSpPr>
+      <p:sp>
+        <p:nvSpPr>
+          <p:cNvPr id="2" name="Slide Image Placeholder 1"/>
+          <p:cNvSpPr>
+            <a:spLocks xmlns:a="http://schemas.openxmlformats.org/drawingml/2006/main" noGrp="1"/>
+          </p:cNvSpPr>
+          <p:nvPr>
+            <p:ph type="sldImg" idx="0"/>
+          </p:nvPr>
+        </p:nvSpPr>
+        <p:spPr/>
+      </p:sp>
+      <p:sp>
+        <p:nvSpPr>
+          <p:cNvPr id="3" name="Notes Placeholder 2"/>
+          <p:cNvSpPr>
+            <a:spLocks xmlns:a="http://schemas.openxmlformats.org/drawingml/2006/main" noGrp="1"/>
+          </p:cNvSpPr>
+          <p:nvPr>
+            <p:ph type="body" idx="1"/>
+          </p:nvPr>
+        </p:nvSpPr>
+        <p:spPr/>
+        <p:txBody>
+          <a:bodyPr xmlns:a="http://schemas.openxmlformats.org/drawingml/2006/main"/>
+          <a:lstStyle xmlns:a="http://schemas.openxmlformats.org/drawingml/2006/main"/>
+          <a:p xmlns:a="http://schemas.openxmlformats.org/drawingml/2006/main">
+            <a:r>
               <a:t>Close by restating the four durable ideas and linking forward to the next chapter.</a:t>
             </a:r>
           </a:p>
@@ -546,12 +723,187 @@
           </a:p>
           <a:p xmlns:a="http://schemas.openxmlformats.org/drawingml/2006/main">
             <a:r>
+              <a:t>Edition: 2026-09-09</a:t>
+            </a:r>
+          </a:p>
+          <a:p xmlns:a="http://schemas.openxmlformats.org/drawingml/2006/main">
+            <a:r>
+              <a:t/>
+            </a:r>
+          </a:p>
+          <a:p xmlns:a="http://schemas.openxmlformats.org/drawingml/2006/main">
+            <a:r>
               <a:t>[Sources]</a:t>
             </a:r>
           </a:p>
           <a:p xmlns:a="http://schemas.openxmlformats.org/drawingml/2006/main">
             <a:r>
-              <a:t>- Supplied source presentation: 10-reasoning-planning.pdf</a:t>
+              <a:t>- Original source presentation: 10-reasoning-planning.pdf</a:t>
+            </a:r>
+          </a:p>
+          <a:p xmlns:a="http://schemas.openxmlformats.org/drawingml/2006/main">
+            <a:r>
+              <a:t>- P3: Would this change your answer?. Anthropic/Fellows preprint, arXiv v1, 2026-08-17. https://arxiv.org/abs/2608.16747 CHIVE tests counterfactual prompt changes. Generated explanations remain hypotheses. Official post: August 21.</a:t>
+            </a:r>
+          </a:p>
+          <a:p xmlns:a="http://schemas.openxmlformats.org/drawingml/2006/main">
+            <a:r>
+              <a:t>- R1: Patterns and problems in emerging multiagent systems. Anthropic research post, 2026-08-13. https://www.anthropic.com/research/multiagent-systems Controlled coordination experiments. Compare scope and budgets before interpreting the findings.</a:t>
+            </a:r>
+          </a:p>
+          <a:p xmlns:a="http://schemas.openxmlformats.org/drawingml/2006/main">
+            <a:r>
+              <a:t/>
+            </a:r>
+          </a:p>
+          <a:p xmlns:a="http://schemas.openxmlformats.org/drawingml/2006/main">
+            <a:r>
+              <a:t>[Assessed practice]</a:t>
+            </a:r>
+          </a:p>
+          <a:p xmlns:a="http://schemas.openxmlformats.org/drawingml/2006/main">
+            <a:r>
+              <a:t>Use Lab 7's paired inputs to test a prediction about a misleading cue. Propose an equal-budget comparison with voting and identify a shared-error failure case.</a:t>
+            </a:r>
+          </a:p>
+          <a:p xmlns:a="http://schemas.openxmlformats.org/drawingml/2006/main">
+            <a:r>
+              <a:t>Acceptance: Keep predictions, observations, and interpretations separate. State the limits of a small experiment.</a:t>
+            </a:r>
+          </a:p>
+          <a:p xmlns:a="http://schemas.openxmlformats.org/drawingml/2006/main">
+            <a:r>
+              <a:t>Lab: labs/07_agents_sdk_evaluation.ipynb</a:t>
+            </a:r>
+          </a:p>
+        </p:txBody>
+      </p:sp>
+      <p:sp>
+        <p:nvSpPr>
+          <p:cNvPr id="4" name="Slide Number Placeholder 3"/>
+          <p:cNvSpPr>
+            <a:spLocks xmlns:a="http://schemas.openxmlformats.org/drawingml/2006/main" noGrp="1"/>
+          </p:cNvSpPr>
+          <p:nvPr>
+            <p:ph type="sldNum" idx="5"/>
+          </p:nvPr>
+        </p:nvSpPr>
+        <p:spPr/>
+        <p:txBody>
+          <a:bodyPr xmlns:a="http://schemas.openxmlformats.org/drawingml/2006/main"/>
+          <a:lstStyle xmlns:a="http://schemas.openxmlformats.org/drawingml/2006/main"/>
+          <a:p xmlns:a="http://schemas.openxmlformats.org/drawingml/2006/main"/>
+        </p:txBody>
+      </p:sp>
+    </p:spTree>
+  </p:cSld>
+  <p:clrMapOvr>
+    <a:masterClrMapping xmlns:a="http://schemas.openxmlformats.org/drawingml/2006/main"/>
+  </p:clrMapOvr>
+</p:notes>
+</file>
+
+<file path=ppt/notesSlides/notesSlide12.xml><?xml version="1.0" encoding="utf-8"?>
+<p:notes xmlns:p="http://schemas.openxmlformats.org/presentationml/2006/main">
+  <p:cSld>
+    <p:spTree>
+      <p:nvGrpSpPr>
+        <p:cNvPr id="1" name=""/>
+        <p:cNvGrpSpPr/>
+        <p:nvPr/>
+      </p:nvGrpSpPr>
+      <p:grpSpPr>
+        <a:xfrm xmlns:a="http://schemas.openxmlformats.org/drawingml/2006/main"/>
+      </p:grpSpPr>
+      <p:sp>
+        <p:nvSpPr>
+          <p:cNvPr id="2" name="Slide Image Placeholder 1"/>
+          <p:cNvSpPr>
+            <a:spLocks xmlns:a="http://schemas.openxmlformats.org/drawingml/2006/main" noGrp="1"/>
+          </p:cNvSpPr>
+          <p:nvPr>
+            <p:ph type="sldImg" idx="0"/>
+          </p:nvPr>
+        </p:nvSpPr>
+        <p:spPr/>
+      </p:sp>
+      <p:sp>
+        <p:nvSpPr>
+          <p:cNvPr id="3" name="Notes Placeholder 2"/>
+          <p:cNvSpPr>
+            <a:spLocks xmlns:a="http://schemas.openxmlformats.org/drawingml/2006/main" noGrp="1"/>
+          </p:cNvSpPr>
+          <p:nvPr>
+            <p:ph type="body" idx="1"/>
+          </p:nvPr>
+        </p:nvSpPr>
+        <p:spPr/>
+        <p:txBody>
+          <a:bodyPr xmlns:a="http://schemas.openxmlformats.org/drawingml/2006/main"/>
+          <a:lstStyle xmlns:a="http://schemas.openxmlformats.org/drawingml/2006/main"/>
+          <a:p xmlns:a="http://schemas.openxmlformats.org/drawingml/2006/main">
+            <a:r>
+              <a:t>Assess the submitted evidence with the stated acceptance check. Reading links and limitations follow.</a:t>
+            </a:r>
+          </a:p>
+          <a:p xmlns:a="http://schemas.openxmlformats.org/drawingml/2006/main">
+            <a:r>
+              <a:t/>
+            </a:r>
+          </a:p>
+          <a:p xmlns:a="http://schemas.openxmlformats.org/drawingml/2006/main">
+            <a:r>
+              <a:t>Edition: 2026-09-09</a:t>
+            </a:r>
+          </a:p>
+          <a:p xmlns:a="http://schemas.openxmlformats.org/drawingml/2006/main">
+            <a:r>
+              <a:t/>
+            </a:r>
+          </a:p>
+          <a:p xmlns:a="http://schemas.openxmlformats.org/drawingml/2006/main">
+            <a:r>
+              <a:t>[Sources]</a:t>
+            </a:r>
+          </a:p>
+          <a:p xmlns:a="http://schemas.openxmlformats.org/drawingml/2006/main">
+            <a:r>
+              <a:t>- Original source presentation: 10-reasoning-planning.pdf</a:t>
+            </a:r>
+          </a:p>
+          <a:p xmlns:a="http://schemas.openxmlformats.org/drawingml/2006/main">
+            <a:r>
+              <a:t>- P3: Would this change your answer?. Anthropic/Fellows preprint, arXiv v1, 2026-08-17. https://arxiv.org/abs/2608.16747 CHIVE tests counterfactual prompt changes. Generated explanations remain hypotheses. Official post: August 21.</a:t>
+            </a:r>
+          </a:p>
+          <a:p xmlns:a="http://schemas.openxmlformats.org/drawingml/2006/main">
+            <a:r>
+              <a:t>- R1: Patterns and problems in emerging multiagent systems. Anthropic research post, 2026-08-13. https://www.anthropic.com/research/multiagent-systems Controlled coordination experiments. Compare scope and budgets before interpreting the findings.</a:t>
+            </a:r>
+          </a:p>
+          <a:p xmlns:a="http://schemas.openxmlformats.org/drawingml/2006/main">
+            <a:r>
+              <a:t/>
+            </a:r>
+          </a:p>
+          <a:p xmlns:a="http://schemas.openxmlformats.org/drawingml/2006/main">
+            <a:r>
+              <a:t>[Assessed practice]</a:t>
+            </a:r>
+          </a:p>
+          <a:p xmlns:a="http://schemas.openxmlformats.org/drawingml/2006/main">
+            <a:r>
+              <a:t>Use Lab 7's paired inputs to test a prediction about a misleading cue. Propose an equal-budget comparison with voting and identify a shared-error failure case.</a:t>
+            </a:r>
+          </a:p>
+          <a:p xmlns:a="http://schemas.openxmlformats.org/drawingml/2006/main">
+            <a:r>
+              <a:t>Acceptance: Keep predictions, observations, and interpretations separate. State the limits of a small experiment.</a:t>
+            </a:r>
+          </a:p>
+          <a:p xmlns:a="http://schemas.openxmlformats.org/drawingml/2006/main">
+            <a:r>
+              <a:t>Lab: labs/07_agents_sdk_evaluation.ipynb</a:t>
             </a:r>
           </a:p>
         </p:txBody>
@@ -631,12 +983,57 @@
           </a:p>
           <a:p xmlns:a="http://schemas.openxmlformats.org/drawingml/2006/main">
             <a:r>
+              <a:t>Edition: 2026-09-09</a:t>
+            </a:r>
+          </a:p>
+          <a:p xmlns:a="http://schemas.openxmlformats.org/drawingml/2006/main">
+            <a:r>
+              <a:t/>
+            </a:r>
+          </a:p>
+          <a:p xmlns:a="http://schemas.openxmlformats.org/drawingml/2006/main">
+            <a:r>
               <a:t>[Sources]</a:t>
             </a:r>
           </a:p>
           <a:p xmlns:a="http://schemas.openxmlformats.org/drawingml/2006/main">
             <a:r>
-              <a:t>- Supplied source presentation: 10-reasoning-planning.pdf</a:t>
+              <a:t>- Original source presentation: 10-reasoning-planning.pdf</a:t>
+            </a:r>
+          </a:p>
+          <a:p xmlns:a="http://schemas.openxmlformats.org/drawingml/2006/main">
+            <a:r>
+              <a:t>- P3: Would this change your answer?. Anthropic/Fellows preprint, arXiv v1, 2026-08-17. https://arxiv.org/abs/2608.16747 CHIVE tests counterfactual prompt changes. Generated explanations remain hypotheses. Official post: August 21.</a:t>
+            </a:r>
+          </a:p>
+          <a:p xmlns:a="http://schemas.openxmlformats.org/drawingml/2006/main">
+            <a:r>
+              <a:t>- R1: Patterns and problems in emerging multiagent systems. Anthropic research post, 2026-08-13. https://www.anthropic.com/research/multiagent-systems Controlled coordination experiments. Compare scope and budgets before interpreting the findings.</a:t>
+            </a:r>
+          </a:p>
+          <a:p xmlns:a="http://schemas.openxmlformats.org/drawingml/2006/main">
+            <a:r>
+              <a:t/>
+            </a:r>
+          </a:p>
+          <a:p xmlns:a="http://schemas.openxmlformats.org/drawingml/2006/main">
+            <a:r>
+              <a:t>[Assessed practice]</a:t>
+            </a:r>
+          </a:p>
+          <a:p xmlns:a="http://schemas.openxmlformats.org/drawingml/2006/main">
+            <a:r>
+              <a:t>Use Lab 7's paired inputs to test a prediction about a misleading cue. Propose an equal-budget comparison with voting and identify a shared-error failure case.</a:t>
+            </a:r>
+          </a:p>
+          <a:p xmlns:a="http://schemas.openxmlformats.org/drawingml/2006/main">
+            <a:r>
+              <a:t>Acceptance: Keep predictions, observations, and interpretations separate. State the limits of a small experiment.</a:t>
+            </a:r>
+          </a:p>
+          <a:p xmlns:a="http://schemas.openxmlformats.org/drawingml/2006/main">
+            <a:r>
+              <a:t>Lab: labs/07_agents_sdk_evaluation.ipynb</a:t>
             </a:r>
           </a:p>
         </p:txBody>
@@ -716,12 +1113,57 @@
           </a:p>
           <a:p xmlns:a="http://schemas.openxmlformats.org/drawingml/2006/main">
             <a:r>
+              <a:t>Edition: 2026-09-09</a:t>
+            </a:r>
+          </a:p>
+          <a:p xmlns:a="http://schemas.openxmlformats.org/drawingml/2006/main">
+            <a:r>
+              <a:t/>
+            </a:r>
+          </a:p>
+          <a:p xmlns:a="http://schemas.openxmlformats.org/drawingml/2006/main">
+            <a:r>
               <a:t>[Sources]</a:t>
             </a:r>
           </a:p>
           <a:p xmlns:a="http://schemas.openxmlformats.org/drawingml/2006/main">
             <a:r>
-              <a:t>- Supplied source presentation: 10-reasoning-planning.pdf</a:t>
+              <a:t>- Original source presentation: 10-reasoning-planning.pdf</a:t>
+            </a:r>
+          </a:p>
+          <a:p xmlns:a="http://schemas.openxmlformats.org/drawingml/2006/main">
+            <a:r>
+              <a:t>- P3: Would this change your answer?. Anthropic/Fellows preprint, arXiv v1, 2026-08-17. https://arxiv.org/abs/2608.16747 CHIVE tests counterfactual prompt changes. Generated explanations remain hypotheses. Official post: August 21.</a:t>
+            </a:r>
+          </a:p>
+          <a:p xmlns:a="http://schemas.openxmlformats.org/drawingml/2006/main">
+            <a:r>
+              <a:t>- R1: Patterns and problems in emerging multiagent systems. Anthropic research post, 2026-08-13. https://www.anthropic.com/research/multiagent-systems Controlled coordination experiments. Compare scope and budgets before interpreting the findings.</a:t>
+            </a:r>
+          </a:p>
+          <a:p xmlns:a="http://schemas.openxmlformats.org/drawingml/2006/main">
+            <a:r>
+              <a:t/>
+            </a:r>
+          </a:p>
+          <a:p xmlns:a="http://schemas.openxmlformats.org/drawingml/2006/main">
+            <a:r>
+              <a:t>[Assessed practice]</a:t>
+            </a:r>
+          </a:p>
+          <a:p xmlns:a="http://schemas.openxmlformats.org/drawingml/2006/main">
+            <a:r>
+              <a:t>Use Lab 7's paired inputs to test a prediction about a misleading cue. Propose an equal-budget comparison with voting and identify a shared-error failure case.</a:t>
+            </a:r>
+          </a:p>
+          <a:p xmlns:a="http://schemas.openxmlformats.org/drawingml/2006/main">
+            <a:r>
+              <a:t>Acceptance: Keep predictions, observations, and interpretations separate. State the limits of a small experiment.</a:t>
+            </a:r>
+          </a:p>
+          <a:p xmlns:a="http://schemas.openxmlformats.org/drawingml/2006/main">
+            <a:r>
+              <a:t>Lab: labs/07_agents_sdk_evaluation.ipynb</a:t>
             </a:r>
           </a:p>
         </p:txBody>
@@ -801,12 +1243,57 @@
           </a:p>
           <a:p xmlns:a="http://schemas.openxmlformats.org/drawingml/2006/main">
             <a:r>
+              <a:t>Edition: 2026-09-09</a:t>
+            </a:r>
+          </a:p>
+          <a:p xmlns:a="http://schemas.openxmlformats.org/drawingml/2006/main">
+            <a:r>
+              <a:t/>
+            </a:r>
+          </a:p>
+          <a:p xmlns:a="http://schemas.openxmlformats.org/drawingml/2006/main">
+            <a:r>
               <a:t>[Sources]</a:t>
             </a:r>
           </a:p>
           <a:p xmlns:a="http://schemas.openxmlformats.org/drawingml/2006/main">
             <a:r>
-              <a:t>- Supplied source presentation: 10-reasoning-planning.pdf</a:t>
+              <a:t>- Original source presentation: 10-reasoning-planning.pdf</a:t>
+            </a:r>
+          </a:p>
+          <a:p xmlns:a="http://schemas.openxmlformats.org/drawingml/2006/main">
+            <a:r>
+              <a:t>- P3: Would this change your answer?. Anthropic/Fellows preprint, arXiv v1, 2026-08-17. https://arxiv.org/abs/2608.16747 CHIVE tests counterfactual prompt changes. Generated explanations remain hypotheses. Official post: August 21.</a:t>
+            </a:r>
+          </a:p>
+          <a:p xmlns:a="http://schemas.openxmlformats.org/drawingml/2006/main">
+            <a:r>
+              <a:t>- R1: Patterns and problems in emerging multiagent systems. Anthropic research post, 2026-08-13. https://www.anthropic.com/research/multiagent-systems Controlled coordination experiments. Compare scope and budgets before interpreting the findings.</a:t>
+            </a:r>
+          </a:p>
+          <a:p xmlns:a="http://schemas.openxmlformats.org/drawingml/2006/main">
+            <a:r>
+              <a:t/>
+            </a:r>
+          </a:p>
+          <a:p xmlns:a="http://schemas.openxmlformats.org/drawingml/2006/main">
+            <a:r>
+              <a:t>[Assessed practice]</a:t>
+            </a:r>
+          </a:p>
+          <a:p xmlns:a="http://schemas.openxmlformats.org/drawingml/2006/main">
+            <a:r>
+              <a:t>Use Lab 7's paired inputs to test a prediction about a misleading cue. Propose an equal-budget comparison with voting and identify a shared-error failure case.</a:t>
+            </a:r>
+          </a:p>
+          <a:p xmlns:a="http://schemas.openxmlformats.org/drawingml/2006/main">
+            <a:r>
+              <a:t>Acceptance: Keep predictions, observations, and interpretations separate. State the limits of a small experiment.</a:t>
+            </a:r>
+          </a:p>
+          <a:p xmlns:a="http://schemas.openxmlformats.org/drawingml/2006/main">
+            <a:r>
+              <a:t>Lab: labs/07_agents_sdk_evaluation.ipynb</a:t>
             </a:r>
           </a:p>
         </p:txBody>
@@ -886,12 +1373,57 @@
           </a:p>
           <a:p xmlns:a="http://schemas.openxmlformats.org/drawingml/2006/main">
             <a:r>
+              <a:t>Edition: 2026-09-09</a:t>
+            </a:r>
+          </a:p>
+          <a:p xmlns:a="http://schemas.openxmlformats.org/drawingml/2006/main">
+            <a:r>
+              <a:t/>
+            </a:r>
+          </a:p>
+          <a:p xmlns:a="http://schemas.openxmlformats.org/drawingml/2006/main">
+            <a:r>
               <a:t>[Sources]</a:t>
             </a:r>
           </a:p>
           <a:p xmlns:a="http://schemas.openxmlformats.org/drawingml/2006/main">
             <a:r>
-              <a:t>- Supplied source presentation: 10-reasoning-planning.pdf</a:t>
+              <a:t>- Original source presentation: 10-reasoning-planning.pdf</a:t>
+            </a:r>
+          </a:p>
+          <a:p xmlns:a="http://schemas.openxmlformats.org/drawingml/2006/main">
+            <a:r>
+              <a:t>- P3: Would this change your answer?. Anthropic/Fellows preprint, arXiv v1, 2026-08-17. https://arxiv.org/abs/2608.16747 CHIVE tests counterfactual prompt changes. Generated explanations remain hypotheses. Official post: August 21.</a:t>
+            </a:r>
+          </a:p>
+          <a:p xmlns:a="http://schemas.openxmlformats.org/drawingml/2006/main">
+            <a:r>
+              <a:t>- R1: Patterns and problems in emerging multiagent systems. Anthropic research post, 2026-08-13. https://www.anthropic.com/research/multiagent-systems Controlled coordination experiments. Compare scope and budgets before interpreting the findings.</a:t>
+            </a:r>
+          </a:p>
+          <a:p xmlns:a="http://schemas.openxmlformats.org/drawingml/2006/main">
+            <a:r>
+              <a:t/>
+            </a:r>
+          </a:p>
+          <a:p xmlns:a="http://schemas.openxmlformats.org/drawingml/2006/main">
+            <a:r>
+              <a:t>[Assessed practice]</a:t>
+            </a:r>
+          </a:p>
+          <a:p xmlns:a="http://schemas.openxmlformats.org/drawingml/2006/main">
+            <a:r>
+              <a:t>Use Lab 7's paired inputs to test a prediction about a misleading cue. Propose an equal-budget comparison with voting and identify a shared-error failure case.</a:t>
+            </a:r>
+          </a:p>
+          <a:p xmlns:a="http://schemas.openxmlformats.org/drawingml/2006/main">
+            <a:r>
+              <a:t>Acceptance: Keep predictions, observations, and interpretations separate. State the limits of a small experiment.</a:t>
+            </a:r>
+          </a:p>
+          <a:p xmlns:a="http://schemas.openxmlformats.org/drawingml/2006/main">
+            <a:r>
+              <a:t>Lab: labs/07_agents_sdk_evaluation.ipynb</a:t>
             </a:r>
           </a:p>
         </p:txBody>
@@ -971,12 +1503,57 @@
           </a:p>
           <a:p xmlns:a="http://schemas.openxmlformats.org/drawingml/2006/main">
             <a:r>
+              <a:t>Edition: 2026-09-09</a:t>
+            </a:r>
+          </a:p>
+          <a:p xmlns:a="http://schemas.openxmlformats.org/drawingml/2006/main">
+            <a:r>
+              <a:t/>
+            </a:r>
+          </a:p>
+          <a:p xmlns:a="http://schemas.openxmlformats.org/drawingml/2006/main">
+            <a:r>
               <a:t>[Sources]</a:t>
             </a:r>
           </a:p>
           <a:p xmlns:a="http://schemas.openxmlformats.org/drawingml/2006/main">
             <a:r>
-              <a:t>- Supplied source presentation: 10-reasoning-planning.pdf</a:t>
+              <a:t>- Original source presentation: 10-reasoning-planning.pdf</a:t>
+            </a:r>
+          </a:p>
+          <a:p xmlns:a="http://schemas.openxmlformats.org/drawingml/2006/main">
+            <a:r>
+              <a:t>- P3: Would this change your answer?. Anthropic/Fellows preprint, arXiv v1, 2026-08-17. https://arxiv.org/abs/2608.16747 CHIVE tests counterfactual prompt changes. Generated explanations remain hypotheses. Official post: August 21.</a:t>
+            </a:r>
+          </a:p>
+          <a:p xmlns:a="http://schemas.openxmlformats.org/drawingml/2006/main">
+            <a:r>
+              <a:t>- R1: Patterns and problems in emerging multiagent systems. Anthropic research post, 2026-08-13. https://www.anthropic.com/research/multiagent-systems Controlled coordination experiments. Compare scope and budgets before interpreting the findings.</a:t>
+            </a:r>
+          </a:p>
+          <a:p xmlns:a="http://schemas.openxmlformats.org/drawingml/2006/main">
+            <a:r>
+              <a:t/>
+            </a:r>
+          </a:p>
+          <a:p xmlns:a="http://schemas.openxmlformats.org/drawingml/2006/main">
+            <a:r>
+              <a:t>[Assessed practice]</a:t>
+            </a:r>
+          </a:p>
+          <a:p xmlns:a="http://schemas.openxmlformats.org/drawingml/2006/main">
+            <a:r>
+              <a:t>Use Lab 7's paired inputs to test a prediction about a misleading cue. Propose an equal-budget comparison with voting and identify a shared-error failure case.</a:t>
+            </a:r>
+          </a:p>
+          <a:p xmlns:a="http://schemas.openxmlformats.org/drawingml/2006/main">
+            <a:r>
+              <a:t>Acceptance: Keep predictions, observations, and interpretations separate. State the limits of a small experiment.</a:t>
+            </a:r>
+          </a:p>
+          <a:p xmlns:a="http://schemas.openxmlformats.org/drawingml/2006/main">
+            <a:r>
+              <a:t>Lab: labs/07_agents_sdk_evaluation.ipynb</a:t>
             </a:r>
           </a:p>
         </p:txBody>
@@ -1056,12 +1633,57 @@
           </a:p>
           <a:p xmlns:a="http://schemas.openxmlformats.org/drawingml/2006/main">
             <a:r>
+              <a:t>Edition: 2026-09-09</a:t>
+            </a:r>
+          </a:p>
+          <a:p xmlns:a="http://schemas.openxmlformats.org/drawingml/2006/main">
+            <a:r>
+              <a:t/>
+            </a:r>
+          </a:p>
+          <a:p xmlns:a="http://schemas.openxmlformats.org/drawingml/2006/main">
+            <a:r>
               <a:t>[Sources]</a:t>
             </a:r>
           </a:p>
           <a:p xmlns:a="http://schemas.openxmlformats.org/drawingml/2006/main">
             <a:r>
-              <a:t>- Supplied source presentation: 10-reasoning-planning.pdf</a:t>
+              <a:t>- Original source presentation: 10-reasoning-planning.pdf</a:t>
+            </a:r>
+          </a:p>
+          <a:p xmlns:a="http://schemas.openxmlformats.org/drawingml/2006/main">
+            <a:r>
+              <a:t>- P3: Would this change your answer?. Anthropic/Fellows preprint, arXiv v1, 2026-08-17. https://arxiv.org/abs/2608.16747 CHIVE tests counterfactual prompt changes. Generated explanations remain hypotheses. Official post: August 21.</a:t>
+            </a:r>
+          </a:p>
+          <a:p xmlns:a="http://schemas.openxmlformats.org/drawingml/2006/main">
+            <a:r>
+              <a:t>- R1: Patterns and problems in emerging multiagent systems. Anthropic research post, 2026-08-13. https://www.anthropic.com/research/multiagent-systems Controlled coordination experiments. Compare scope and budgets before interpreting the findings.</a:t>
+            </a:r>
+          </a:p>
+          <a:p xmlns:a="http://schemas.openxmlformats.org/drawingml/2006/main">
+            <a:r>
+              <a:t/>
+            </a:r>
+          </a:p>
+          <a:p xmlns:a="http://schemas.openxmlformats.org/drawingml/2006/main">
+            <a:r>
+              <a:t>[Assessed practice]</a:t>
+            </a:r>
+          </a:p>
+          <a:p xmlns:a="http://schemas.openxmlformats.org/drawingml/2006/main">
+            <a:r>
+              <a:t>Use Lab 7's paired inputs to test a prediction about a misleading cue. Propose an equal-budget comparison with voting and identify a shared-error failure case.</a:t>
+            </a:r>
+          </a:p>
+          <a:p xmlns:a="http://schemas.openxmlformats.org/drawingml/2006/main">
+            <a:r>
+              <a:t>Acceptance: Keep predictions, observations, and interpretations separate. State the limits of a small experiment.</a:t>
+            </a:r>
+          </a:p>
+          <a:p xmlns:a="http://schemas.openxmlformats.org/drawingml/2006/main">
+            <a:r>
+              <a:t>Lab: labs/07_agents_sdk_evaluation.ipynb</a:t>
             </a:r>
           </a:p>
         </p:txBody>
@@ -1141,12 +1763,57 @@
           </a:p>
           <a:p xmlns:a="http://schemas.openxmlformats.org/drawingml/2006/main">
             <a:r>
+              <a:t>Edition: 2026-09-09</a:t>
+            </a:r>
+          </a:p>
+          <a:p xmlns:a="http://schemas.openxmlformats.org/drawingml/2006/main">
+            <a:r>
+              <a:t/>
+            </a:r>
+          </a:p>
+          <a:p xmlns:a="http://schemas.openxmlformats.org/drawingml/2006/main">
+            <a:r>
               <a:t>[Sources]</a:t>
             </a:r>
           </a:p>
           <a:p xmlns:a="http://schemas.openxmlformats.org/drawingml/2006/main">
             <a:r>
-              <a:t>- Supplied source presentation: 10-reasoning-planning.pdf</a:t>
+              <a:t>- Original source presentation: 10-reasoning-planning.pdf</a:t>
+            </a:r>
+          </a:p>
+          <a:p xmlns:a="http://schemas.openxmlformats.org/drawingml/2006/main">
+            <a:r>
+              <a:t>- P3: Would this change your answer?. Anthropic/Fellows preprint, arXiv v1, 2026-08-17. https://arxiv.org/abs/2608.16747 CHIVE tests counterfactual prompt changes. Generated explanations remain hypotheses. Official post: August 21.</a:t>
+            </a:r>
+          </a:p>
+          <a:p xmlns:a="http://schemas.openxmlformats.org/drawingml/2006/main">
+            <a:r>
+              <a:t>- R1: Patterns and problems in emerging multiagent systems. Anthropic research post, 2026-08-13. https://www.anthropic.com/research/multiagent-systems Controlled coordination experiments. Compare scope and budgets before interpreting the findings.</a:t>
+            </a:r>
+          </a:p>
+          <a:p xmlns:a="http://schemas.openxmlformats.org/drawingml/2006/main">
+            <a:r>
+              <a:t/>
+            </a:r>
+          </a:p>
+          <a:p xmlns:a="http://schemas.openxmlformats.org/drawingml/2006/main">
+            <a:r>
+              <a:t>[Assessed practice]</a:t>
+            </a:r>
+          </a:p>
+          <a:p xmlns:a="http://schemas.openxmlformats.org/drawingml/2006/main">
+            <a:r>
+              <a:t>Use Lab 7's paired inputs to test a prediction about a misleading cue. Propose an equal-budget comparison with voting and identify a shared-error failure case.</a:t>
+            </a:r>
+          </a:p>
+          <a:p xmlns:a="http://schemas.openxmlformats.org/drawingml/2006/main">
+            <a:r>
+              <a:t>Acceptance: Keep predictions, observations, and interpretations separate. State the limits of a small experiment.</a:t>
+            </a:r>
+          </a:p>
+          <a:p xmlns:a="http://schemas.openxmlformats.org/drawingml/2006/main">
+            <a:r>
+              <a:t>Lab: labs/07_agents_sdk_evaluation.ipynb</a:t>
             </a:r>
           </a:p>
         </p:txBody>
@@ -1216,7 +1883,7 @@
           <a:lstStyle xmlns:a="http://schemas.openxmlformats.org/drawingml/2006/main"/>
           <a:p xmlns:a="http://schemas.openxmlformats.org/drawingml/2006/main">
             <a:r>
-              <a:t>Use as retrieval practice. Ask for an answer that defines, compares, traces, and evaluates.</a:t>
+              <a:t>Explain the claim first, then use the numbered points as evidence and design consequences.</a:t>
             </a:r>
           </a:p>
           <a:p xmlns:a="http://schemas.openxmlformats.org/drawingml/2006/main">
@@ -1226,12 +1893,57 @@
           </a:p>
           <a:p xmlns:a="http://schemas.openxmlformats.org/drawingml/2006/main">
             <a:r>
+              <a:t>Edition: 2026-09-09</a:t>
+            </a:r>
+          </a:p>
+          <a:p xmlns:a="http://schemas.openxmlformats.org/drawingml/2006/main">
+            <a:r>
+              <a:t/>
+            </a:r>
+          </a:p>
+          <a:p xmlns:a="http://schemas.openxmlformats.org/drawingml/2006/main">
+            <a:r>
               <a:t>[Sources]</a:t>
             </a:r>
           </a:p>
           <a:p xmlns:a="http://schemas.openxmlformats.org/drawingml/2006/main">
             <a:r>
-              <a:t>- Supplied source presentation: 10-reasoning-planning.pdf</a:t>
+              <a:t>- Original source presentation: 10-reasoning-planning.pdf</a:t>
+            </a:r>
+          </a:p>
+          <a:p xmlns:a="http://schemas.openxmlformats.org/drawingml/2006/main">
+            <a:r>
+              <a:t>- P3: Would this change your answer?. Anthropic/Fellows preprint, arXiv v1, 2026-08-17. https://arxiv.org/abs/2608.16747 CHIVE tests counterfactual prompt changes. Generated explanations remain hypotheses. Official post: August 21.</a:t>
+            </a:r>
+          </a:p>
+          <a:p xmlns:a="http://schemas.openxmlformats.org/drawingml/2006/main">
+            <a:r>
+              <a:t>- R1: Patterns and problems in emerging multiagent systems. Anthropic research post, 2026-08-13. https://www.anthropic.com/research/multiagent-systems Controlled coordination experiments. Compare scope and budgets before interpreting the findings.</a:t>
+            </a:r>
+          </a:p>
+          <a:p xmlns:a="http://schemas.openxmlformats.org/drawingml/2006/main">
+            <a:r>
+              <a:t/>
+            </a:r>
+          </a:p>
+          <a:p xmlns:a="http://schemas.openxmlformats.org/drawingml/2006/main">
+            <a:r>
+              <a:t>[Assessed practice]</a:t>
+            </a:r>
+          </a:p>
+          <a:p xmlns:a="http://schemas.openxmlformats.org/drawingml/2006/main">
+            <a:r>
+              <a:t>Use Lab 7's paired inputs to test a prediction about a misleading cue. Propose an equal-budget comparison with voting and identify a shared-error failure case.</a:t>
+            </a:r>
+          </a:p>
+          <a:p xmlns:a="http://schemas.openxmlformats.org/drawingml/2006/main">
+            <a:r>
+              <a:t>Acceptance: Keep predictions, observations, and interpretations separate. State the limits of a small experiment.</a:t>
+            </a:r>
+          </a:p>
+          <a:p xmlns:a="http://schemas.openxmlformats.org/drawingml/2006/main">
+            <a:r>
+              <a:t>Lab: labs/07_agents_sdk_evaluation.ipynb</a:t>
             </a:r>
           </a:p>
         </p:txBody>
@@ -1299,7 +2011,7 @@
   </p:cSld>
   <p:clrMap bg1="lt1" tx1="dk1" bg2="lt2" tx2="dk2" accent1="accent1" accent2="accent2" accent3="accent3" accent4="accent4" accent5="accent5" accent6="accent6" hlink="hlink" folHlink="folHlink"/>
   <p:sldLayoutIdLst>
-    <p:sldLayoutId xmlns:r="http://schemas.openxmlformats.org/officeDocument/2006/relationships" id="2147483649" r:id="R736e786f9eb24b5d"/>
+    <p:sldLayoutId xmlns:r="http://schemas.openxmlformats.org/officeDocument/2006/relationships" id="2147483649" r:id="Rd0622ef29fb14f53"/>
   </p:sldLayoutIdLst>
   <p:txStyles>
     <p:titleStyle>
@@ -1850,7 +2562,7 @@
           <p:cNvPr id="8" name="title-accent">
             <a:extLst xmlns:a="http://schemas.openxmlformats.org/drawingml/2006/main">
               <a:ext uri="{FF2B5EF4-FFF2-40B4-BE49-F238E27FC236}">
-                <a16:creationId xmlns:a16="http://schemas.microsoft.com/office/drawing/2014/main" id="{3BB370DB-6D63-4F35-B595-EBD2FFFE9306}"/>
+                <a16:creationId xmlns:a16="http://schemas.microsoft.com/office/drawing/2014/main" id="{FFC48430-2A78-4A0D-A56D-70DADB29ED98}"/>
               </a:ext>
             </a:extLst>
           </p:cNvPr>
@@ -1883,7 +2595,7 @@
           <p:cNvPr id="2" name="course-title">
             <a:extLst xmlns:a="http://schemas.openxmlformats.org/drawingml/2006/main">
               <a:ext uri="{FF2B5EF4-FFF2-40B4-BE49-F238E27FC236}">
-                <a16:creationId xmlns:a16="http://schemas.microsoft.com/office/drawing/2014/main" id="{AFFEC009-6214-4D4F-8306-46FC6273D3D4}"/>
+                <a16:creationId xmlns:a16="http://schemas.microsoft.com/office/drawing/2014/main" id="{ACCCBAEE-9966-42A4-AF41-1962951A5FFF}"/>
               </a:ext>
             </a:extLst>
           </p:cNvPr>
@@ -1941,7 +2653,7 @@
           <p:cNvPr id="3" name="chapter-number">
             <a:extLst xmlns:a="http://schemas.openxmlformats.org/drawingml/2006/main">
               <a:ext uri="{FF2B5EF4-FFF2-40B4-BE49-F238E27FC236}">
-                <a16:creationId xmlns:a16="http://schemas.microsoft.com/office/drawing/2014/main" id="{65EB9EF8-79A7-46D3-B0A0-FE0CACE54B79}"/>
+                <a16:creationId xmlns:a16="http://schemas.microsoft.com/office/drawing/2014/main" id="{129196B9-71BF-4125-BECF-8EA87C76D489}"/>
               </a:ext>
             </a:extLst>
           </p:cNvPr>
@@ -1999,7 +2711,7 @@
           <p:cNvPr id="4" name="deck-title">
             <a:extLst xmlns:a="http://schemas.openxmlformats.org/drawingml/2006/main">
               <a:ext uri="{FF2B5EF4-FFF2-40B4-BE49-F238E27FC236}">
-                <a16:creationId xmlns:a16="http://schemas.microsoft.com/office/drawing/2014/main" id="{0108653F-AD57-4E17-BECD-04FA43A72861}"/>
+                <a16:creationId xmlns:a16="http://schemas.microsoft.com/office/drawing/2014/main" id="{D7FC1299-6F1B-4AC0-BF15-3900F4A159A8}"/>
               </a:ext>
             </a:extLst>
           </p:cNvPr>
@@ -2057,7 +2769,7 @@
           <p:cNvPr id="5" name="deck-thesis">
             <a:extLst xmlns:a="http://schemas.openxmlformats.org/drawingml/2006/main">
               <a:ext uri="{FF2B5EF4-FFF2-40B4-BE49-F238E27FC236}">
-                <a16:creationId xmlns:a16="http://schemas.microsoft.com/office/drawing/2014/main" id="{B0FC7010-51B3-447F-85DA-FF9AD8CE70E0}"/>
+                <a16:creationId xmlns:a16="http://schemas.microsoft.com/office/drawing/2014/main" id="{13236BEE-BF8E-4C77-8980-82FDF48AAEF6}"/>
               </a:ext>
             </a:extLst>
           </p:cNvPr>
@@ -2115,7 +2827,7 @@
           <p:cNvPr id="6" name="title-marker">
             <a:extLst xmlns:a="http://schemas.openxmlformats.org/drawingml/2006/main">
               <a:ext uri="{FF2B5EF4-FFF2-40B4-BE49-F238E27FC236}">
-                <a16:creationId xmlns:a16="http://schemas.microsoft.com/office/drawing/2014/main" id="{45199CD5-69AE-4C88-AD2F-3EF69611FC39}"/>
+                <a16:creationId xmlns:a16="http://schemas.microsoft.com/office/drawing/2014/main" id="{CF41F053-A9A5-48A8-8220-CD4DA5B4331A}"/>
               </a:ext>
             </a:extLst>
           </p:cNvPr>
@@ -2148,7 +2860,7 @@
           <p:cNvPr id="7" name="title-marker-text">
             <a:extLst xmlns:a="http://schemas.openxmlformats.org/drawingml/2006/main">
               <a:ext uri="{FF2B5EF4-FFF2-40B4-BE49-F238E27FC236}">
-                <a16:creationId xmlns:a16="http://schemas.microsoft.com/office/drawing/2014/main" id="{31343D8E-CFBF-42FB-9B37-FD286BE2F0E0}"/>
+                <a16:creationId xmlns:a16="http://schemas.microsoft.com/office/drawing/2014/main" id="{744FE535-3F9B-4CB0-827C-78BEB17C58D0}"/>
               </a:ext>
             </a:extLst>
           </p:cNvPr>
@@ -2227,7 +2939,7 @@
     </p:spTree>
     <p:extLst>
       <p:ext uri="{BB962C8B-B14F-4D97-AF65-F5344CB8AC3E}">
-        <p14:creationId xmlns:p14="http://schemas.microsoft.com/office/powerpoint/2010/main" val="1885411092"/>
+        <p14:creationId xmlns:p14="http://schemas.microsoft.com/office/powerpoint/2010/main" val="342396339"/>
       </p:ext>
     </p:extLst>
   </p:cSld>
@@ -2235,6 +2947,996 @@
 </file>
 
 <file path=ppt/slides/slide10.xml><?xml version="1.0" encoding="utf-8"?>
+<p:sld xmlns:p="http://schemas.openxmlformats.org/presentationml/2006/main">
+  <p:cSld>
+    <p:bg>
+      <p:bgPr>
+        <a:solidFill xmlns:a="http://schemas.openxmlformats.org/drawingml/2006/main">
+          <a:srgbClr val="FFFFFF"/>
+        </a:solidFill>
+      </p:bgPr>
+    </p:bg>
+    <p:spTree>
+      <p:nvGrpSpPr>
+        <p:cNvPr id="1" name=""/>
+        <p:cNvGrpSpPr/>
+        <p:nvPr/>
+      </p:nvGrpSpPr>
+      <p:grpSpPr>
+        <a:xfrm xmlns:a="http://schemas.openxmlformats.org/drawingml/2006/main"/>
+      </p:grpSpPr>
+      <p:sp>
+        <p:nvSpPr>
+          <p:cNvPr id="18" name="accent-line">
+            <a:extLst xmlns:a="http://schemas.openxmlformats.org/drawingml/2006/main">
+              <a:ext uri="{FF2B5EF4-FFF2-40B4-BE49-F238E27FC236}">
+                <a16:creationId xmlns:a16="http://schemas.microsoft.com/office/drawing/2014/main" id="{732CDA59-BC79-4197-8EB6-177FA50CEA9D}"/>
+              </a:ext>
+            </a:extLst>
+          </p:cNvPr>
+          <p:cNvSpPr>
+            <a:spLocks xmlns:a="http://schemas.openxmlformats.org/drawingml/2006/main" noGrp="1"/>
+          </p:cNvSpPr>
+          <p:nvPr/>
+        </p:nvSpPr>
+        <p:spPr>
+          <a:xfrm xmlns:a="http://schemas.openxmlformats.org/drawingml/2006/main">
+            <a:off x="390525" y="304800"/>
+            <a:ext cx="11410950" cy="66675"/>
+          </a:xfrm>
+          <a:prstGeom xmlns:a="http://schemas.openxmlformats.org/drawingml/2006/main" prst="rect">
+            <a:avLst/>
+          </a:prstGeom>
+          <a:solidFill xmlns:a="http://schemas.openxmlformats.org/drawingml/2006/main">
+            <a:srgbClr val="FFB45E"/>
+          </a:solidFill>
+          <a:ln xmlns:a="http://schemas.openxmlformats.org/drawingml/2006/main" w="0">
+            <a:solidFill>
+              <a:srgbClr val="FFB45E"/>
+            </a:solidFill>
+            <a:prstDash val="solid"/>
+          </a:ln>
+        </p:spPr>
+      </p:sp>
+      <p:sp>
+        <p:nvSpPr>
+          <p:cNvPr id="2" name="chapter-label">
+            <a:extLst xmlns:a="http://schemas.openxmlformats.org/drawingml/2006/main">
+              <a:ext uri="{FF2B5EF4-FFF2-40B4-BE49-F238E27FC236}">
+                <a16:creationId xmlns:a16="http://schemas.microsoft.com/office/drawing/2014/main" id="{839F347F-93A8-484D-98F0-E232D24F76DF}"/>
+              </a:ext>
+            </a:extLst>
+          </p:cNvPr>
+          <p:cNvSpPr>
+            <a:spLocks xmlns:a="http://schemas.openxmlformats.org/drawingml/2006/main" noGrp="1"/>
+          </p:cNvSpPr>
+          <p:nvPr/>
+        </p:nvSpPr>
+        <p:spPr>
+          <a:xfrm xmlns:a="http://schemas.openxmlformats.org/drawingml/2006/main">
+            <a:off x="390525" y="466725"/>
+            <a:ext cx="4953000" cy="323850"/>
+          </a:xfrm>
+          <a:prstGeom xmlns:a="http://schemas.openxmlformats.org/drawingml/2006/main" prst="rect">
+            <a:avLst/>
+          </a:prstGeom>
+          <a:noFill xmlns:a="http://schemas.openxmlformats.org/drawingml/2006/main"/>
+          <a:ln xmlns:a="http://schemas.openxmlformats.org/drawingml/2006/main" w="0">
+            <a:noFill/>
+            <a:prstDash val="solid"/>
+          </a:ln>
+        </p:spPr>
+        <p:txBody>
+          <a:bodyPr xmlns:a="http://schemas.openxmlformats.org/drawingml/2006/main" anchor="t">
+            <a:noAutofit/>
+          </a:bodyPr>
+          <a:lstStyle xmlns:a="http://schemas.openxmlformats.org/drawingml/2006/main"/>
+          <a:p xmlns:a="http://schemas.openxmlformats.org/drawingml/2006/main">
+            <a:pPr algn="l">
+              <a:defRPr sz="1275" b="1">
+                <a:solidFill>
+                  <a:srgbClr val="5B5B57"/>
+                </a:solidFill>
+                <a:latin typeface="Helvetica Neue"/>
+                <a:ea typeface="Helvetica Neue"/>
+                <a:cs typeface="Helvetica Neue"/>
+              </a:defRPr>
+            </a:pPr>
+            <a:r>
+              <a:rPr sz="1275" b="1">
+                <a:solidFill>
+                  <a:srgbClr val="5B5B57"/>
+                </a:solidFill>
+                <a:latin typeface="Helvetica Neue"/>
+                <a:ea typeface="Helvetica Neue"/>
+                <a:cs typeface="Helvetica Neue"/>
+              </a:rPr>
+              <a:t>EXAM CHECK  /  10</a:t>
+            </a:r>
+          </a:p>
+        </p:txBody>
+      </p:sp>
+      <p:sp>
+        <p:nvSpPr>
+          <p:cNvPr id="3" name="slide-number">
+            <a:extLst xmlns:a="http://schemas.openxmlformats.org/drawingml/2006/main">
+              <a:ext uri="{FF2B5EF4-FFF2-40B4-BE49-F238E27FC236}">
+                <a16:creationId xmlns:a16="http://schemas.microsoft.com/office/drawing/2014/main" id="{30C1B302-837A-429B-B7CD-A969CFEBFEE5}"/>
+              </a:ext>
+            </a:extLst>
+          </p:cNvPr>
+          <p:cNvSpPr>
+            <a:spLocks xmlns:a="http://schemas.openxmlformats.org/drawingml/2006/main" noGrp="1"/>
+          </p:cNvSpPr>
+          <p:nvPr/>
+        </p:nvSpPr>
+        <p:spPr>
+          <a:xfrm xmlns:a="http://schemas.openxmlformats.org/drawingml/2006/main">
+            <a:off x="11049000" y="6286500"/>
+            <a:ext cx="742950" cy="266700"/>
+          </a:xfrm>
+          <a:prstGeom xmlns:a="http://schemas.openxmlformats.org/drawingml/2006/main" prst="rect">
+            <a:avLst/>
+          </a:prstGeom>
+          <a:noFill xmlns:a="http://schemas.openxmlformats.org/drawingml/2006/main"/>
+          <a:ln xmlns:a="http://schemas.openxmlformats.org/drawingml/2006/main" w="0">
+            <a:noFill/>
+            <a:prstDash val="solid"/>
+          </a:ln>
+        </p:spPr>
+        <p:txBody>
+          <a:bodyPr xmlns:a="http://schemas.openxmlformats.org/drawingml/2006/main" anchor="t">
+            <a:noAutofit/>
+          </a:bodyPr>
+          <a:lstStyle xmlns:a="http://schemas.openxmlformats.org/drawingml/2006/main"/>
+          <a:p xmlns:a="http://schemas.openxmlformats.org/drawingml/2006/main">
+            <a:pPr algn="r">
+              <a:defRPr sz="1200" b="0">
+                <a:solidFill>
+                  <a:srgbClr val="5B5B57"/>
+                </a:solidFill>
+                <a:latin typeface="Helvetica Neue"/>
+                <a:ea typeface="Helvetica Neue"/>
+                <a:cs typeface="Helvetica Neue"/>
+              </a:defRPr>
+            </a:pPr>
+            <a:r>
+              <a:rPr sz="1200" b="0">
+                <a:solidFill>
+                  <a:srgbClr val="5B5B57"/>
+                </a:solidFill>
+                <a:latin typeface="Helvetica Neue"/>
+                <a:ea typeface="Helvetica Neue"/>
+                <a:cs typeface="Helvetica Neue"/>
+              </a:rPr>
+              <a:t>10</a:t>
+            </a:r>
+          </a:p>
+        </p:txBody>
+      </p:sp>
+      <p:sp>
+        <p:nvSpPr>
+          <p:cNvPr id="4" name="chapter-footer">
+            <a:extLst xmlns:a="http://schemas.openxmlformats.org/drawingml/2006/main">
+              <a:ext uri="{FF2B5EF4-FFF2-40B4-BE49-F238E27FC236}">
+                <a16:creationId xmlns:a16="http://schemas.microsoft.com/office/drawing/2014/main" id="{D8A54CC4-CE3C-43BB-9D9B-9CA22F00B4FF}"/>
+              </a:ext>
+            </a:extLst>
+          </p:cNvPr>
+          <p:cNvSpPr>
+            <a:spLocks xmlns:a="http://schemas.openxmlformats.org/drawingml/2006/main" noGrp="1"/>
+          </p:cNvSpPr>
+          <p:nvPr/>
+        </p:nvSpPr>
+        <p:spPr>
+          <a:xfrm xmlns:a="http://schemas.openxmlformats.org/drawingml/2006/main">
+            <a:off x="390525" y="6286500"/>
+            <a:ext cx="8191500" cy="266700"/>
+          </a:xfrm>
+          <a:prstGeom xmlns:a="http://schemas.openxmlformats.org/drawingml/2006/main" prst="rect">
+            <a:avLst/>
+          </a:prstGeom>
+          <a:noFill xmlns:a="http://schemas.openxmlformats.org/drawingml/2006/main"/>
+          <a:ln xmlns:a="http://schemas.openxmlformats.org/drawingml/2006/main" w="0">
+            <a:noFill/>
+            <a:prstDash val="solid"/>
+          </a:ln>
+        </p:spPr>
+        <p:txBody>
+          <a:bodyPr xmlns:a="http://schemas.openxmlformats.org/drawingml/2006/main" anchor="t">
+            <a:noAutofit/>
+          </a:bodyPr>
+          <a:lstStyle xmlns:a="http://schemas.openxmlformats.org/drawingml/2006/main"/>
+          <a:p xmlns:a="http://schemas.openxmlformats.org/drawingml/2006/main">
+            <a:pPr algn="l">
+              <a:defRPr sz="1125" b="0">
+                <a:solidFill>
+                  <a:srgbClr val="5B5B57"/>
+                </a:solidFill>
+                <a:latin typeface="Helvetica Neue"/>
+                <a:ea typeface="Helvetica Neue"/>
+                <a:cs typeface="Helvetica Neue"/>
+              </a:defRPr>
+            </a:pPr>
+            <a:r>
+              <a:rPr sz="1125" b="0">
+                <a:solidFill>
+                  <a:srgbClr val="5B5B57"/>
+                </a:solidFill>
+                <a:latin typeface="Helvetica Neue"/>
+                <a:ea typeface="Helvetica Neue"/>
+                <a:cs typeface="Helvetica Neue"/>
+              </a:rPr>
+              <a:t>Advanced Reasoning and Planning</a:t>
+            </a:r>
+          </a:p>
+        </p:txBody>
+      </p:sp>
+      <p:sp>
+        <p:nvSpPr>
+          <p:cNvPr id="5" name="exam-title">
+            <a:extLst xmlns:a="http://schemas.openxmlformats.org/drawingml/2006/main">
+              <a:ext uri="{FF2B5EF4-FFF2-40B4-BE49-F238E27FC236}">
+                <a16:creationId xmlns:a16="http://schemas.microsoft.com/office/drawing/2014/main" id="{1BF0E7D5-BE7A-4CE2-A9B4-4347F10F5471}"/>
+              </a:ext>
+            </a:extLst>
+          </p:cNvPr>
+          <p:cNvSpPr>
+            <a:spLocks xmlns:a="http://schemas.openxmlformats.org/drawingml/2006/main" noGrp="1"/>
+          </p:cNvSpPr>
+          <p:nvPr/>
+        </p:nvSpPr>
+        <p:spPr>
+          <a:xfrm xmlns:a="http://schemas.openxmlformats.org/drawingml/2006/main">
+            <a:off x="390525" y="981075"/>
+            <a:ext cx="10668000" cy="781050"/>
+          </a:xfrm>
+          <a:prstGeom xmlns:a="http://schemas.openxmlformats.org/drawingml/2006/main" prst="rect">
+            <a:avLst/>
+          </a:prstGeom>
+          <a:noFill xmlns:a="http://schemas.openxmlformats.org/drawingml/2006/main"/>
+          <a:ln xmlns:a="http://schemas.openxmlformats.org/drawingml/2006/main" w="0">
+            <a:noFill/>
+            <a:prstDash val="solid"/>
+          </a:ln>
+        </p:spPr>
+        <p:txBody>
+          <a:bodyPr xmlns:a="http://schemas.openxmlformats.org/drawingml/2006/main" anchor="t">
+            <a:noAutofit/>
+          </a:bodyPr>
+          <a:lstStyle xmlns:a="http://schemas.openxmlformats.org/drawingml/2006/main"/>
+          <a:p xmlns:a="http://schemas.openxmlformats.org/drawingml/2006/main">
+            <a:pPr algn="l">
+              <a:defRPr sz="3150" b="1">
+                <a:solidFill>
+                  <a:srgbClr val="111111"/>
+                </a:solidFill>
+                <a:latin typeface="Helvetica Neue"/>
+                <a:ea typeface="Helvetica Neue"/>
+                <a:cs typeface="Helvetica Neue"/>
+              </a:defRPr>
+            </a:pPr>
+            <a:r>
+              <a:rPr sz="3150" b="1">
+                <a:solidFill>
+                  <a:srgbClr val="111111"/>
+                </a:solidFill>
+                <a:latin typeface="Helvetica Neue"/>
+                <a:ea typeface="Helvetica Neue"/>
+                <a:cs typeface="Helvetica Neue"/>
+              </a:rPr>
+              <a:t>Can you answer these without notes?</a:t>
+            </a:r>
+          </a:p>
+        </p:txBody>
+      </p:sp>
+      <p:sp>
+        <p:nvSpPr>
+          <p:cNvPr id="6" name="exam-number-1">
+            <a:extLst xmlns:a="http://schemas.openxmlformats.org/drawingml/2006/main">
+              <a:ext uri="{FF2B5EF4-FFF2-40B4-BE49-F238E27FC236}">
+                <a16:creationId xmlns:a16="http://schemas.microsoft.com/office/drawing/2014/main" id="{7F343BEC-35E8-4935-B698-D943786AEDBC}"/>
+              </a:ext>
+            </a:extLst>
+          </p:cNvPr>
+          <p:cNvSpPr>
+            <a:spLocks xmlns:a="http://schemas.openxmlformats.org/drawingml/2006/main" noGrp="1"/>
+          </p:cNvSpPr>
+          <p:nvPr/>
+        </p:nvSpPr>
+        <p:spPr>
+          <a:xfrm xmlns:a="http://schemas.openxmlformats.org/drawingml/2006/main">
+            <a:off x="390525" y="2238375"/>
+            <a:ext cx="590550" cy="400050"/>
+          </a:xfrm>
+          <a:prstGeom xmlns:a="http://schemas.openxmlformats.org/drawingml/2006/main" prst="rect">
+            <a:avLst/>
+          </a:prstGeom>
+          <a:noFill xmlns:a="http://schemas.openxmlformats.org/drawingml/2006/main"/>
+          <a:ln xmlns:a="http://schemas.openxmlformats.org/drawingml/2006/main" w="0">
+            <a:noFill/>
+            <a:prstDash val="solid"/>
+          </a:ln>
+        </p:spPr>
+        <p:txBody>
+          <a:bodyPr xmlns:a="http://schemas.openxmlformats.org/drawingml/2006/main" anchor="t">
+            <a:noAutofit/>
+          </a:bodyPr>
+          <a:lstStyle xmlns:a="http://schemas.openxmlformats.org/drawingml/2006/main"/>
+          <a:p xmlns:a="http://schemas.openxmlformats.org/drawingml/2006/main">
+            <a:pPr algn="l">
+              <a:defRPr sz="1725" b="1">
+                <a:solidFill>
+                  <a:srgbClr val="FFB45E"/>
+                </a:solidFill>
+                <a:latin typeface="Helvetica Neue"/>
+                <a:ea typeface="Helvetica Neue"/>
+                <a:cs typeface="Helvetica Neue"/>
+              </a:defRPr>
+            </a:pPr>
+            <a:r>
+              <a:rPr sz="1725" b="1">
+                <a:solidFill>
+                  <a:srgbClr val="FFB45E"/>
+                </a:solidFill>
+                <a:latin typeface="Helvetica Neue"/>
+                <a:ea typeface="Helvetica Neue"/>
+                <a:cs typeface="Helvetica Neue"/>
+              </a:rPr>
+              <a:t>01</a:t>
+            </a:r>
+          </a:p>
+        </p:txBody>
+      </p:sp>
+      <p:sp>
+        <p:nvSpPr>
+          <p:cNvPr id="7" name="exam-question-1">
+            <a:extLst xmlns:a="http://schemas.openxmlformats.org/drawingml/2006/main">
+              <a:ext uri="{FF2B5EF4-FFF2-40B4-BE49-F238E27FC236}">
+                <a16:creationId xmlns:a16="http://schemas.microsoft.com/office/drawing/2014/main" id="{88726562-8C59-433A-8312-C8F57BB34272}"/>
+              </a:ext>
+            </a:extLst>
+          </p:cNvPr>
+          <p:cNvSpPr>
+            <a:spLocks xmlns:a="http://schemas.openxmlformats.org/drawingml/2006/main" noGrp="1"/>
+          </p:cNvSpPr>
+          <p:nvPr/>
+        </p:nvSpPr>
+        <p:spPr>
+          <a:xfrm xmlns:a="http://schemas.openxmlformats.org/drawingml/2006/main">
+            <a:off x="1076325" y="2238375"/>
+            <a:ext cx="4762500" cy="895350"/>
+          </a:xfrm>
+          <a:prstGeom xmlns:a="http://schemas.openxmlformats.org/drawingml/2006/main" prst="rect">
+            <a:avLst/>
+          </a:prstGeom>
+          <a:noFill xmlns:a="http://schemas.openxmlformats.org/drawingml/2006/main"/>
+          <a:ln xmlns:a="http://schemas.openxmlformats.org/drawingml/2006/main" w="0">
+            <a:noFill/>
+            <a:prstDash val="solid"/>
+          </a:ln>
+        </p:spPr>
+        <p:txBody>
+          <a:bodyPr xmlns:a="http://schemas.openxmlformats.org/drawingml/2006/main" anchor="t">
+            <a:normAutofit fontScale="100000"/>
+          </a:bodyPr>
+          <a:lstStyle xmlns:a="http://schemas.openxmlformats.org/drawingml/2006/main"/>
+          <a:p xmlns:a="http://schemas.openxmlformats.org/drawingml/2006/main">
+            <a:pPr algn="l">
+              <a:defRPr sz="1575" b="1">
+                <a:solidFill>
+                  <a:srgbClr val="111111"/>
+                </a:solidFill>
+                <a:latin typeface="Helvetica Neue"/>
+                <a:ea typeface="Helvetica Neue"/>
+                <a:cs typeface="Helvetica Neue"/>
+              </a:defRPr>
+            </a:pPr>
+            <a:r>
+              <a:rPr sz="1575" b="1">
+                <a:solidFill>
+                  <a:srgbClr val="111111"/>
+                </a:solidFill>
+                <a:latin typeface="Helvetica Neue"/>
+                <a:ea typeface="Helvetica Neue"/>
+                <a:cs typeface="Helvetica Neue"/>
+              </a:rPr>
+              <a:t>Compare chain-of-thought and self-consistency.</a:t>
+            </a:r>
+          </a:p>
+        </p:txBody>
+      </p:sp>
+      <p:sp>
+        <p:nvSpPr>
+          <p:cNvPr id="8" name="exam-number-2">
+            <a:extLst xmlns:a="http://schemas.openxmlformats.org/drawingml/2006/main">
+              <a:ext uri="{FF2B5EF4-FFF2-40B4-BE49-F238E27FC236}">
+                <a16:creationId xmlns:a16="http://schemas.microsoft.com/office/drawing/2014/main" id="{5C6E3F58-E6FC-4A80-B4DE-8C0D2DB8C17E}"/>
+              </a:ext>
+            </a:extLst>
+          </p:cNvPr>
+          <p:cNvSpPr>
+            <a:spLocks xmlns:a="http://schemas.openxmlformats.org/drawingml/2006/main" noGrp="1"/>
+          </p:cNvSpPr>
+          <p:nvPr/>
+        </p:nvSpPr>
+        <p:spPr>
+          <a:xfrm xmlns:a="http://schemas.openxmlformats.org/drawingml/2006/main">
+            <a:off x="6191250" y="2238375"/>
+            <a:ext cx="590550" cy="400050"/>
+          </a:xfrm>
+          <a:prstGeom xmlns:a="http://schemas.openxmlformats.org/drawingml/2006/main" prst="rect">
+            <a:avLst/>
+          </a:prstGeom>
+          <a:noFill xmlns:a="http://schemas.openxmlformats.org/drawingml/2006/main"/>
+          <a:ln xmlns:a="http://schemas.openxmlformats.org/drawingml/2006/main" w="0">
+            <a:noFill/>
+            <a:prstDash val="solid"/>
+          </a:ln>
+        </p:spPr>
+        <p:txBody>
+          <a:bodyPr xmlns:a="http://schemas.openxmlformats.org/drawingml/2006/main" anchor="t">
+            <a:noAutofit/>
+          </a:bodyPr>
+          <a:lstStyle xmlns:a="http://schemas.openxmlformats.org/drawingml/2006/main"/>
+          <a:p xmlns:a="http://schemas.openxmlformats.org/drawingml/2006/main">
+            <a:pPr algn="l">
+              <a:defRPr sz="1725" b="1">
+                <a:solidFill>
+                  <a:srgbClr val="FFB45E"/>
+                </a:solidFill>
+                <a:latin typeface="Helvetica Neue"/>
+                <a:ea typeface="Helvetica Neue"/>
+                <a:cs typeface="Helvetica Neue"/>
+              </a:defRPr>
+            </a:pPr>
+            <a:r>
+              <a:rPr sz="1725" b="1">
+                <a:solidFill>
+                  <a:srgbClr val="FFB45E"/>
+                </a:solidFill>
+                <a:latin typeface="Helvetica Neue"/>
+                <a:ea typeface="Helvetica Neue"/>
+                <a:cs typeface="Helvetica Neue"/>
+              </a:rPr>
+              <a:t>02</a:t>
+            </a:r>
+          </a:p>
+        </p:txBody>
+      </p:sp>
+      <p:sp>
+        <p:nvSpPr>
+          <p:cNvPr id="9" name="exam-question-2">
+            <a:extLst xmlns:a="http://schemas.openxmlformats.org/drawingml/2006/main">
+              <a:ext uri="{FF2B5EF4-FFF2-40B4-BE49-F238E27FC236}">
+                <a16:creationId xmlns:a16="http://schemas.microsoft.com/office/drawing/2014/main" id="{449E079B-A23A-4CEB-B4BC-F139AE8B3E01}"/>
+              </a:ext>
+            </a:extLst>
+          </p:cNvPr>
+          <p:cNvSpPr>
+            <a:spLocks xmlns:a="http://schemas.openxmlformats.org/drawingml/2006/main" noGrp="1"/>
+          </p:cNvSpPr>
+          <p:nvPr/>
+        </p:nvSpPr>
+        <p:spPr>
+          <a:xfrm xmlns:a="http://schemas.openxmlformats.org/drawingml/2006/main">
+            <a:off x="6877050" y="2238375"/>
+            <a:ext cx="4762500" cy="895350"/>
+          </a:xfrm>
+          <a:prstGeom xmlns:a="http://schemas.openxmlformats.org/drawingml/2006/main" prst="rect">
+            <a:avLst/>
+          </a:prstGeom>
+          <a:noFill xmlns:a="http://schemas.openxmlformats.org/drawingml/2006/main"/>
+          <a:ln xmlns:a="http://schemas.openxmlformats.org/drawingml/2006/main" w="0">
+            <a:noFill/>
+            <a:prstDash val="solid"/>
+          </a:ln>
+        </p:spPr>
+        <p:txBody>
+          <a:bodyPr xmlns:a="http://schemas.openxmlformats.org/drawingml/2006/main" anchor="t">
+            <a:normAutofit fontScale="100000"/>
+          </a:bodyPr>
+          <a:lstStyle xmlns:a="http://schemas.openxmlformats.org/drawingml/2006/main"/>
+          <a:p xmlns:a="http://schemas.openxmlformats.org/drawingml/2006/main">
+            <a:pPr algn="l">
+              <a:defRPr sz="1575" b="1">
+                <a:solidFill>
+                  <a:srgbClr val="111111"/>
+                </a:solidFill>
+                <a:latin typeface="Helvetica Neue"/>
+                <a:ea typeface="Helvetica Neue"/>
+                <a:cs typeface="Helvetica Neue"/>
+              </a:defRPr>
+            </a:pPr>
+            <a:r>
+              <a:rPr sz="1575" b="1">
+                <a:solidFill>
+                  <a:srgbClr val="111111"/>
+                </a:solidFill>
+                <a:latin typeface="Helvetica Neue"/>
+                <a:ea typeface="Helvetica Neue"/>
+                <a:cs typeface="Helvetica Neue"/>
+              </a:rPr>
+              <a:t>What are generate, evaluate, and search in Tree-of-Thoughts?</a:t>
+            </a:r>
+          </a:p>
+        </p:txBody>
+      </p:sp>
+      <p:sp>
+        <p:nvSpPr>
+          <p:cNvPr id="10" name="exam-number-3">
+            <a:extLst xmlns:a="http://schemas.openxmlformats.org/drawingml/2006/main">
+              <a:ext uri="{FF2B5EF4-FFF2-40B4-BE49-F238E27FC236}">
+                <a16:creationId xmlns:a16="http://schemas.microsoft.com/office/drawing/2014/main" id="{BFD4CE2C-0C9B-465B-BD74-3DCEEA955C6F}"/>
+              </a:ext>
+            </a:extLst>
+          </p:cNvPr>
+          <p:cNvSpPr>
+            <a:spLocks xmlns:a="http://schemas.openxmlformats.org/drawingml/2006/main" noGrp="1"/>
+          </p:cNvSpPr>
+          <p:nvPr/>
+        </p:nvSpPr>
+        <p:spPr>
+          <a:xfrm xmlns:a="http://schemas.openxmlformats.org/drawingml/2006/main">
+            <a:off x="390525" y="3495675"/>
+            <a:ext cx="590550" cy="400050"/>
+          </a:xfrm>
+          <a:prstGeom xmlns:a="http://schemas.openxmlformats.org/drawingml/2006/main" prst="rect">
+            <a:avLst/>
+          </a:prstGeom>
+          <a:noFill xmlns:a="http://schemas.openxmlformats.org/drawingml/2006/main"/>
+          <a:ln xmlns:a="http://schemas.openxmlformats.org/drawingml/2006/main" w="0">
+            <a:noFill/>
+            <a:prstDash val="solid"/>
+          </a:ln>
+        </p:spPr>
+        <p:txBody>
+          <a:bodyPr xmlns:a="http://schemas.openxmlformats.org/drawingml/2006/main" anchor="t">
+            <a:noAutofit/>
+          </a:bodyPr>
+          <a:lstStyle xmlns:a="http://schemas.openxmlformats.org/drawingml/2006/main"/>
+          <a:p xmlns:a="http://schemas.openxmlformats.org/drawingml/2006/main">
+            <a:pPr algn="l">
+              <a:defRPr sz="1725" b="1">
+                <a:solidFill>
+                  <a:srgbClr val="FFB45E"/>
+                </a:solidFill>
+                <a:latin typeface="Helvetica Neue"/>
+                <a:ea typeface="Helvetica Neue"/>
+                <a:cs typeface="Helvetica Neue"/>
+              </a:defRPr>
+            </a:pPr>
+            <a:r>
+              <a:rPr sz="1725" b="1">
+                <a:solidFill>
+                  <a:srgbClr val="FFB45E"/>
+                </a:solidFill>
+                <a:latin typeface="Helvetica Neue"/>
+                <a:ea typeface="Helvetica Neue"/>
+                <a:cs typeface="Helvetica Neue"/>
+              </a:rPr>
+              <a:t>03</a:t>
+            </a:r>
+          </a:p>
+        </p:txBody>
+      </p:sp>
+      <p:sp>
+        <p:nvSpPr>
+          <p:cNvPr id="11" name="exam-question-3">
+            <a:extLst xmlns:a="http://schemas.openxmlformats.org/drawingml/2006/main">
+              <a:ext uri="{FF2B5EF4-FFF2-40B4-BE49-F238E27FC236}">
+                <a16:creationId xmlns:a16="http://schemas.microsoft.com/office/drawing/2014/main" id="{356EA76B-D5A2-4164-B3E8-304EAC321096}"/>
+              </a:ext>
+            </a:extLst>
+          </p:cNvPr>
+          <p:cNvSpPr>
+            <a:spLocks xmlns:a="http://schemas.openxmlformats.org/drawingml/2006/main" noGrp="1"/>
+          </p:cNvSpPr>
+          <p:nvPr/>
+        </p:nvSpPr>
+        <p:spPr>
+          <a:xfrm xmlns:a="http://schemas.openxmlformats.org/drawingml/2006/main">
+            <a:off x="1076325" y="3495675"/>
+            <a:ext cx="4762500" cy="895350"/>
+          </a:xfrm>
+          <a:prstGeom xmlns:a="http://schemas.openxmlformats.org/drawingml/2006/main" prst="rect">
+            <a:avLst/>
+          </a:prstGeom>
+          <a:noFill xmlns:a="http://schemas.openxmlformats.org/drawingml/2006/main"/>
+          <a:ln xmlns:a="http://schemas.openxmlformats.org/drawingml/2006/main" w="0">
+            <a:noFill/>
+            <a:prstDash val="solid"/>
+          </a:ln>
+        </p:spPr>
+        <p:txBody>
+          <a:bodyPr xmlns:a="http://schemas.openxmlformats.org/drawingml/2006/main" anchor="t">
+            <a:normAutofit fontScale="100000"/>
+          </a:bodyPr>
+          <a:lstStyle xmlns:a="http://schemas.openxmlformats.org/drawingml/2006/main"/>
+          <a:p xmlns:a="http://schemas.openxmlformats.org/drawingml/2006/main">
+            <a:pPr algn="l">
+              <a:defRPr sz="1575" b="1">
+                <a:solidFill>
+                  <a:srgbClr val="111111"/>
+                </a:solidFill>
+                <a:latin typeface="Helvetica Neue"/>
+                <a:ea typeface="Helvetica Neue"/>
+                <a:cs typeface="Helvetica Neue"/>
+              </a:defRPr>
+            </a:pPr>
+            <a:r>
+              <a:rPr sz="1575" b="1">
+                <a:solidFill>
+                  <a:srgbClr val="111111"/>
+                </a:solidFill>
+                <a:latin typeface="Helvetica Neue"/>
+                <a:ea typeface="Helvetica Neue"/>
+                <a:cs typeface="Helvetica Neue"/>
+              </a:rPr>
+              <a:t>How does Graph-of-Thoughts extend a tree?</a:t>
+            </a:r>
+          </a:p>
+        </p:txBody>
+      </p:sp>
+      <p:sp>
+        <p:nvSpPr>
+          <p:cNvPr id="12" name="exam-number-4">
+            <a:extLst xmlns:a="http://schemas.openxmlformats.org/drawingml/2006/main">
+              <a:ext uri="{FF2B5EF4-FFF2-40B4-BE49-F238E27FC236}">
+                <a16:creationId xmlns:a16="http://schemas.microsoft.com/office/drawing/2014/main" id="{82A73B6F-0ABF-4666-80A9-656BBA43BBDE}"/>
+              </a:ext>
+            </a:extLst>
+          </p:cNvPr>
+          <p:cNvSpPr>
+            <a:spLocks xmlns:a="http://schemas.openxmlformats.org/drawingml/2006/main" noGrp="1"/>
+          </p:cNvSpPr>
+          <p:nvPr/>
+        </p:nvSpPr>
+        <p:spPr>
+          <a:xfrm xmlns:a="http://schemas.openxmlformats.org/drawingml/2006/main">
+            <a:off x="6191250" y="3495675"/>
+            <a:ext cx="590550" cy="400050"/>
+          </a:xfrm>
+          <a:prstGeom xmlns:a="http://schemas.openxmlformats.org/drawingml/2006/main" prst="rect">
+            <a:avLst/>
+          </a:prstGeom>
+          <a:noFill xmlns:a="http://schemas.openxmlformats.org/drawingml/2006/main"/>
+          <a:ln xmlns:a="http://schemas.openxmlformats.org/drawingml/2006/main" w="0">
+            <a:noFill/>
+            <a:prstDash val="solid"/>
+          </a:ln>
+        </p:spPr>
+        <p:txBody>
+          <a:bodyPr xmlns:a="http://schemas.openxmlformats.org/drawingml/2006/main" anchor="t">
+            <a:noAutofit/>
+          </a:bodyPr>
+          <a:lstStyle xmlns:a="http://schemas.openxmlformats.org/drawingml/2006/main"/>
+          <a:p xmlns:a="http://schemas.openxmlformats.org/drawingml/2006/main">
+            <a:pPr algn="l">
+              <a:defRPr sz="1725" b="1">
+                <a:solidFill>
+                  <a:srgbClr val="FFB45E"/>
+                </a:solidFill>
+                <a:latin typeface="Helvetica Neue"/>
+                <a:ea typeface="Helvetica Neue"/>
+                <a:cs typeface="Helvetica Neue"/>
+              </a:defRPr>
+            </a:pPr>
+            <a:r>
+              <a:rPr sz="1725" b="1">
+                <a:solidFill>
+                  <a:srgbClr val="FFB45E"/>
+                </a:solidFill>
+                <a:latin typeface="Helvetica Neue"/>
+                <a:ea typeface="Helvetica Neue"/>
+                <a:cs typeface="Helvetica Neue"/>
+              </a:rPr>
+              <a:t>04</a:t>
+            </a:r>
+          </a:p>
+        </p:txBody>
+      </p:sp>
+      <p:sp>
+        <p:nvSpPr>
+          <p:cNvPr id="13" name="exam-question-4">
+            <a:extLst xmlns:a="http://schemas.openxmlformats.org/drawingml/2006/main">
+              <a:ext uri="{FF2B5EF4-FFF2-40B4-BE49-F238E27FC236}">
+                <a16:creationId xmlns:a16="http://schemas.microsoft.com/office/drawing/2014/main" id="{A92F6609-8C59-4075-8C54-2EFDC4D7C342}"/>
+              </a:ext>
+            </a:extLst>
+          </p:cNvPr>
+          <p:cNvSpPr>
+            <a:spLocks xmlns:a="http://schemas.openxmlformats.org/drawingml/2006/main" noGrp="1"/>
+          </p:cNvSpPr>
+          <p:nvPr/>
+        </p:nvSpPr>
+        <p:spPr>
+          <a:xfrm xmlns:a="http://schemas.openxmlformats.org/drawingml/2006/main">
+            <a:off x="6877050" y="3495675"/>
+            <a:ext cx="4762500" cy="895350"/>
+          </a:xfrm>
+          <a:prstGeom xmlns:a="http://schemas.openxmlformats.org/drawingml/2006/main" prst="rect">
+            <a:avLst/>
+          </a:prstGeom>
+          <a:noFill xmlns:a="http://schemas.openxmlformats.org/drawingml/2006/main"/>
+          <a:ln xmlns:a="http://schemas.openxmlformats.org/drawingml/2006/main" w="0">
+            <a:noFill/>
+            <a:prstDash val="solid"/>
+          </a:ln>
+        </p:spPr>
+        <p:txBody>
+          <a:bodyPr xmlns:a="http://schemas.openxmlformats.org/drawingml/2006/main" anchor="t">
+            <a:normAutofit fontScale="100000"/>
+          </a:bodyPr>
+          <a:lstStyle xmlns:a="http://schemas.openxmlformats.org/drawingml/2006/main"/>
+          <a:p xmlns:a="http://schemas.openxmlformats.org/drawingml/2006/main">
+            <a:pPr algn="l">
+              <a:defRPr sz="1575" b="1">
+                <a:solidFill>
+                  <a:srgbClr val="111111"/>
+                </a:solidFill>
+                <a:latin typeface="Helvetica Neue"/>
+                <a:ea typeface="Helvetica Neue"/>
+                <a:cs typeface="Helvetica Neue"/>
+              </a:defRPr>
+            </a:pPr>
+            <a:r>
+              <a:rPr sz="1575" b="1">
+                <a:solidFill>
+                  <a:srgbClr val="111111"/>
+                </a:solidFill>
+                <a:latin typeface="Helvetica Neue"/>
+                <a:ea typeface="Helvetica Neue"/>
+                <a:cs typeface="Helvetica Neue"/>
+              </a:rPr>
+              <a:t>Compare reflection with search.</a:t>
+            </a:r>
+          </a:p>
+        </p:txBody>
+      </p:sp>
+      <p:sp>
+        <p:nvSpPr>
+          <p:cNvPr id="14" name="exam-number-5">
+            <a:extLst xmlns:a="http://schemas.openxmlformats.org/drawingml/2006/main">
+              <a:ext uri="{FF2B5EF4-FFF2-40B4-BE49-F238E27FC236}">
+                <a16:creationId xmlns:a16="http://schemas.microsoft.com/office/drawing/2014/main" id="{0314770F-7764-4447-9902-10B12824FF0A}"/>
+              </a:ext>
+            </a:extLst>
+          </p:cNvPr>
+          <p:cNvSpPr>
+            <a:spLocks xmlns:a="http://schemas.openxmlformats.org/drawingml/2006/main" noGrp="1"/>
+          </p:cNvSpPr>
+          <p:nvPr/>
+        </p:nvSpPr>
+        <p:spPr>
+          <a:xfrm xmlns:a="http://schemas.openxmlformats.org/drawingml/2006/main">
+            <a:off x="390525" y="4752975"/>
+            <a:ext cx="590550" cy="400050"/>
+          </a:xfrm>
+          <a:prstGeom xmlns:a="http://schemas.openxmlformats.org/drawingml/2006/main" prst="rect">
+            <a:avLst/>
+          </a:prstGeom>
+          <a:noFill xmlns:a="http://schemas.openxmlformats.org/drawingml/2006/main"/>
+          <a:ln xmlns:a="http://schemas.openxmlformats.org/drawingml/2006/main" w="0">
+            <a:noFill/>
+            <a:prstDash val="solid"/>
+          </a:ln>
+        </p:spPr>
+        <p:txBody>
+          <a:bodyPr xmlns:a="http://schemas.openxmlformats.org/drawingml/2006/main" anchor="t">
+            <a:noAutofit/>
+          </a:bodyPr>
+          <a:lstStyle xmlns:a="http://schemas.openxmlformats.org/drawingml/2006/main"/>
+          <a:p xmlns:a="http://schemas.openxmlformats.org/drawingml/2006/main">
+            <a:pPr algn="l">
+              <a:defRPr sz="1725" b="1">
+                <a:solidFill>
+                  <a:srgbClr val="FFB45E"/>
+                </a:solidFill>
+                <a:latin typeface="Helvetica Neue"/>
+                <a:ea typeface="Helvetica Neue"/>
+                <a:cs typeface="Helvetica Neue"/>
+              </a:defRPr>
+            </a:pPr>
+            <a:r>
+              <a:rPr sz="1725" b="1">
+                <a:solidFill>
+                  <a:srgbClr val="FFB45E"/>
+                </a:solidFill>
+                <a:latin typeface="Helvetica Neue"/>
+                <a:ea typeface="Helvetica Neue"/>
+                <a:cs typeface="Helvetica Neue"/>
+              </a:rPr>
+              <a:t>05</a:t>
+            </a:r>
+          </a:p>
+        </p:txBody>
+      </p:sp>
+      <p:sp>
+        <p:nvSpPr>
+          <p:cNvPr id="15" name="exam-question-5">
+            <a:extLst xmlns:a="http://schemas.openxmlformats.org/drawingml/2006/main">
+              <a:ext uri="{FF2B5EF4-FFF2-40B4-BE49-F238E27FC236}">
+                <a16:creationId xmlns:a16="http://schemas.microsoft.com/office/drawing/2014/main" id="{C7BE2B83-36BB-4736-8B3F-E0FDD24EDEEE}"/>
+              </a:ext>
+            </a:extLst>
+          </p:cNvPr>
+          <p:cNvSpPr>
+            <a:spLocks xmlns:a="http://schemas.openxmlformats.org/drawingml/2006/main" noGrp="1"/>
+          </p:cNvSpPr>
+          <p:nvPr/>
+        </p:nvSpPr>
+        <p:spPr>
+          <a:xfrm xmlns:a="http://schemas.openxmlformats.org/drawingml/2006/main">
+            <a:off x="1076325" y="4752975"/>
+            <a:ext cx="4762500" cy="895350"/>
+          </a:xfrm>
+          <a:prstGeom xmlns:a="http://schemas.openxmlformats.org/drawingml/2006/main" prst="rect">
+            <a:avLst/>
+          </a:prstGeom>
+          <a:noFill xmlns:a="http://schemas.openxmlformats.org/drawingml/2006/main"/>
+          <a:ln xmlns:a="http://schemas.openxmlformats.org/drawingml/2006/main" w="0">
+            <a:noFill/>
+            <a:prstDash val="solid"/>
+          </a:ln>
+        </p:spPr>
+        <p:txBody>
+          <a:bodyPr xmlns:a="http://schemas.openxmlformats.org/drawingml/2006/main" anchor="t">
+            <a:normAutofit fontScale="100000"/>
+          </a:bodyPr>
+          <a:lstStyle xmlns:a="http://schemas.openxmlformats.org/drawingml/2006/main"/>
+          <a:p xmlns:a="http://schemas.openxmlformats.org/drawingml/2006/main">
+            <a:pPr algn="l">
+              <a:defRPr sz="1575" b="1">
+                <a:solidFill>
+                  <a:srgbClr val="111111"/>
+                </a:solidFill>
+                <a:latin typeface="Helvetica Neue"/>
+                <a:ea typeface="Helvetica Neue"/>
+                <a:cs typeface="Helvetica Neue"/>
+              </a:defRPr>
+            </a:pPr>
+            <a:r>
+              <a:rPr sz="1575" b="1">
+                <a:solidFill>
+                  <a:srgbClr val="111111"/>
+                </a:solidFill>
+                <a:latin typeface="Helvetica Neue"/>
+                <a:ea typeface="Helvetica Neue"/>
+                <a:cs typeface="Helvetica Neue"/>
+              </a:rPr>
+              <a:t>When should an agent use ReAct, plan-and-execute, or parallel planning?</a:t>
+            </a:r>
+          </a:p>
+        </p:txBody>
+      </p:sp>
+      <p:sp>
+        <p:nvSpPr>
+          <p:cNvPr id="16" name="exam-number-6">
+            <a:extLst xmlns:a="http://schemas.openxmlformats.org/drawingml/2006/main">
+              <a:ext uri="{FF2B5EF4-FFF2-40B4-BE49-F238E27FC236}">
+                <a16:creationId xmlns:a16="http://schemas.microsoft.com/office/drawing/2014/main" id="{331F81E4-3074-4CB0-9401-9C16D560D4D4}"/>
+              </a:ext>
+            </a:extLst>
+          </p:cNvPr>
+          <p:cNvSpPr>
+            <a:spLocks xmlns:a="http://schemas.openxmlformats.org/drawingml/2006/main" noGrp="1"/>
+          </p:cNvSpPr>
+          <p:nvPr/>
+        </p:nvSpPr>
+        <p:spPr>
+          <a:xfrm xmlns:a="http://schemas.openxmlformats.org/drawingml/2006/main">
+            <a:off x="6191250" y="4752975"/>
+            <a:ext cx="590550" cy="400050"/>
+          </a:xfrm>
+          <a:prstGeom xmlns:a="http://schemas.openxmlformats.org/drawingml/2006/main" prst="rect">
+            <a:avLst/>
+          </a:prstGeom>
+          <a:noFill xmlns:a="http://schemas.openxmlformats.org/drawingml/2006/main"/>
+          <a:ln xmlns:a="http://schemas.openxmlformats.org/drawingml/2006/main" w="0">
+            <a:noFill/>
+            <a:prstDash val="solid"/>
+          </a:ln>
+        </p:spPr>
+        <p:txBody>
+          <a:bodyPr xmlns:a="http://schemas.openxmlformats.org/drawingml/2006/main" anchor="t">
+            <a:noAutofit/>
+          </a:bodyPr>
+          <a:lstStyle xmlns:a="http://schemas.openxmlformats.org/drawingml/2006/main"/>
+          <a:p xmlns:a="http://schemas.openxmlformats.org/drawingml/2006/main">
+            <a:pPr algn="l">
+              <a:defRPr sz="1725" b="1">
+                <a:solidFill>
+                  <a:srgbClr val="FFB45E"/>
+                </a:solidFill>
+                <a:latin typeface="Helvetica Neue"/>
+                <a:ea typeface="Helvetica Neue"/>
+                <a:cs typeface="Helvetica Neue"/>
+              </a:defRPr>
+            </a:pPr>
+            <a:r>
+              <a:rPr sz="1725" b="1">
+                <a:solidFill>
+                  <a:srgbClr val="FFB45E"/>
+                </a:solidFill>
+                <a:latin typeface="Helvetica Neue"/>
+                <a:ea typeface="Helvetica Neue"/>
+                <a:cs typeface="Helvetica Neue"/>
+              </a:rPr>
+              <a:t>06</a:t>
+            </a:r>
+          </a:p>
+        </p:txBody>
+      </p:sp>
+      <p:sp>
+        <p:nvSpPr>
+          <p:cNvPr id="17" name="exam-question-6">
+            <a:extLst xmlns:a="http://schemas.openxmlformats.org/drawingml/2006/main">
+              <a:ext uri="{FF2B5EF4-FFF2-40B4-BE49-F238E27FC236}">
+                <a16:creationId xmlns:a16="http://schemas.microsoft.com/office/drawing/2014/main" id="{26E6E26D-CAA3-4A5C-9430-3334D20C7D06}"/>
+              </a:ext>
+            </a:extLst>
+          </p:cNvPr>
+          <p:cNvSpPr>
+            <a:spLocks xmlns:a="http://schemas.openxmlformats.org/drawingml/2006/main" noGrp="1"/>
+          </p:cNvSpPr>
+          <p:nvPr/>
+        </p:nvSpPr>
+        <p:spPr>
+          <a:xfrm xmlns:a="http://schemas.openxmlformats.org/drawingml/2006/main">
+            <a:off x="6877050" y="4752975"/>
+            <a:ext cx="4762500" cy="895350"/>
+          </a:xfrm>
+          <a:prstGeom xmlns:a="http://schemas.openxmlformats.org/drawingml/2006/main" prst="rect">
+            <a:avLst/>
+          </a:prstGeom>
+          <a:noFill xmlns:a="http://schemas.openxmlformats.org/drawingml/2006/main"/>
+          <a:ln xmlns:a="http://schemas.openxmlformats.org/drawingml/2006/main" w="0">
+            <a:noFill/>
+            <a:prstDash val="solid"/>
+          </a:ln>
+        </p:spPr>
+        <p:txBody>
+          <a:bodyPr xmlns:a="http://schemas.openxmlformats.org/drawingml/2006/main" anchor="t">
+            <a:normAutofit fontScale="100000"/>
+          </a:bodyPr>
+          <a:lstStyle xmlns:a="http://schemas.openxmlformats.org/drawingml/2006/main"/>
+          <a:p xmlns:a="http://schemas.openxmlformats.org/drawingml/2006/main">
+            <a:pPr algn="l">
+              <a:defRPr sz="1575" b="1">
+                <a:solidFill>
+                  <a:srgbClr val="111111"/>
+                </a:solidFill>
+                <a:latin typeface="Helvetica Neue"/>
+                <a:ea typeface="Helvetica Neue"/>
+                <a:cs typeface="Helvetica Neue"/>
+              </a:defRPr>
+            </a:pPr>
+            <a:r>
+              <a:rPr sz="1575" b="1">
+                <a:solidFill>
+                  <a:srgbClr val="111111"/>
+                </a:solidFill>
+                <a:latin typeface="Helvetica Neue"/>
+                <a:ea typeface="Helvetica Neue"/>
+                <a:cs typeface="Helvetica Neue"/>
+              </a:rPr>
+              <a:t>What evidence would justify spending more inference on a reasoning strategy?</a:t>
+            </a:r>
+          </a:p>
+        </p:txBody>
+      </p:sp>
+    </p:spTree>
+    <p:extLst>
+      <p:ext uri="{BB962C8B-B14F-4D97-AF65-F5344CB8AC3E}">
+        <p14:creationId xmlns:p14="http://schemas.microsoft.com/office/powerpoint/2010/main" val="1113529406"/>
+      </p:ext>
+    </p:extLst>
+  </p:cSld>
+</p:sld>
+</file>
+
+<file path=ppt/slides/slide11.xml><?xml version="1.0" encoding="utf-8"?>
 <p:sld xmlns:p="http://schemas.openxmlformats.org/presentationml/2006/main">
   <p:cSld>
     <p:bg>
@@ -2258,7 +3960,7 @@
           <p:cNvPr id="14" name="accent-line">
             <a:extLst xmlns:a="http://schemas.openxmlformats.org/drawingml/2006/main">
               <a:ext uri="{FF2B5EF4-FFF2-40B4-BE49-F238E27FC236}">
-                <a16:creationId xmlns:a16="http://schemas.microsoft.com/office/drawing/2014/main" id="{C3C16FAA-8C60-45D7-AA0B-9E314BB50729}"/>
+                <a16:creationId xmlns:a16="http://schemas.microsoft.com/office/drawing/2014/main" id="{A7B77441-D1F8-4BAC-9147-04C4C0B1B063}"/>
               </a:ext>
             </a:extLst>
           </p:cNvPr>
@@ -2291,7 +3993,7 @@
           <p:cNvPr id="2" name="chapter-label">
             <a:extLst xmlns:a="http://schemas.openxmlformats.org/drawingml/2006/main">
               <a:ext uri="{FF2B5EF4-FFF2-40B4-BE49-F238E27FC236}">
-                <a16:creationId xmlns:a16="http://schemas.microsoft.com/office/drawing/2014/main" id="{72CB24DD-965F-4BE2-8A1A-B52B14C141FC}"/>
+                <a16:creationId xmlns:a16="http://schemas.microsoft.com/office/drawing/2014/main" id="{6665A91E-47AF-4B3B-8E74-C61BC162E42E}"/>
               </a:ext>
             </a:extLst>
           </p:cNvPr>
@@ -2349,7 +4051,7 @@
           <p:cNvPr id="3" name="slide-number">
             <a:extLst xmlns:a="http://schemas.openxmlformats.org/drawingml/2006/main">
               <a:ext uri="{FF2B5EF4-FFF2-40B4-BE49-F238E27FC236}">
-                <a16:creationId xmlns:a16="http://schemas.microsoft.com/office/drawing/2014/main" id="{1B9FF7DE-D62D-4FA1-858A-87D1009D2CAC}"/>
+                <a16:creationId xmlns:a16="http://schemas.microsoft.com/office/drawing/2014/main" id="{BDB5F3F2-3A1A-4E7E-8E4D-6B2D33F45944}"/>
               </a:ext>
             </a:extLst>
           </p:cNvPr>
@@ -2397,7 +4099,7 @@
                 <a:ea typeface="Helvetica Neue"/>
                 <a:cs typeface="Helvetica Neue"/>
               </a:rPr>
-              <a:t>10</a:t>
+              <a:t>11</a:t>
             </a:r>
           </a:p>
         </p:txBody>
@@ -2407,7 +4109,7 @@
           <p:cNvPr id="4" name="chapter-footer">
             <a:extLst xmlns:a="http://schemas.openxmlformats.org/drawingml/2006/main">
               <a:ext uri="{FF2B5EF4-FFF2-40B4-BE49-F238E27FC236}">
-                <a16:creationId xmlns:a16="http://schemas.microsoft.com/office/drawing/2014/main" id="{53D641F3-54BF-4BF7-82F7-51DC35DB145C}"/>
+                <a16:creationId xmlns:a16="http://schemas.microsoft.com/office/drawing/2014/main" id="{E7E36917-70CE-40CC-9302-A4DDFF70BF61}"/>
               </a:ext>
             </a:extLst>
           </p:cNvPr>
@@ -2465,7 +4167,7 @@
           <p:cNvPr id="5" name="closing-title">
             <a:extLst xmlns:a="http://schemas.openxmlformats.org/drawingml/2006/main">
               <a:ext uri="{FF2B5EF4-FFF2-40B4-BE49-F238E27FC236}">
-                <a16:creationId xmlns:a16="http://schemas.microsoft.com/office/drawing/2014/main" id="{5DACB9DD-2328-4167-94B7-FE6705B24C44}"/>
+                <a16:creationId xmlns:a16="http://schemas.microsoft.com/office/drawing/2014/main" id="{67F860BD-C95E-48B4-9896-0959374A6542}"/>
               </a:ext>
             </a:extLst>
           </p:cNvPr>
@@ -2523,7 +4225,7 @@
           <p:cNvPr id="6" name="takeaway-number-1">
             <a:extLst xmlns:a="http://schemas.openxmlformats.org/drawingml/2006/main">
               <a:ext uri="{FF2B5EF4-FFF2-40B4-BE49-F238E27FC236}">
-                <a16:creationId xmlns:a16="http://schemas.microsoft.com/office/drawing/2014/main" id="{E0E838E6-8253-4451-87C5-EC109E6896F3}"/>
+                <a16:creationId xmlns:a16="http://schemas.microsoft.com/office/drawing/2014/main" id="{CE609037-E2E9-4200-8588-CA0957B25636}"/>
               </a:ext>
             </a:extLst>
           </p:cNvPr>
@@ -2581,7 +4283,7 @@
           <p:cNvPr id="7" name="takeaway-1">
             <a:extLst xmlns:a="http://schemas.openxmlformats.org/drawingml/2006/main">
               <a:ext uri="{FF2B5EF4-FFF2-40B4-BE49-F238E27FC236}">
-                <a16:creationId xmlns:a16="http://schemas.microsoft.com/office/drawing/2014/main" id="{53282ECC-41B8-4990-94E5-45626D886647}"/>
+                <a16:creationId xmlns:a16="http://schemas.microsoft.com/office/drawing/2014/main" id="{DF948455-384F-4976-84B1-3366A75034E9}"/>
               </a:ext>
             </a:extLst>
           </p:cNvPr>
@@ -2639,7 +4341,7 @@
           <p:cNvPr id="8" name="takeaway-number-2">
             <a:extLst xmlns:a="http://schemas.openxmlformats.org/drawingml/2006/main">
               <a:ext uri="{FF2B5EF4-FFF2-40B4-BE49-F238E27FC236}">
-                <a16:creationId xmlns:a16="http://schemas.microsoft.com/office/drawing/2014/main" id="{4BA717EB-B6C2-49B6-99DF-CF5D02EE0B68}"/>
+                <a16:creationId xmlns:a16="http://schemas.microsoft.com/office/drawing/2014/main" id="{B97A6F3A-BC67-4FA9-A46E-966A4F56D8B2}"/>
               </a:ext>
             </a:extLst>
           </p:cNvPr>
@@ -2697,7 +4399,7 @@
           <p:cNvPr id="9" name="takeaway-2">
             <a:extLst xmlns:a="http://schemas.openxmlformats.org/drawingml/2006/main">
               <a:ext uri="{FF2B5EF4-FFF2-40B4-BE49-F238E27FC236}">
-                <a16:creationId xmlns:a16="http://schemas.microsoft.com/office/drawing/2014/main" id="{2986C499-62C9-4B07-8E72-F65B69B830B4}"/>
+                <a16:creationId xmlns:a16="http://schemas.microsoft.com/office/drawing/2014/main" id="{BDDE0B27-3EF9-42E6-8027-D1177364131C}"/>
               </a:ext>
             </a:extLst>
           </p:cNvPr>
@@ -2755,7 +4457,7 @@
           <p:cNvPr id="10" name="takeaway-number-3">
             <a:extLst xmlns:a="http://schemas.openxmlformats.org/drawingml/2006/main">
               <a:ext uri="{FF2B5EF4-FFF2-40B4-BE49-F238E27FC236}">
-                <a16:creationId xmlns:a16="http://schemas.microsoft.com/office/drawing/2014/main" id="{EF3075DC-6251-439B-AA70-251AACD35B9B}"/>
+                <a16:creationId xmlns:a16="http://schemas.microsoft.com/office/drawing/2014/main" id="{CC9DC1EB-5B4D-4CBE-B835-B5BB54F9CC41}"/>
               </a:ext>
             </a:extLst>
           </p:cNvPr>
@@ -2813,7 +4515,7 @@
           <p:cNvPr id="11" name="takeaway-3">
             <a:extLst xmlns:a="http://schemas.openxmlformats.org/drawingml/2006/main">
               <a:ext uri="{FF2B5EF4-FFF2-40B4-BE49-F238E27FC236}">
-                <a16:creationId xmlns:a16="http://schemas.microsoft.com/office/drawing/2014/main" id="{112FF11D-90B5-4D70-A508-1DE5CF7539D5}"/>
+                <a16:creationId xmlns:a16="http://schemas.microsoft.com/office/drawing/2014/main" id="{80C60940-8335-4EC5-9B2C-A6428CE1AEEA}"/>
               </a:ext>
             </a:extLst>
           </p:cNvPr>
@@ -2871,7 +4573,7 @@
           <p:cNvPr id="12" name="takeaway-number-4">
             <a:extLst xmlns:a="http://schemas.openxmlformats.org/drawingml/2006/main">
               <a:ext uri="{FF2B5EF4-FFF2-40B4-BE49-F238E27FC236}">
-                <a16:creationId xmlns:a16="http://schemas.microsoft.com/office/drawing/2014/main" id="{5AF1341E-EEB6-4DD7-A210-350B67026B1A}"/>
+                <a16:creationId xmlns:a16="http://schemas.microsoft.com/office/drawing/2014/main" id="{392B9D4E-F302-4C68-BDFF-CF00EAF92A9F}"/>
               </a:ext>
             </a:extLst>
           </p:cNvPr>
@@ -2929,7 +4631,7 @@
           <p:cNvPr id="13" name="takeaway-4">
             <a:extLst xmlns:a="http://schemas.openxmlformats.org/drawingml/2006/main">
               <a:ext uri="{FF2B5EF4-FFF2-40B4-BE49-F238E27FC236}">
-                <a16:creationId xmlns:a16="http://schemas.microsoft.com/office/drawing/2014/main" id="{02D013B8-860D-4489-8863-BA2456E26CEC}"/>
+                <a16:creationId xmlns:a16="http://schemas.microsoft.com/office/drawing/2014/main" id="{2BAE2849-0F52-498C-89CC-1598C87593FC}"/>
               </a:ext>
             </a:extLst>
           </p:cNvPr>
@@ -2985,7 +4687,556 @@
     </p:spTree>
     <p:extLst>
       <p:ext uri="{BB962C8B-B14F-4D97-AF65-F5344CB8AC3E}">
-        <p14:creationId xmlns:p14="http://schemas.microsoft.com/office/powerpoint/2010/main" val="320037226"/>
+        <p14:creationId xmlns:p14="http://schemas.microsoft.com/office/powerpoint/2010/main" val="2078291525"/>
+      </p:ext>
+    </p:extLst>
+  </p:cSld>
+</p:sld>
+</file>
+
+<file path=ppt/slides/slide12.xml><?xml version="1.0" encoding="utf-8"?>
+<p:sld xmlns:p="http://schemas.openxmlformats.org/presentationml/2006/main">
+  <p:cSld>
+    <p:bg>
+      <p:bgPr>
+        <a:solidFill xmlns:a="http://schemas.openxmlformats.org/drawingml/2006/main">
+          <a:srgbClr val="FFFFFF"/>
+        </a:solidFill>
+      </p:bgPr>
+    </p:bg>
+    <p:spTree>
+      <p:nvGrpSpPr>
+        <p:cNvPr id="1" name=""/>
+        <p:cNvGrpSpPr/>
+        <p:nvPr/>
+      </p:nvGrpSpPr>
+      <p:grpSpPr>
+        <a:xfrm xmlns:a="http://schemas.openxmlformats.org/drawingml/2006/main"/>
+      </p:grpSpPr>
+      <p:sp>
+        <p:nvSpPr>
+          <p:cNvPr id="10" name="accent-line">
+            <a:extLst xmlns:a="http://schemas.openxmlformats.org/drawingml/2006/main">
+              <a:ext uri="{FF2B5EF4-FFF2-40B4-BE49-F238E27FC236}">
+                <a16:creationId xmlns:a16="http://schemas.microsoft.com/office/drawing/2014/main" id="{651AAE61-A89B-4196-9B04-77B4E445F0DB}"/>
+              </a:ext>
+            </a:extLst>
+          </p:cNvPr>
+          <p:cNvSpPr>
+            <a:spLocks xmlns:a="http://schemas.openxmlformats.org/drawingml/2006/main" noGrp="1"/>
+          </p:cNvSpPr>
+          <p:nvPr/>
+        </p:nvSpPr>
+        <p:spPr>
+          <a:xfrm xmlns:a="http://schemas.openxmlformats.org/drawingml/2006/main">
+            <a:off x="390525" y="304800"/>
+            <a:ext cx="11410950" cy="66675"/>
+          </a:xfrm>
+          <a:prstGeom xmlns:a="http://schemas.openxmlformats.org/drawingml/2006/main" prst="rect">
+            <a:avLst/>
+          </a:prstGeom>
+          <a:solidFill xmlns:a="http://schemas.openxmlformats.org/drawingml/2006/main">
+            <a:srgbClr val="FFB45E"/>
+          </a:solidFill>
+          <a:ln xmlns:a="http://schemas.openxmlformats.org/drawingml/2006/main" w="0">
+            <a:solidFill>
+              <a:srgbClr val="FFB45E"/>
+            </a:solidFill>
+            <a:prstDash val="solid"/>
+          </a:ln>
+        </p:spPr>
+      </p:sp>
+      <p:sp>
+        <p:nvSpPr>
+          <p:cNvPr id="2" name="chapter-label">
+            <a:extLst xmlns:a="http://schemas.openxmlformats.org/drawingml/2006/main">
+              <a:ext uri="{FF2B5EF4-FFF2-40B4-BE49-F238E27FC236}">
+                <a16:creationId xmlns:a16="http://schemas.microsoft.com/office/drawing/2014/main" id="{1F6C9CFF-C4F8-4BC3-88FC-18573D2FA09E}"/>
+              </a:ext>
+            </a:extLst>
+          </p:cNvPr>
+          <p:cNvSpPr>
+            <a:spLocks xmlns:a="http://schemas.openxmlformats.org/drawingml/2006/main" noGrp="1"/>
+          </p:cNvSpPr>
+          <p:nvPr/>
+        </p:nvSpPr>
+        <p:spPr>
+          <a:xfrm xmlns:a="http://schemas.openxmlformats.org/drawingml/2006/main">
+            <a:off x="390525" y="466725"/>
+            <a:ext cx="4953000" cy="323850"/>
+          </a:xfrm>
+          <a:prstGeom xmlns:a="http://schemas.openxmlformats.org/drawingml/2006/main" prst="rect">
+            <a:avLst/>
+          </a:prstGeom>
+          <a:noFill xmlns:a="http://schemas.openxmlformats.org/drawingml/2006/main"/>
+          <a:ln xmlns:a="http://schemas.openxmlformats.org/drawingml/2006/main" w="0">
+            <a:noFill/>
+            <a:prstDash val="solid"/>
+          </a:ln>
+        </p:spPr>
+        <p:txBody>
+          <a:bodyPr xmlns:a="http://schemas.openxmlformats.org/drawingml/2006/main" anchor="t">
+            <a:noAutofit/>
+          </a:bodyPr>
+          <a:lstStyle xmlns:a="http://schemas.openxmlformats.org/drawingml/2006/main"/>
+          <a:p xmlns:a="http://schemas.openxmlformats.org/drawingml/2006/main">
+            <a:pPr algn="l">
+              <a:defRPr sz="1275" b="1">
+                <a:solidFill>
+                  <a:srgbClr val="5B5B57"/>
+                </a:solidFill>
+                <a:latin typeface="Helvetica Neue"/>
+                <a:ea typeface="Helvetica Neue"/>
+                <a:cs typeface="Helvetica Neue"/>
+              </a:defRPr>
+            </a:pPr>
+            <a:r>
+              <a:rPr sz="1275" b="1">
+                <a:solidFill>
+                  <a:srgbClr val="5B5B57"/>
+                </a:solidFill>
+                <a:latin typeface="Helvetica Neue"/>
+                <a:ea typeface="Helvetica Neue"/>
+                <a:cs typeface="Helvetica Neue"/>
+              </a:rPr>
+              <a:t>PRACTICE AND READING  /  10</a:t>
+            </a:r>
+          </a:p>
+        </p:txBody>
+      </p:sp>
+      <p:sp>
+        <p:nvSpPr>
+          <p:cNvPr id="3" name="slide-number">
+            <a:extLst xmlns:a="http://schemas.openxmlformats.org/drawingml/2006/main">
+              <a:ext uri="{FF2B5EF4-FFF2-40B4-BE49-F238E27FC236}">
+                <a16:creationId xmlns:a16="http://schemas.microsoft.com/office/drawing/2014/main" id="{6675127D-6746-460A-AD10-87ECF030799D}"/>
+              </a:ext>
+            </a:extLst>
+          </p:cNvPr>
+          <p:cNvSpPr>
+            <a:spLocks xmlns:a="http://schemas.openxmlformats.org/drawingml/2006/main" noGrp="1"/>
+          </p:cNvSpPr>
+          <p:nvPr/>
+        </p:nvSpPr>
+        <p:spPr>
+          <a:xfrm xmlns:a="http://schemas.openxmlformats.org/drawingml/2006/main">
+            <a:off x="11049000" y="6286500"/>
+            <a:ext cx="742950" cy="266700"/>
+          </a:xfrm>
+          <a:prstGeom xmlns:a="http://schemas.openxmlformats.org/drawingml/2006/main" prst="rect">
+            <a:avLst/>
+          </a:prstGeom>
+          <a:noFill xmlns:a="http://schemas.openxmlformats.org/drawingml/2006/main"/>
+          <a:ln xmlns:a="http://schemas.openxmlformats.org/drawingml/2006/main" w="0">
+            <a:noFill/>
+            <a:prstDash val="solid"/>
+          </a:ln>
+        </p:spPr>
+        <p:txBody>
+          <a:bodyPr xmlns:a="http://schemas.openxmlformats.org/drawingml/2006/main" anchor="t">
+            <a:noAutofit/>
+          </a:bodyPr>
+          <a:lstStyle xmlns:a="http://schemas.openxmlformats.org/drawingml/2006/main"/>
+          <a:p xmlns:a="http://schemas.openxmlformats.org/drawingml/2006/main">
+            <a:pPr algn="r">
+              <a:defRPr sz="1200" b="0">
+                <a:solidFill>
+                  <a:srgbClr val="5B5B57"/>
+                </a:solidFill>
+                <a:latin typeface="Helvetica Neue"/>
+                <a:ea typeface="Helvetica Neue"/>
+                <a:cs typeface="Helvetica Neue"/>
+              </a:defRPr>
+            </a:pPr>
+            <a:r>
+              <a:rPr sz="1200" b="0">
+                <a:solidFill>
+                  <a:srgbClr val="5B5B57"/>
+                </a:solidFill>
+                <a:latin typeface="Helvetica Neue"/>
+                <a:ea typeface="Helvetica Neue"/>
+                <a:cs typeface="Helvetica Neue"/>
+              </a:rPr>
+              <a:t>12</a:t>
+            </a:r>
+          </a:p>
+        </p:txBody>
+      </p:sp>
+      <p:sp>
+        <p:nvSpPr>
+          <p:cNvPr id="4" name="chapter-footer">
+            <a:extLst xmlns:a="http://schemas.openxmlformats.org/drawingml/2006/main">
+              <a:ext uri="{FF2B5EF4-FFF2-40B4-BE49-F238E27FC236}">
+                <a16:creationId xmlns:a16="http://schemas.microsoft.com/office/drawing/2014/main" id="{E2DFF415-E8EC-47E8-955D-50431059D23A}"/>
+              </a:ext>
+            </a:extLst>
+          </p:cNvPr>
+          <p:cNvSpPr>
+            <a:spLocks xmlns:a="http://schemas.openxmlformats.org/drawingml/2006/main" noGrp="1"/>
+          </p:cNvSpPr>
+          <p:nvPr/>
+        </p:nvSpPr>
+        <p:spPr>
+          <a:xfrm xmlns:a="http://schemas.openxmlformats.org/drawingml/2006/main">
+            <a:off x="390525" y="6286500"/>
+            <a:ext cx="8191500" cy="266700"/>
+          </a:xfrm>
+          <a:prstGeom xmlns:a="http://schemas.openxmlformats.org/drawingml/2006/main" prst="rect">
+            <a:avLst/>
+          </a:prstGeom>
+          <a:noFill xmlns:a="http://schemas.openxmlformats.org/drawingml/2006/main"/>
+          <a:ln xmlns:a="http://schemas.openxmlformats.org/drawingml/2006/main" w="0">
+            <a:noFill/>
+            <a:prstDash val="solid"/>
+          </a:ln>
+        </p:spPr>
+        <p:txBody>
+          <a:bodyPr xmlns:a="http://schemas.openxmlformats.org/drawingml/2006/main" anchor="t">
+            <a:noAutofit/>
+          </a:bodyPr>
+          <a:lstStyle xmlns:a="http://schemas.openxmlformats.org/drawingml/2006/main"/>
+          <a:p xmlns:a="http://schemas.openxmlformats.org/drawingml/2006/main">
+            <a:pPr algn="l">
+              <a:defRPr sz="1125" b="0">
+                <a:solidFill>
+                  <a:srgbClr val="5B5B57"/>
+                </a:solidFill>
+                <a:latin typeface="Helvetica Neue"/>
+                <a:ea typeface="Helvetica Neue"/>
+                <a:cs typeface="Helvetica Neue"/>
+              </a:defRPr>
+            </a:pPr>
+            <a:r>
+              <a:rPr sz="1125" b="0">
+                <a:solidFill>
+                  <a:srgbClr val="5B5B57"/>
+                </a:solidFill>
+                <a:latin typeface="Helvetica Neue"/>
+                <a:ea typeface="Helvetica Neue"/>
+                <a:cs typeface="Helvetica Neue"/>
+              </a:rPr>
+              <a:t>Advanced Reasoning and Planning</a:t>
+            </a:r>
+          </a:p>
+        </p:txBody>
+      </p:sp>
+      <p:sp>
+        <p:nvSpPr>
+          <p:cNvPr id="5" name="practice-title">
+            <a:extLst xmlns:a="http://schemas.openxmlformats.org/drawingml/2006/main">
+              <a:ext uri="{FF2B5EF4-FFF2-40B4-BE49-F238E27FC236}">
+                <a16:creationId xmlns:a16="http://schemas.microsoft.com/office/drawing/2014/main" id="{F69C165C-DB3F-4387-9BD0-D6FE34C414F2}"/>
+              </a:ext>
+            </a:extLst>
+          </p:cNvPr>
+          <p:cNvSpPr>
+            <a:spLocks xmlns:a="http://schemas.openxmlformats.org/drawingml/2006/main" noGrp="1"/>
+          </p:cNvSpPr>
+          <p:nvPr/>
+        </p:nvSpPr>
+        <p:spPr>
+          <a:xfrm xmlns:a="http://schemas.openxmlformats.org/drawingml/2006/main">
+            <a:off x="390525" y="1000125"/>
+            <a:ext cx="11144250" cy="666750"/>
+          </a:xfrm>
+          <a:prstGeom xmlns:a="http://schemas.openxmlformats.org/drawingml/2006/main" prst="rect">
+            <a:avLst/>
+          </a:prstGeom>
+          <a:noFill xmlns:a="http://schemas.openxmlformats.org/drawingml/2006/main"/>
+          <a:ln xmlns:a="http://schemas.openxmlformats.org/drawingml/2006/main" w="0">
+            <a:noFill/>
+            <a:prstDash val="solid"/>
+          </a:ln>
+        </p:spPr>
+        <p:txBody>
+          <a:bodyPr xmlns:a="http://schemas.openxmlformats.org/drawingml/2006/main" anchor="t">
+            <a:normAutofit fontScale="100000"/>
+          </a:bodyPr>
+          <a:lstStyle xmlns:a="http://schemas.openxmlformats.org/drawingml/2006/main"/>
+          <a:p xmlns:a="http://schemas.openxmlformats.org/drawingml/2006/main">
+            <a:pPr algn="l">
+              <a:defRPr sz="3000" b="1">
+                <a:solidFill>
+                  <a:srgbClr val="111111"/>
+                </a:solidFill>
+                <a:latin typeface="Helvetica Neue"/>
+                <a:ea typeface="Helvetica Neue"/>
+                <a:cs typeface="Helvetica Neue"/>
+              </a:defRPr>
+            </a:pPr>
+            <a:r>
+              <a:rPr sz="3000" b="1">
+                <a:solidFill>
+                  <a:srgbClr val="111111"/>
+                </a:solidFill>
+                <a:latin typeface="Helvetica Neue"/>
+                <a:ea typeface="Helvetica Neue"/>
+                <a:cs typeface="Helvetica Neue"/>
+              </a:rPr>
+              <a:t>Evidence to submit</a:t>
+            </a:r>
+          </a:p>
+        </p:txBody>
+      </p:sp>
+      <p:sp>
+        <p:nvSpPr>
+          <p:cNvPr id="6" name="practice-task">
+            <a:extLst xmlns:a="http://schemas.openxmlformats.org/drawingml/2006/main">
+              <a:ext uri="{FF2B5EF4-FFF2-40B4-BE49-F238E27FC236}">
+                <a16:creationId xmlns:a16="http://schemas.microsoft.com/office/drawing/2014/main" id="{54EA0C45-FA83-44AD-A695-BC756B9434FD}"/>
+              </a:ext>
+            </a:extLst>
+          </p:cNvPr>
+          <p:cNvSpPr>
+            <a:spLocks xmlns:a="http://schemas.openxmlformats.org/drawingml/2006/main" noGrp="1"/>
+          </p:cNvSpPr>
+          <p:nvPr/>
+        </p:nvSpPr>
+        <p:spPr>
+          <a:xfrm xmlns:a="http://schemas.openxmlformats.org/drawingml/2006/main">
+            <a:off x="390525" y="2000250"/>
+            <a:ext cx="10953750" cy="1238250"/>
+          </a:xfrm>
+          <a:prstGeom xmlns:a="http://schemas.openxmlformats.org/drawingml/2006/main" prst="rect">
+            <a:avLst/>
+          </a:prstGeom>
+          <a:noFill xmlns:a="http://schemas.openxmlformats.org/drawingml/2006/main"/>
+          <a:ln xmlns:a="http://schemas.openxmlformats.org/drawingml/2006/main" w="0">
+            <a:noFill/>
+            <a:prstDash val="solid"/>
+          </a:ln>
+        </p:spPr>
+        <p:txBody>
+          <a:bodyPr xmlns:a="http://schemas.openxmlformats.org/drawingml/2006/main" anchor="t">
+            <a:normAutofit fontScale="100000"/>
+          </a:bodyPr>
+          <a:lstStyle xmlns:a="http://schemas.openxmlformats.org/drawingml/2006/main"/>
+          <a:p xmlns:a="http://schemas.openxmlformats.org/drawingml/2006/main">
+            <a:pPr algn="l">
+              <a:defRPr sz="1950" b="0">
+                <a:solidFill>
+                  <a:srgbClr val="111111"/>
+                </a:solidFill>
+                <a:latin typeface="Helvetica Neue"/>
+                <a:ea typeface="Helvetica Neue"/>
+                <a:cs typeface="Helvetica Neue"/>
+              </a:defRPr>
+            </a:pPr>
+            <a:r>
+              <a:rPr sz="1950" b="0">
+                <a:solidFill>
+                  <a:srgbClr val="111111"/>
+                </a:solidFill>
+                <a:latin typeface="Helvetica Neue"/>
+                <a:ea typeface="Helvetica Neue"/>
+                <a:cs typeface="Helvetica Neue"/>
+              </a:rPr>
+              <a:t>Use Lab 7's paired inputs to test a prediction about a misleading cue. Propose an equal-budget comparison with voting and identify a shared-error failure case.</a:t>
+            </a:r>
+          </a:p>
+        </p:txBody>
+      </p:sp>
+      <p:sp>
+        <p:nvSpPr>
+          <p:cNvPr id="7" name="practice-check">
+            <a:extLst xmlns:a="http://schemas.openxmlformats.org/drawingml/2006/main">
+              <a:ext uri="{FF2B5EF4-FFF2-40B4-BE49-F238E27FC236}">
+                <a16:creationId xmlns:a16="http://schemas.microsoft.com/office/drawing/2014/main" id="{489892E3-7682-4E62-966D-354668C1DCF3}"/>
+              </a:ext>
+            </a:extLst>
+          </p:cNvPr>
+          <p:cNvSpPr>
+            <a:spLocks xmlns:a="http://schemas.openxmlformats.org/drawingml/2006/main" noGrp="1"/>
+          </p:cNvSpPr>
+          <p:nvPr/>
+        </p:nvSpPr>
+        <p:spPr>
+          <a:xfrm xmlns:a="http://schemas.openxmlformats.org/drawingml/2006/main">
+            <a:off x="390525" y="3381375"/>
+            <a:ext cx="10953750" cy="1095375"/>
+          </a:xfrm>
+          <a:prstGeom xmlns:a="http://schemas.openxmlformats.org/drawingml/2006/main" prst="rect">
+            <a:avLst/>
+          </a:prstGeom>
+          <a:noFill xmlns:a="http://schemas.openxmlformats.org/drawingml/2006/main"/>
+          <a:ln xmlns:a="http://schemas.openxmlformats.org/drawingml/2006/main" w="0">
+            <a:noFill/>
+            <a:prstDash val="solid"/>
+          </a:ln>
+        </p:spPr>
+        <p:txBody>
+          <a:bodyPr xmlns:a="http://schemas.openxmlformats.org/drawingml/2006/main" anchor="t">
+            <a:normAutofit fontScale="100000"/>
+          </a:bodyPr>
+          <a:lstStyle xmlns:a="http://schemas.openxmlformats.org/drawingml/2006/main"/>
+          <a:p xmlns:a="http://schemas.openxmlformats.org/drawingml/2006/main">
+            <a:pPr algn="l">
+              <a:defRPr sz="1800" b="0">
+                <a:solidFill>
+                  <a:srgbClr val="5B5B57"/>
+                </a:solidFill>
+                <a:latin typeface="Helvetica Neue"/>
+                <a:ea typeface="Helvetica Neue"/>
+                <a:cs typeface="Helvetica Neue"/>
+              </a:defRPr>
+            </a:pPr>
+            <a:r>
+              <a:rPr sz="1800" b="0">
+                <a:solidFill>
+                  <a:srgbClr val="5B5B57"/>
+                </a:solidFill>
+                <a:latin typeface="Helvetica Neue"/>
+                <a:ea typeface="Helvetica Neue"/>
+                <a:cs typeface="Helvetica Neue"/>
+              </a:rPr>
+              <a:t>Keep predictions, observations, and interpretations separate. State the limits of a small experiment.</a:t>
+            </a:r>
+          </a:p>
+        </p:txBody>
+      </p:sp>
+      <p:sp>
+        <p:nvSpPr>
+          <p:cNvPr id="8" name="practice-readings">
+            <a:extLst xmlns:a="http://schemas.openxmlformats.org/drawingml/2006/main">
+              <a:ext uri="{FF2B5EF4-FFF2-40B4-BE49-F238E27FC236}">
+                <a16:creationId xmlns:a16="http://schemas.microsoft.com/office/drawing/2014/main" id="{B4E8945B-98FF-48F2-934C-2A18AAC9013E}"/>
+              </a:ext>
+            </a:extLst>
+          </p:cNvPr>
+          <p:cNvSpPr>
+            <a:spLocks xmlns:a="http://schemas.openxmlformats.org/drawingml/2006/main" noGrp="1"/>
+          </p:cNvSpPr>
+          <p:nvPr/>
+        </p:nvSpPr>
+        <p:spPr>
+          <a:xfrm xmlns:a="http://schemas.openxmlformats.org/drawingml/2006/main">
+            <a:off x="390525" y="4667250"/>
+            <a:ext cx="10953750" cy="1000125"/>
+          </a:xfrm>
+          <a:prstGeom xmlns:a="http://schemas.openxmlformats.org/drawingml/2006/main" prst="rect">
+            <a:avLst/>
+          </a:prstGeom>
+          <a:noFill xmlns:a="http://schemas.openxmlformats.org/drawingml/2006/main"/>
+          <a:ln xmlns:a="http://schemas.openxmlformats.org/drawingml/2006/main" w="0">
+            <a:noFill/>
+            <a:prstDash val="solid"/>
+          </a:ln>
+        </p:spPr>
+        <p:txBody>
+          <a:bodyPr xmlns:a="http://schemas.openxmlformats.org/drawingml/2006/main" anchor="t">
+            <a:normAutofit fontScale="100000"/>
+          </a:bodyPr>
+          <a:lstStyle xmlns:a="http://schemas.openxmlformats.org/drawingml/2006/main"/>
+          <a:p xmlns:a="http://schemas.openxmlformats.org/drawingml/2006/main">
+            <a:pPr algn="l">
+              <a:defRPr sz="1425" b="0">
+                <a:solidFill>
+                  <a:srgbClr val="111111"/>
+                </a:solidFill>
+                <a:latin typeface="Helvetica Neue"/>
+                <a:ea typeface="Helvetica Neue"/>
+                <a:cs typeface="Helvetica Neue"/>
+              </a:defRPr>
+            </a:pPr>
+            <a:r>
+              <a:rPr sz="1425" b="0">
+                <a:solidFill>
+                  <a:srgbClr val="111111"/>
+                </a:solidFill>
+                <a:latin typeface="Helvetica Neue"/>
+                <a:ea typeface="Helvetica Neue"/>
+                <a:cs typeface="Helvetica Neue"/>
+              </a:rPr>
+              <a:t>P3  Would this change your answer?</a:t>
+            </a:r>
+          </a:p>
+          <a:p xmlns:a="http://schemas.openxmlformats.org/drawingml/2006/main">
+            <a:pPr algn="l">
+              <a:defRPr sz="1425" b="0">
+                <a:solidFill>
+                  <a:srgbClr val="111111"/>
+                </a:solidFill>
+                <a:latin typeface="Helvetica Neue"/>
+                <a:ea typeface="Helvetica Neue"/>
+                <a:cs typeface="Helvetica Neue"/>
+              </a:defRPr>
+            </a:pPr>
+            <a:r>
+              <a:rPr sz="1425" b="0">
+                <a:solidFill>
+                  <a:srgbClr val="111111"/>
+                </a:solidFill>
+                <a:latin typeface="Helvetica Neue"/>
+                <a:ea typeface="Helvetica Neue"/>
+                <a:cs typeface="Helvetica Neue"/>
+              </a:rPr>
+              <a:t>R1  Patterns and problems in emerging multiagent systems</a:t>
+            </a:r>
+          </a:p>
+        </p:txBody>
+      </p:sp>
+      <p:sp>
+        <p:nvSpPr>
+          <p:cNvPr id="9" name="practice-lab">
+            <a:extLst xmlns:a="http://schemas.openxmlformats.org/drawingml/2006/main">
+              <a:ext uri="{FF2B5EF4-FFF2-40B4-BE49-F238E27FC236}">
+                <a16:creationId xmlns:a16="http://schemas.microsoft.com/office/drawing/2014/main" id="{FD46FC48-53DF-4B14-B1BC-8F3F297DDF3F}"/>
+              </a:ext>
+            </a:extLst>
+          </p:cNvPr>
+          <p:cNvSpPr>
+            <a:spLocks xmlns:a="http://schemas.openxmlformats.org/drawingml/2006/main" noGrp="1"/>
+          </p:cNvSpPr>
+          <p:nvPr/>
+        </p:nvSpPr>
+        <p:spPr>
+          <a:xfrm xmlns:a="http://schemas.openxmlformats.org/drawingml/2006/main">
+            <a:off x="390525" y="5857875"/>
+            <a:ext cx="10953750" cy="266700"/>
+          </a:xfrm>
+          <a:prstGeom xmlns:a="http://schemas.openxmlformats.org/drawingml/2006/main" prst="rect">
+            <a:avLst/>
+          </a:prstGeom>
+          <a:noFill xmlns:a="http://schemas.openxmlformats.org/drawingml/2006/main"/>
+          <a:ln xmlns:a="http://schemas.openxmlformats.org/drawingml/2006/main" w="0">
+            <a:noFill/>
+            <a:prstDash val="solid"/>
+          </a:ln>
+        </p:spPr>
+        <p:txBody>
+          <a:bodyPr xmlns:a="http://schemas.openxmlformats.org/drawingml/2006/main" anchor="t">
+            <a:normAutofit fontScale="90196"/>
+          </a:bodyPr>
+          <a:lstStyle xmlns:a="http://schemas.openxmlformats.org/drawingml/2006/main"/>
+          <a:p xmlns:a="http://schemas.openxmlformats.org/drawingml/2006/main">
+            <a:pPr algn="l">
+              <a:defRPr sz="1275" b="0">
+                <a:solidFill>
+                  <a:srgbClr val="5B5B57"/>
+                </a:solidFill>
+                <a:latin typeface="Helvetica Neue"/>
+                <a:ea typeface="Helvetica Neue"/>
+                <a:cs typeface="Helvetica Neue"/>
+              </a:defRPr>
+            </a:pPr>
+            <a:r>
+              <a:rPr sz="1275" b="0">
+                <a:solidFill>
+                  <a:srgbClr val="5B5B57"/>
+                </a:solidFill>
+                <a:latin typeface="Helvetica Neue"/>
+                <a:ea typeface="Helvetica Neue"/>
+                <a:cs typeface="Helvetica Neue"/>
+              </a:rPr>
+              <a:t>labs/07_agents_sdk_evaluation.ipynb</a:t>
+            </a:r>
+          </a:p>
+        </p:txBody>
+      </p:sp>
+    </p:spTree>
+    <p:extLst>
+      <p:ext uri="{BB962C8B-B14F-4D97-AF65-F5344CB8AC3E}">
+        <p14:creationId xmlns:p14="http://schemas.microsoft.com/office/powerpoint/2010/main" val="1377602518"/>
       </p:ext>
     </p:extLst>
   </p:cSld>
@@ -3016,7 +5267,7 @@
           <p:cNvPr id="14" name="accent-line">
             <a:extLst xmlns:a="http://schemas.openxmlformats.org/drawingml/2006/main">
               <a:ext uri="{FF2B5EF4-FFF2-40B4-BE49-F238E27FC236}">
-                <a16:creationId xmlns:a16="http://schemas.microsoft.com/office/drawing/2014/main" id="{27CD6BCC-751F-48EB-B1AA-382FD784C96F}"/>
+                <a16:creationId xmlns:a16="http://schemas.microsoft.com/office/drawing/2014/main" id="{00274ADE-3946-4AC2-B957-FA0AE8837EC3}"/>
               </a:ext>
             </a:extLst>
           </p:cNvPr>
@@ -3049,7 +5300,7 @@
           <p:cNvPr id="2" name="chapter-label">
             <a:extLst xmlns:a="http://schemas.openxmlformats.org/drawingml/2006/main">
               <a:ext uri="{FF2B5EF4-FFF2-40B4-BE49-F238E27FC236}">
-                <a16:creationId xmlns:a16="http://schemas.microsoft.com/office/drawing/2014/main" id="{867C8439-8FB0-4DBE-87F0-87D89033986F}"/>
+                <a16:creationId xmlns:a16="http://schemas.microsoft.com/office/drawing/2014/main" id="{5EF9F754-33B1-4BD5-B3F7-DE2CFB4468AF}"/>
               </a:ext>
             </a:extLst>
           </p:cNvPr>
@@ -3107,7 +5358,7 @@
           <p:cNvPr id="3" name="slide-number">
             <a:extLst xmlns:a="http://schemas.openxmlformats.org/drawingml/2006/main">
               <a:ext uri="{FF2B5EF4-FFF2-40B4-BE49-F238E27FC236}">
-                <a16:creationId xmlns:a16="http://schemas.microsoft.com/office/drawing/2014/main" id="{CC2BA424-FDED-4C7B-B684-D4765AFC72E2}"/>
+                <a16:creationId xmlns:a16="http://schemas.microsoft.com/office/drawing/2014/main" id="{A5C7A0CC-2754-4507-A23B-090312BEFF4C}"/>
               </a:ext>
             </a:extLst>
           </p:cNvPr>
@@ -3165,7 +5416,7 @@
           <p:cNvPr id="4" name="chapter-footer">
             <a:extLst xmlns:a="http://schemas.openxmlformats.org/drawingml/2006/main">
               <a:ext uri="{FF2B5EF4-FFF2-40B4-BE49-F238E27FC236}">
-                <a16:creationId xmlns:a16="http://schemas.microsoft.com/office/drawing/2014/main" id="{309E6B8F-3A7E-45BB-9ED1-6C802D01765B}"/>
+                <a16:creationId xmlns:a16="http://schemas.microsoft.com/office/drawing/2014/main" id="{41ECEA87-EE40-4C97-90D8-4C73D5C49263}"/>
               </a:ext>
             </a:extLst>
           </p:cNvPr>
@@ -3223,7 +5474,7 @@
           <p:cNvPr id="5" name="objectives-title">
             <a:extLst xmlns:a="http://schemas.openxmlformats.org/drawingml/2006/main">
               <a:ext uri="{FF2B5EF4-FFF2-40B4-BE49-F238E27FC236}">
-                <a16:creationId xmlns:a16="http://schemas.microsoft.com/office/drawing/2014/main" id="{8B571CE5-FE02-4F04-AC8F-9C26AE3B2AA4}"/>
+                <a16:creationId xmlns:a16="http://schemas.microsoft.com/office/drawing/2014/main" id="{223BB5AA-06E5-45FF-A6A9-5720B31CD350}"/>
               </a:ext>
             </a:extLst>
           </p:cNvPr>
@@ -3281,7 +5532,7 @@
           <p:cNvPr id="6" name="objective-number-1">
             <a:extLst xmlns:a="http://schemas.openxmlformats.org/drawingml/2006/main">
               <a:ext uri="{FF2B5EF4-FFF2-40B4-BE49-F238E27FC236}">
-                <a16:creationId xmlns:a16="http://schemas.microsoft.com/office/drawing/2014/main" id="{DE17333A-BFDE-4F78-9B22-68108358264F}"/>
+                <a16:creationId xmlns:a16="http://schemas.microsoft.com/office/drawing/2014/main" id="{C7044A16-7F9C-4A21-977F-7167757F60F5}"/>
               </a:ext>
             </a:extLst>
           </p:cNvPr>
@@ -3339,7 +5590,7 @@
           <p:cNvPr id="7" name="objective-1">
             <a:extLst xmlns:a="http://schemas.openxmlformats.org/drawingml/2006/main">
               <a:ext uri="{FF2B5EF4-FFF2-40B4-BE49-F238E27FC236}">
-                <a16:creationId xmlns:a16="http://schemas.microsoft.com/office/drawing/2014/main" id="{EE211161-5C1D-4219-A259-77D19628E0C4}"/>
+                <a16:creationId xmlns:a16="http://schemas.microsoft.com/office/drawing/2014/main" id="{CCD46B7E-C658-41DE-AB02-0E3E02667F8A}"/>
               </a:ext>
             </a:extLst>
           </p:cNvPr>
@@ -3397,7 +5648,7 @@
           <p:cNvPr id="8" name="objective-number-2">
             <a:extLst xmlns:a="http://schemas.openxmlformats.org/drawingml/2006/main">
               <a:ext uri="{FF2B5EF4-FFF2-40B4-BE49-F238E27FC236}">
-                <a16:creationId xmlns:a16="http://schemas.microsoft.com/office/drawing/2014/main" id="{5A1EC785-E056-4661-908A-F68D4D59004E}"/>
+                <a16:creationId xmlns:a16="http://schemas.microsoft.com/office/drawing/2014/main" id="{707C1044-9141-4923-8175-ABF133AA317B}"/>
               </a:ext>
             </a:extLst>
           </p:cNvPr>
@@ -3455,7 +5706,7 @@
           <p:cNvPr id="9" name="objective-2">
             <a:extLst xmlns:a="http://schemas.openxmlformats.org/drawingml/2006/main">
               <a:ext uri="{FF2B5EF4-FFF2-40B4-BE49-F238E27FC236}">
-                <a16:creationId xmlns:a16="http://schemas.microsoft.com/office/drawing/2014/main" id="{BD0D9D92-4382-4032-9F06-7DC97C1CA64D}"/>
+                <a16:creationId xmlns:a16="http://schemas.microsoft.com/office/drawing/2014/main" id="{641B4FE2-546A-4152-BF06-ED371FD920BA}"/>
               </a:ext>
             </a:extLst>
           </p:cNvPr>
@@ -3513,7 +5764,7 @@
           <p:cNvPr id="10" name="objective-number-3">
             <a:extLst xmlns:a="http://schemas.openxmlformats.org/drawingml/2006/main">
               <a:ext uri="{FF2B5EF4-FFF2-40B4-BE49-F238E27FC236}">
-                <a16:creationId xmlns:a16="http://schemas.microsoft.com/office/drawing/2014/main" id="{40273B49-55F9-448B-ADBA-2BEF61534D2D}"/>
+                <a16:creationId xmlns:a16="http://schemas.microsoft.com/office/drawing/2014/main" id="{310C431E-F5E9-4DED-86BB-D35DF7B0A1D2}"/>
               </a:ext>
             </a:extLst>
           </p:cNvPr>
@@ -3571,7 +5822,7 @@
           <p:cNvPr id="11" name="objective-3">
             <a:extLst xmlns:a="http://schemas.openxmlformats.org/drawingml/2006/main">
               <a:ext uri="{FF2B5EF4-FFF2-40B4-BE49-F238E27FC236}">
-                <a16:creationId xmlns:a16="http://schemas.microsoft.com/office/drawing/2014/main" id="{637F2FF5-1392-4FE2-A661-941EE4CEA832}"/>
+                <a16:creationId xmlns:a16="http://schemas.microsoft.com/office/drawing/2014/main" id="{F290056F-C70F-4795-A527-3EC3F6741BC6}"/>
               </a:ext>
             </a:extLst>
           </p:cNvPr>
@@ -3629,7 +5880,7 @@
           <p:cNvPr id="12" name="objective-number-4">
             <a:extLst xmlns:a="http://schemas.openxmlformats.org/drawingml/2006/main">
               <a:ext uri="{FF2B5EF4-FFF2-40B4-BE49-F238E27FC236}">
-                <a16:creationId xmlns:a16="http://schemas.microsoft.com/office/drawing/2014/main" id="{8190ADAE-E6C1-43E9-99B8-E2A1D3559B1C}"/>
+                <a16:creationId xmlns:a16="http://schemas.microsoft.com/office/drawing/2014/main" id="{731A8033-74C4-413C-9312-50747EB0EFFC}"/>
               </a:ext>
             </a:extLst>
           </p:cNvPr>
@@ -3687,7 +5938,7 @@
           <p:cNvPr id="13" name="objective-4">
             <a:extLst xmlns:a="http://schemas.openxmlformats.org/drawingml/2006/main">
               <a:ext uri="{FF2B5EF4-FFF2-40B4-BE49-F238E27FC236}">
-                <a16:creationId xmlns:a16="http://schemas.microsoft.com/office/drawing/2014/main" id="{E692730D-926F-4C78-B038-532F9DF6CA90}"/>
+                <a16:creationId xmlns:a16="http://schemas.microsoft.com/office/drawing/2014/main" id="{0AC4E4EB-8BB6-400C-9787-DA4E6F891C66}"/>
               </a:ext>
             </a:extLst>
           </p:cNvPr>
@@ -3743,7 +5994,7 @@
     </p:spTree>
     <p:extLst>
       <p:ext uri="{BB962C8B-B14F-4D97-AF65-F5344CB8AC3E}">
-        <p14:creationId xmlns:p14="http://schemas.microsoft.com/office/powerpoint/2010/main" val="1681732301"/>
+        <p14:creationId xmlns:p14="http://schemas.microsoft.com/office/powerpoint/2010/main" val="312440790"/>
       </p:ext>
     </p:extLst>
   </p:cSld>
@@ -3774,7 +6025,7 @@
           <p:cNvPr id="9" name="accent-line">
             <a:extLst xmlns:a="http://schemas.openxmlformats.org/drawingml/2006/main">
               <a:ext uri="{FF2B5EF4-FFF2-40B4-BE49-F238E27FC236}">
-                <a16:creationId xmlns:a16="http://schemas.microsoft.com/office/drawing/2014/main" id="{FB455502-D955-435C-A468-B5262425D932}"/>
+                <a16:creationId xmlns:a16="http://schemas.microsoft.com/office/drawing/2014/main" id="{E1519024-0ECE-4BA2-AB24-A5606B834B2F}"/>
               </a:ext>
             </a:extLst>
           </p:cNvPr>
@@ -3807,7 +6058,7 @@
           <p:cNvPr id="2" name="chapter-label">
             <a:extLst xmlns:a="http://schemas.openxmlformats.org/drawingml/2006/main">
               <a:ext uri="{FF2B5EF4-FFF2-40B4-BE49-F238E27FC236}">
-                <a16:creationId xmlns:a16="http://schemas.microsoft.com/office/drawing/2014/main" id="{F137D66C-D2F2-4B73-9A41-D37787472BD0}"/>
+                <a16:creationId xmlns:a16="http://schemas.microsoft.com/office/drawing/2014/main" id="{B420DE41-EBB3-408A-A72F-0FEBECE02672}"/>
               </a:ext>
             </a:extLst>
           </p:cNvPr>
@@ -3865,7 +6116,7 @@
           <p:cNvPr id="3" name="slide-number">
             <a:extLst xmlns:a="http://schemas.openxmlformats.org/drawingml/2006/main">
               <a:ext uri="{FF2B5EF4-FFF2-40B4-BE49-F238E27FC236}">
-                <a16:creationId xmlns:a16="http://schemas.microsoft.com/office/drawing/2014/main" id="{3CB62BB2-B780-4F5E-B001-858568210273}"/>
+                <a16:creationId xmlns:a16="http://schemas.microsoft.com/office/drawing/2014/main" id="{91342DB1-6797-43E6-9F59-F1B3E0AB423E}"/>
               </a:ext>
             </a:extLst>
           </p:cNvPr>
@@ -3923,7 +6174,7 @@
           <p:cNvPr id="4" name="chapter-footer">
             <a:extLst xmlns:a="http://schemas.openxmlformats.org/drawingml/2006/main">
               <a:ext uri="{FF2B5EF4-FFF2-40B4-BE49-F238E27FC236}">
-                <a16:creationId xmlns:a16="http://schemas.microsoft.com/office/drawing/2014/main" id="{0BF10171-0FA6-4FB5-8B5F-E2CCFF3CDBA4}"/>
+                <a16:creationId xmlns:a16="http://schemas.microsoft.com/office/drawing/2014/main" id="{ED368923-DB90-482F-91DF-402749C1CDE6}"/>
               </a:ext>
             </a:extLst>
           </p:cNvPr>
@@ -3981,7 +6232,7 @@
           <p:cNvPr id="5" name="section-title">
             <a:extLst xmlns:a="http://schemas.openxmlformats.org/drawingml/2006/main">
               <a:ext uri="{FF2B5EF4-FFF2-40B4-BE49-F238E27FC236}">
-                <a16:creationId xmlns:a16="http://schemas.microsoft.com/office/drawing/2014/main" id="{7B95050A-0A77-4426-9585-6502C2B3A108}"/>
+                <a16:creationId xmlns:a16="http://schemas.microsoft.com/office/drawing/2014/main" id="{3403C8B3-363C-4B55-B177-C192E4A1F405}"/>
               </a:ext>
             </a:extLst>
           </p:cNvPr>
@@ -4039,7 +6290,7 @@
           <p:cNvPr id="6" name="section-explanation">
             <a:extLst xmlns:a="http://schemas.openxmlformats.org/drawingml/2006/main">
               <a:ext uri="{FF2B5EF4-FFF2-40B4-BE49-F238E27FC236}">
-                <a16:creationId xmlns:a16="http://schemas.microsoft.com/office/drawing/2014/main" id="{51007145-53B4-4EF4-A434-007050EB3D7B}"/>
+                <a16:creationId xmlns:a16="http://schemas.microsoft.com/office/drawing/2014/main" id="{87F0949E-F258-4A1A-8787-DE03433816A3}"/>
               </a:ext>
             </a:extLst>
           </p:cNvPr>
@@ -4097,7 +6348,7 @@
           <p:cNvPr id="7" name="column-rule">
             <a:extLst xmlns:a="http://schemas.openxmlformats.org/drawingml/2006/main">
               <a:ext uri="{FF2B5EF4-FFF2-40B4-BE49-F238E27FC236}">
-                <a16:creationId xmlns:a16="http://schemas.microsoft.com/office/drawing/2014/main" id="{C4F16724-4700-42D4-A303-7D4D1E16D6DE}"/>
+                <a16:creationId xmlns:a16="http://schemas.microsoft.com/office/drawing/2014/main" id="{7582BAFD-5919-4445-A778-BE58BC862F04}"/>
               </a:ext>
             </a:extLst>
           </p:cNvPr>
@@ -4130,7 +6381,7 @@
           <p:cNvPr id="8" name="section-points">
             <a:extLst xmlns:a="http://schemas.openxmlformats.org/drawingml/2006/main">
               <a:ext uri="{FF2B5EF4-FFF2-40B4-BE49-F238E27FC236}">
-                <a16:creationId xmlns:a16="http://schemas.microsoft.com/office/drawing/2014/main" id="{1094CD40-D4B3-4830-8E20-E8C7AE86C148}"/>
+                <a16:creationId xmlns:a16="http://schemas.microsoft.com/office/drawing/2014/main" id="{19E9A862-F9D7-4949-851B-F8D41F3B4EC9}"/>
               </a:ext>
             </a:extLst>
           </p:cNvPr>
@@ -4178,7 +6429,7 @@
                 <a:ea typeface="Helvetica Neue"/>
                 <a:cs typeface="Helvetica Neue"/>
               </a:rPr>
-              <a:t>01  Use a single chain for ordinary multi-step tasks.</a:t>
+              <a:t>01  Compare a direct baseline with explicit reasoning on the task.</a:t>
             </a:r>
           </a:p>
           <a:p xmlns:a="http://schemas.openxmlformats.org/drawingml/2006/main">
@@ -4242,7 +6493,7 @@
     </p:spTree>
     <p:extLst>
       <p:ext uri="{BB962C8B-B14F-4D97-AF65-F5344CB8AC3E}">
-        <p14:creationId xmlns:p14="http://schemas.microsoft.com/office/powerpoint/2010/main" val="1730090469"/>
+        <p14:creationId xmlns:p14="http://schemas.microsoft.com/office/powerpoint/2010/main" val="21174031"/>
       </p:ext>
     </p:extLst>
   </p:cSld>
@@ -4273,7 +6524,7 @@
           <p:cNvPr id="13" name="accent-line">
             <a:extLst xmlns:a="http://schemas.openxmlformats.org/drawingml/2006/main">
               <a:ext uri="{FF2B5EF4-FFF2-40B4-BE49-F238E27FC236}">
-                <a16:creationId xmlns:a16="http://schemas.microsoft.com/office/drawing/2014/main" id="{D7625D8E-0AC3-4919-AE2B-815D7431129A}"/>
+                <a16:creationId xmlns:a16="http://schemas.microsoft.com/office/drawing/2014/main" id="{06F6EE5C-D06E-4680-8810-6379EDE6FA1E}"/>
               </a:ext>
             </a:extLst>
           </p:cNvPr>
@@ -4306,7 +6557,7 @@
           <p:cNvPr id="2" name="chapter-label">
             <a:extLst xmlns:a="http://schemas.openxmlformats.org/drawingml/2006/main">
               <a:ext uri="{FF2B5EF4-FFF2-40B4-BE49-F238E27FC236}">
-                <a16:creationId xmlns:a16="http://schemas.microsoft.com/office/drawing/2014/main" id="{19C322DD-5B6A-42EC-9FF6-85AC2BA32B20}"/>
+                <a16:creationId xmlns:a16="http://schemas.microsoft.com/office/drawing/2014/main" id="{2FE4268B-E2A0-446A-AA90-60FCF726374D}"/>
               </a:ext>
             </a:extLst>
           </p:cNvPr>
@@ -4364,7 +6615,7 @@
           <p:cNvPr id="3" name="slide-number">
             <a:extLst xmlns:a="http://schemas.openxmlformats.org/drawingml/2006/main">
               <a:ext uri="{FF2B5EF4-FFF2-40B4-BE49-F238E27FC236}">
-                <a16:creationId xmlns:a16="http://schemas.microsoft.com/office/drawing/2014/main" id="{E98462BE-AB02-4402-B0C9-63DB78BB0380}"/>
+                <a16:creationId xmlns:a16="http://schemas.microsoft.com/office/drawing/2014/main" id="{AF330E36-D12C-43C6-B0E9-803055F49922}"/>
               </a:ext>
             </a:extLst>
           </p:cNvPr>
@@ -4422,7 +6673,7 @@
           <p:cNvPr id="4" name="chapter-footer">
             <a:extLst xmlns:a="http://schemas.openxmlformats.org/drawingml/2006/main">
               <a:ext uri="{FF2B5EF4-FFF2-40B4-BE49-F238E27FC236}">
-                <a16:creationId xmlns:a16="http://schemas.microsoft.com/office/drawing/2014/main" id="{F97A9BB2-4B9E-4B49-8E1A-E9BEE26E892F}"/>
+                <a16:creationId xmlns:a16="http://schemas.microsoft.com/office/drawing/2014/main" id="{2D09A4A6-3295-4EF1-B881-66C17E1ED2AB}"/>
               </a:ext>
             </a:extLst>
           </p:cNvPr>
@@ -4480,7 +6731,7 @@
           <p:cNvPr id="5" name="section-title">
             <a:extLst xmlns:a="http://schemas.openxmlformats.org/drawingml/2006/main">
               <a:ext uri="{FF2B5EF4-FFF2-40B4-BE49-F238E27FC236}">
-                <a16:creationId xmlns:a16="http://schemas.microsoft.com/office/drawing/2014/main" id="{E518BEB0-2B76-4F63-9683-E5EB364E0510}"/>
+                <a16:creationId xmlns:a16="http://schemas.microsoft.com/office/drawing/2014/main" id="{E6A3AA59-62DA-4686-8A88-F3B21C6E7E52}"/>
               </a:ext>
             </a:extLst>
           </p:cNvPr>
@@ -4538,7 +6789,7 @@
           <p:cNvPr id="6" name="section-explanation">
             <a:extLst xmlns:a="http://schemas.openxmlformats.org/drawingml/2006/main">
               <a:ext uri="{FF2B5EF4-FFF2-40B4-BE49-F238E27FC236}">
-                <a16:creationId xmlns:a16="http://schemas.microsoft.com/office/drawing/2014/main" id="{F893E0BB-4087-427E-BE94-CD8EDD00857C}"/>
+                <a16:creationId xmlns:a16="http://schemas.microsoft.com/office/drawing/2014/main" id="{9A50427F-FBFE-4D8E-8B88-F7185EC17E46}"/>
               </a:ext>
             </a:extLst>
           </p:cNvPr>
@@ -4586,7 +6837,7 @@
                 <a:ea typeface="Helvetica Neue"/>
                 <a:cs typeface="Helvetica Neue"/>
               </a:rPr>
-              <a:t>Generate several independent reasoning chains and take the majority answer. Different correct paths may converge on the same result while wrong paths are less likely to converge on one specific error.</a:t>
+              <a:t>Self-consistency samples multiple reasoning paths and aggregates their answers. Separately sampled outputs may share systematic errors. Measure whether voting improves the target task under a declared budget.</a:t>
             </a:r>
           </a:p>
         </p:txBody>
@@ -4596,7 +6847,7 @@
           <p:cNvPr id="7" name="point-band-1">
             <a:extLst xmlns:a="http://schemas.openxmlformats.org/drawingml/2006/main">
               <a:ext uri="{FF2B5EF4-FFF2-40B4-BE49-F238E27FC236}">
-                <a16:creationId xmlns:a16="http://schemas.microsoft.com/office/drawing/2014/main" id="{FB9CB786-0342-4C3E-BCD5-81ECA30EA07C}"/>
+                <a16:creationId xmlns:a16="http://schemas.microsoft.com/office/drawing/2014/main" id="{FA6CF38D-8C48-4FEB-B551-CB8868B56D1B}"/>
               </a:ext>
             </a:extLst>
           </p:cNvPr>
@@ -4629,7 +6880,7 @@
           <p:cNvPr id="8" name="point-1">
             <a:extLst xmlns:a="http://schemas.openxmlformats.org/drawingml/2006/main">
               <a:ext uri="{FF2B5EF4-FFF2-40B4-BE49-F238E27FC236}">
-                <a16:creationId xmlns:a16="http://schemas.microsoft.com/office/drawing/2014/main" id="{B15D1FED-EE3B-4641-A64A-107BF237C277}"/>
+                <a16:creationId xmlns:a16="http://schemas.microsoft.com/office/drawing/2014/main" id="{74A048E2-F4BD-4BBF-B3CE-A4BFAF7C47F3}"/>
               </a:ext>
             </a:extLst>
           </p:cNvPr>
@@ -4687,7 +6938,7 @@
           <p:cNvPr id="9" name="point-band-2">
             <a:extLst xmlns:a="http://schemas.openxmlformats.org/drawingml/2006/main">
               <a:ext uri="{FF2B5EF4-FFF2-40B4-BE49-F238E27FC236}">
-                <a16:creationId xmlns:a16="http://schemas.microsoft.com/office/drawing/2014/main" id="{21C800CA-1B5F-4349-BCB2-5EE0ECF20223}"/>
+                <a16:creationId xmlns:a16="http://schemas.microsoft.com/office/drawing/2014/main" id="{BDFA5867-FE4B-463D-8564-F00A6786DA6B}"/>
               </a:ext>
             </a:extLst>
           </p:cNvPr>
@@ -4720,7 +6971,7 @@
           <p:cNvPr id="10" name="point-2">
             <a:extLst xmlns:a="http://schemas.openxmlformats.org/drawingml/2006/main">
               <a:ext uri="{FF2B5EF4-FFF2-40B4-BE49-F238E27FC236}">
-                <a16:creationId xmlns:a16="http://schemas.microsoft.com/office/drawing/2014/main" id="{EFB9A79D-C09D-4A02-B981-A40AE70EA3D9}"/>
+                <a16:creationId xmlns:a16="http://schemas.microsoft.com/office/drawing/2014/main" id="{410ECABD-ECED-4747-B96F-9AF1E907F516}"/>
               </a:ext>
             </a:extLst>
           </p:cNvPr>
@@ -4778,7 +7029,7 @@
           <p:cNvPr id="11" name="point-band-3">
             <a:extLst xmlns:a="http://schemas.openxmlformats.org/drawingml/2006/main">
               <a:ext uri="{FF2B5EF4-FFF2-40B4-BE49-F238E27FC236}">
-                <a16:creationId xmlns:a16="http://schemas.microsoft.com/office/drawing/2014/main" id="{BDFC63AE-A115-4126-A292-9C2D331FDB08}"/>
+                <a16:creationId xmlns:a16="http://schemas.microsoft.com/office/drawing/2014/main" id="{41E5E6AD-C271-4CBC-9415-2FAE76E96801}"/>
               </a:ext>
             </a:extLst>
           </p:cNvPr>
@@ -4811,7 +7062,7 @@
           <p:cNvPr id="12" name="point-3">
             <a:extLst xmlns:a="http://schemas.openxmlformats.org/drawingml/2006/main">
               <a:ext uri="{FF2B5EF4-FFF2-40B4-BE49-F238E27FC236}">
-                <a16:creationId xmlns:a16="http://schemas.microsoft.com/office/drawing/2014/main" id="{5C1AE167-AE4D-4BC0-8B0C-1F52DA9358BF}"/>
+                <a16:creationId xmlns:a16="http://schemas.microsoft.com/office/drawing/2014/main" id="{CC518739-6C4D-40E3-93A5-ED95B12BD68A}"/>
               </a:ext>
             </a:extLst>
           </p:cNvPr>
@@ -4859,7 +7110,7 @@
                 <a:ea typeface="Helvetica Neue"/>
                 <a:cs typeface="Helvetica Neue"/>
               </a:rPr>
-              <a:t>Independence and diversity are part of the value.</a:t>
+              <a:t>Measure shared errors rather than assuming independence.</a:t>
             </a:r>
           </a:p>
         </p:txBody>
@@ -4867,7 +7118,7 @@
     </p:spTree>
     <p:extLst>
       <p:ext uri="{BB962C8B-B14F-4D97-AF65-F5344CB8AC3E}">
-        <p14:creationId xmlns:p14="http://schemas.microsoft.com/office/powerpoint/2010/main" val="506998585"/>
+        <p14:creationId xmlns:p14="http://schemas.microsoft.com/office/powerpoint/2010/main" val="1945158847"/>
       </p:ext>
     </p:extLst>
   </p:cSld>
@@ -4898,7 +7149,7 @@
           <p:cNvPr id="9" name="accent-line">
             <a:extLst xmlns:a="http://schemas.openxmlformats.org/drawingml/2006/main">
               <a:ext uri="{FF2B5EF4-FFF2-40B4-BE49-F238E27FC236}">
-                <a16:creationId xmlns:a16="http://schemas.microsoft.com/office/drawing/2014/main" id="{CE330976-D2D3-456F-9B16-88217FA8E5DA}"/>
+                <a16:creationId xmlns:a16="http://schemas.microsoft.com/office/drawing/2014/main" id="{DEA5CB12-9BD7-4339-9CA9-56E6935A5FCC}"/>
               </a:ext>
             </a:extLst>
           </p:cNvPr>
@@ -4931,7 +7182,7 @@
           <p:cNvPr id="2" name="chapter-label">
             <a:extLst xmlns:a="http://schemas.openxmlformats.org/drawingml/2006/main">
               <a:ext uri="{FF2B5EF4-FFF2-40B4-BE49-F238E27FC236}">
-                <a16:creationId xmlns:a16="http://schemas.microsoft.com/office/drawing/2014/main" id="{33675A0F-9CAA-43A0-86D3-E31F140B27EE}"/>
+                <a16:creationId xmlns:a16="http://schemas.microsoft.com/office/drawing/2014/main" id="{43903950-A087-49C4-8881-C1C579010F47}"/>
               </a:ext>
             </a:extLst>
           </p:cNvPr>
@@ -4989,7 +7240,7 @@
           <p:cNvPr id="3" name="slide-number">
             <a:extLst xmlns:a="http://schemas.openxmlformats.org/drawingml/2006/main">
               <a:ext uri="{FF2B5EF4-FFF2-40B4-BE49-F238E27FC236}">
-                <a16:creationId xmlns:a16="http://schemas.microsoft.com/office/drawing/2014/main" id="{6A5C61F1-0FAD-4BBB-8243-465B155EF3CE}"/>
+                <a16:creationId xmlns:a16="http://schemas.microsoft.com/office/drawing/2014/main" id="{795E7C00-FEF5-4621-9E6D-8D9BAB6412E8}"/>
               </a:ext>
             </a:extLst>
           </p:cNvPr>
@@ -5047,7 +7298,7 @@
           <p:cNvPr id="4" name="chapter-footer">
             <a:extLst xmlns:a="http://schemas.openxmlformats.org/drawingml/2006/main">
               <a:ext uri="{FF2B5EF4-FFF2-40B4-BE49-F238E27FC236}">
-                <a16:creationId xmlns:a16="http://schemas.microsoft.com/office/drawing/2014/main" id="{771BFD49-5BBF-461F-A217-BC81ED19C72D}"/>
+                <a16:creationId xmlns:a16="http://schemas.microsoft.com/office/drawing/2014/main" id="{83AC0EF7-03BE-420C-AEB0-AB2EA292AED0}"/>
               </a:ext>
             </a:extLst>
           </p:cNvPr>
@@ -5105,7 +7356,7 @@
           <p:cNvPr id="5" name="section-title">
             <a:extLst xmlns:a="http://schemas.openxmlformats.org/drawingml/2006/main">
               <a:ext uri="{FF2B5EF4-FFF2-40B4-BE49-F238E27FC236}">
-                <a16:creationId xmlns:a16="http://schemas.microsoft.com/office/drawing/2014/main" id="{9FE92AC7-F9CF-4DA8-9C2A-2412DEE3C1B7}"/>
+                <a16:creationId xmlns:a16="http://schemas.microsoft.com/office/drawing/2014/main" id="{B49A0BDB-6025-4F52-A911-7C2CB0F45DE7}"/>
               </a:ext>
             </a:extLst>
           </p:cNvPr>
@@ -5163,7 +7414,7 @@
           <p:cNvPr id="6" name="section-explanation">
             <a:extLst xmlns:a="http://schemas.openxmlformats.org/drawingml/2006/main">
               <a:ext uri="{FF2B5EF4-FFF2-40B4-BE49-F238E27FC236}">
-                <a16:creationId xmlns:a16="http://schemas.microsoft.com/office/drawing/2014/main" id="{0BAE62BD-E4E4-4FD3-8B08-75F84D675470}"/>
+                <a16:creationId xmlns:a16="http://schemas.microsoft.com/office/drawing/2014/main" id="{74485312-9896-41A9-AB64-AAC9E78B2611}"/>
               </a:ext>
             </a:extLst>
           </p:cNvPr>
@@ -5221,7 +7472,7 @@
           <p:cNvPr id="7" name="column-rule">
             <a:extLst xmlns:a="http://schemas.openxmlformats.org/drawingml/2006/main">
               <a:ext uri="{FF2B5EF4-FFF2-40B4-BE49-F238E27FC236}">
-                <a16:creationId xmlns:a16="http://schemas.microsoft.com/office/drawing/2014/main" id="{1EB461EA-C926-48F3-9895-C034D779E6D7}"/>
+                <a16:creationId xmlns:a16="http://schemas.microsoft.com/office/drawing/2014/main" id="{2BD24A49-19D3-4518-8B8A-BF994CEC39F4}"/>
               </a:ext>
             </a:extLst>
           </p:cNvPr>
@@ -5254,7 +7505,7 @@
           <p:cNvPr id="8" name="section-points">
             <a:extLst xmlns:a="http://schemas.openxmlformats.org/drawingml/2006/main">
               <a:ext uri="{FF2B5EF4-FFF2-40B4-BE49-F238E27FC236}">
-                <a16:creationId xmlns:a16="http://schemas.microsoft.com/office/drawing/2014/main" id="{98324FA6-0E4F-4563-A710-BA02B31272CF}"/>
+                <a16:creationId xmlns:a16="http://schemas.microsoft.com/office/drawing/2014/main" id="{FC12A55E-DA44-4E96-B6F2-228451E74D38}"/>
               </a:ext>
             </a:extLst>
           </p:cNvPr>
@@ -5394,7 +7645,7 @@
     </p:spTree>
     <p:extLst>
       <p:ext uri="{BB962C8B-B14F-4D97-AF65-F5344CB8AC3E}">
-        <p14:creationId xmlns:p14="http://schemas.microsoft.com/office/powerpoint/2010/main" val="1900741135"/>
+        <p14:creationId xmlns:p14="http://schemas.microsoft.com/office/powerpoint/2010/main" val="1307095934"/>
       </p:ext>
     </p:extLst>
   </p:cSld>
@@ -5425,7 +7676,7 @@
           <p:cNvPr id="13" name="accent-line">
             <a:extLst xmlns:a="http://schemas.openxmlformats.org/drawingml/2006/main">
               <a:ext uri="{FF2B5EF4-FFF2-40B4-BE49-F238E27FC236}">
-                <a16:creationId xmlns:a16="http://schemas.microsoft.com/office/drawing/2014/main" id="{1D880FAF-8D67-47B9-A95D-EF7A60E049F3}"/>
+                <a16:creationId xmlns:a16="http://schemas.microsoft.com/office/drawing/2014/main" id="{DB2C4B12-A7E0-4D97-BD5B-E0B58658F91A}"/>
               </a:ext>
             </a:extLst>
           </p:cNvPr>
@@ -5458,7 +7709,7 @@
           <p:cNvPr id="2" name="chapter-label">
             <a:extLst xmlns:a="http://schemas.openxmlformats.org/drawingml/2006/main">
               <a:ext uri="{FF2B5EF4-FFF2-40B4-BE49-F238E27FC236}">
-                <a16:creationId xmlns:a16="http://schemas.microsoft.com/office/drawing/2014/main" id="{23CE7C6A-BFE8-4261-95AA-E5C8C24625D9}"/>
+                <a16:creationId xmlns:a16="http://schemas.microsoft.com/office/drawing/2014/main" id="{83C4D97B-0E31-414C-B2B3-6D733999EE23}"/>
               </a:ext>
             </a:extLst>
           </p:cNvPr>
@@ -5516,7 +7767,7 @@
           <p:cNvPr id="3" name="slide-number">
             <a:extLst xmlns:a="http://schemas.openxmlformats.org/drawingml/2006/main">
               <a:ext uri="{FF2B5EF4-FFF2-40B4-BE49-F238E27FC236}">
-                <a16:creationId xmlns:a16="http://schemas.microsoft.com/office/drawing/2014/main" id="{6E94E124-A854-4A9D-99CB-4E214DAE79D9}"/>
+                <a16:creationId xmlns:a16="http://schemas.microsoft.com/office/drawing/2014/main" id="{07F8E27F-CC0A-4005-8D5B-BACF2E6A942A}"/>
               </a:ext>
             </a:extLst>
           </p:cNvPr>
@@ -5574,7 +7825,7 @@
           <p:cNvPr id="4" name="chapter-footer">
             <a:extLst xmlns:a="http://schemas.openxmlformats.org/drawingml/2006/main">
               <a:ext uri="{FF2B5EF4-FFF2-40B4-BE49-F238E27FC236}">
-                <a16:creationId xmlns:a16="http://schemas.microsoft.com/office/drawing/2014/main" id="{6F4C6C34-3316-49B1-8B02-4A0D8D190E28}"/>
+                <a16:creationId xmlns:a16="http://schemas.microsoft.com/office/drawing/2014/main" id="{0CF0AF52-0726-4495-8AEC-D4BB911232BC}"/>
               </a:ext>
             </a:extLst>
           </p:cNvPr>
@@ -5632,7 +7883,7 @@
           <p:cNvPr id="5" name="section-title">
             <a:extLst xmlns:a="http://schemas.openxmlformats.org/drawingml/2006/main">
               <a:ext uri="{FF2B5EF4-FFF2-40B4-BE49-F238E27FC236}">
-                <a16:creationId xmlns:a16="http://schemas.microsoft.com/office/drawing/2014/main" id="{3C0C2E5B-0E48-429C-840B-FDDAB8CC0E60}"/>
+                <a16:creationId xmlns:a16="http://schemas.microsoft.com/office/drawing/2014/main" id="{F8959369-90E6-43D8-A516-CE823954222D}"/>
               </a:ext>
             </a:extLst>
           </p:cNvPr>
@@ -5690,7 +7941,7 @@
           <p:cNvPr id="6" name="section-explanation">
             <a:extLst xmlns:a="http://schemas.openxmlformats.org/drawingml/2006/main">
               <a:ext uri="{FF2B5EF4-FFF2-40B4-BE49-F238E27FC236}">
-                <a16:creationId xmlns:a16="http://schemas.microsoft.com/office/drawing/2014/main" id="{3C112E2C-8415-486B-8C96-7F4184653FA7}"/>
+                <a16:creationId xmlns:a16="http://schemas.microsoft.com/office/drawing/2014/main" id="{CCE6045B-2D1D-4241-B07C-65E0B24BBC60}"/>
               </a:ext>
             </a:extLst>
           </p:cNvPr>
@@ -5748,7 +7999,7 @@
           <p:cNvPr id="7" name="point-band-1">
             <a:extLst xmlns:a="http://schemas.openxmlformats.org/drawingml/2006/main">
               <a:ext uri="{FF2B5EF4-FFF2-40B4-BE49-F238E27FC236}">
-                <a16:creationId xmlns:a16="http://schemas.microsoft.com/office/drawing/2014/main" id="{F6438DF7-83A8-4675-B4C6-1AA3ACAB1106}"/>
+                <a16:creationId xmlns:a16="http://schemas.microsoft.com/office/drawing/2014/main" id="{78C2EB6B-1095-459B-B218-2C78E44ED180}"/>
               </a:ext>
             </a:extLst>
           </p:cNvPr>
@@ -5781,7 +8032,7 @@
           <p:cNvPr id="8" name="point-1">
             <a:extLst xmlns:a="http://schemas.openxmlformats.org/drawingml/2006/main">
               <a:ext uri="{FF2B5EF4-FFF2-40B4-BE49-F238E27FC236}">
-                <a16:creationId xmlns:a16="http://schemas.microsoft.com/office/drawing/2014/main" id="{C426C43C-5F1C-49A9-81F5-318DCCA3BB40}"/>
+                <a16:creationId xmlns:a16="http://schemas.microsoft.com/office/drawing/2014/main" id="{13ECF2BF-3081-4F5A-B8AA-A78390E295A9}"/>
               </a:ext>
             </a:extLst>
           </p:cNvPr>
@@ -5839,7 +8090,7 @@
           <p:cNvPr id="9" name="point-band-2">
             <a:extLst xmlns:a="http://schemas.openxmlformats.org/drawingml/2006/main">
               <a:ext uri="{FF2B5EF4-FFF2-40B4-BE49-F238E27FC236}">
-                <a16:creationId xmlns:a16="http://schemas.microsoft.com/office/drawing/2014/main" id="{942C0279-168E-4461-9478-133DD32C6448}"/>
+                <a16:creationId xmlns:a16="http://schemas.microsoft.com/office/drawing/2014/main" id="{924EC63A-FE25-49C9-8E8D-33B89BAB9363}"/>
               </a:ext>
             </a:extLst>
           </p:cNvPr>
@@ -5872,7 +8123,7 @@
           <p:cNvPr id="10" name="point-2">
             <a:extLst xmlns:a="http://schemas.openxmlformats.org/drawingml/2006/main">
               <a:ext uri="{FF2B5EF4-FFF2-40B4-BE49-F238E27FC236}">
-                <a16:creationId xmlns:a16="http://schemas.microsoft.com/office/drawing/2014/main" id="{9C288A82-28F0-4FA8-978A-EDD10E174ED4}"/>
+                <a16:creationId xmlns:a16="http://schemas.microsoft.com/office/drawing/2014/main" id="{F85B1D2A-50AC-4150-8420-60D444432A4C}"/>
               </a:ext>
             </a:extLst>
           </p:cNvPr>
@@ -5930,7 +8181,7 @@
           <p:cNvPr id="11" name="point-band-3">
             <a:extLst xmlns:a="http://schemas.openxmlformats.org/drawingml/2006/main">
               <a:ext uri="{FF2B5EF4-FFF2-40B4-BE49-F238E27FC236}">
-                <a16:creationId xmlns:a16="http://schemas.microsoft.com/office/drawing/2014/main" id="{703D854D-02E5-4972-99E8-C9D9D814B60C}"/>
+                <a16:creationId xmlns:a16="http://schemas.microsoft.com/office/drawing/2014/main" id="{696BADA1-A55B-4471-A23A-FD1FC328B20A}"/>
               </a:ext>
             </a:extLst>
           </p:cNvPr>
@@ -5963,7 +8214,7 @@
           <p:cNvPr id="12" name="point-3">
             <a:extLst xmlns:a="http://schemas.openxmlformats.org/drawingml/2006/main">
               <a:ext uri="{FF2B5EF4-FFF2-40B4-BE49-F238E27FC236}">
-                <a16:creationId xmlns:a16="http://schemas.microsoft.com/office/drawing/2014/main" id="{B3956944-AD6D-41BF-A7EB-3F2CF3971DDF}"/>
+                <a16:creationId xmlns:a16="http://schemas.microsoft.com/office/drawing/2014/main" id="{4D592B06-C4F9-4F15-B937-4D57733791BE}"/>
               </a:ext>
             </a:extLst>
           </p:cNvPr>
@@ -6019,7 +8270,7 @@
     </p:spTree>
     <p:extLst>
       <p:ext uri="{BB962C8B-B14F-4D97-AF65-F5344CB8AC3E}">
-        <p14:creationId xmlns:p14="http://schemas.microsoft.com/office/powerpoint/2010/main" val="244036803"/>
+        <p14:creationId xmlns:p14="http://schemas.microsoft.com/office/powerpoint/2010/main" val="1820607140"/>
       </p:ext>
     </p:extLst>
   </p:cSld>
@@ -6050,7 +8301,7 @@
           <p:cNvPr id="9" name="accent-line">
             <a:extLst xmlns:a="http://schemas.openxmlformats.org/drawingml/2006/main">
               <a:ext uri="{FF2B5EF4-FFF2-40B4-BE49-F238E27FC236}">
-                <a16:creationId xmlns:a16="http://schemas.microsoft.com/office/drawing/2014/main" id="{739361D1-54ED-4CB0-B458-CDC8AD1CC4A9}"/>
+                <a16:creationId xmlns:a16="http://schemas.microsoft.com/office/drawing/2014/main" id="{19E8156E-B4D7-4F83-9594-FF3D5EAFBC22}"/>
               </a:ext>
             </a:extLst>
           </p:cNvPr>
@@ -6083,7 +8334,7 @@
           <p:cNvPr id="2" name="chapter-label">
             <a:extLst xmlns:a="http://schemas.openxmlformats.org/drawingml/2006/main">
               <a:ext uri="{FF2B5EF4-FFF2-40B4-BE49-F238E27FC236}">
-                <a16:creationId xmlns:a16="http://schemas.microsoft.com/office/drawing/2014/main" id="{0CA35128-1B21-48BE-B2B1-BD900911036C}"/>
+                <a16:creationId xmlns:a16="http://schemas.microsoft.com/office/drawing/2014/main" id="{74AC31E9-3E6F-4A60-84B5-60607BDB35AC}"/>
               </a:ext>
             </a:extLst>
           </p:cNvPr>
@@ -6141,7 +8392,7 @@
           <p:cNvPr id="3" name="slide-number">
             <a:extLst xmlns:a="http://schemas.openxmlformats.org/drawingml/2006/main">
               <a:ext uri="{FF2B5EF4-FFF2-40B4-BE49-F238E27FC236}">
-                <a16:creationId xmlns:a16="http://schemas.microsoft.com/office/drawing/2014/main" id="{C30403F9-56F7-4264-B725-50EF6895E34E}"/>
+                <a16:creationId xmlns:a16="http://schemas.microsoft.com/office/drawing/2014/main" id="{6986BC6A-8F34-4265-B054-F8A068A04F7F}"/>
               </a:ext>
             </a:extLst>
           </p:cNvPr>
@@ -6199,7 +8450,7 @@
           <p:cNvPr id="4" name="chapter-footer">
             <a:extLst xmlns:a="http://schemas.openxmlformats.org/drawingml/2006/main">
               <a:ext uri="{FF2B5EF4-FFF2-40B4-BE49-F238E27FC236}">
-                <a16:creationId xmlns:a16="http://schemas.microsoft.com/office/drawing/2014/main" id="{EAA82F8B-1378-45F2-9A4E-4F98610D52C1}"/>
+                <a16:creationId xmlns:a16="http://schemas.microsoft.com/office/drawing/2014/main" id="{2E93BB3E-E2EB-4C7B-884C-0703A53CD6A7}"/>
               </a:ext>
             </a:extLst>
           </p:cNvPr>
@@ -6257,7 +8508,7 @@
           <p:cNvPr id="5" name="section-title">
             <a:extLst xmlns:a="http://schemas.openxmlformats.org/drawingml/2006/main">
               <a:ext uri="{FF2B5EF4-FFF2-40B4-BE49-F238E27FC236}">
-                <a16:creationId xmlns:a16="http://schemas.microsoft.com/office/drawing/2014/main" id="{825DBE12-8CBC-4F17-9C22-B8CB7CC566D6}"/>
+                <a16:creationId xmlns:a16="http://schemas.microsoft.com/office/drawing/2014/main" id="{12B512A5-43F7-45AE-BA57-C335B9C2A8DE}"/>
               </a:ext>
             </a:extLst>
           </p:cNvPr>
@@ -6315,7 +8566,7 @@
           <p:cNvPr id="6" name="section-explanation">
             <a:extLst xmlns:a="http://schemas.openxmlformats.org/drawingml/2006/main">
               <a:ext uri="{FF2B5EF4-FFF2-40B4-BE49-F238E27FC236}">
-                <a16:creationId xmlns:a16="http://schemas.microsoft.com/office/drawing/2014/main" id="{BC31785E-DCD7-4FE2-817C-D7D9BCF9DB80}"/>
+                <a16:creationId xmlns:a16="http://schemas.microsoft.com/office/drawing/2014/main" id="{8E908AA0-DAAC-448C-9597-447DB536D8E9}"/>
               </a:ext>
             </a:extLst>
           </p:cNvPr>
@@ -6373,7 +8624,7 @@
           <p:cNvPr id="7" name="column-rule">
             <a:extLst xmlns:a="http://schemas.openxmlformats.org/drawingml/2006/main">
               <a:ext uri="{FF2B5EF4-FFF2-40B4-BE49-F238E27FC236}">
-                <a16:creationId xmlns:a16="http://schemas.microsoft.com/office/drawing/2014/main" id="{6952F010-C957-48B1-B7FE-3CAAA9D444AD}"/>
+                <a16:creationId xmlns:a16="http://schemas.microsoft.com/office/drawing/2014/main" id="{5FA98996-68C7-45B1-946D-0CF8BA6AC387}"/>
               </a:ext>
             </a:extLst>
           </p:cNvPr>
@@ -6406,7 +8657,7 @@
           <p:cNvPr id="8" name="section-points">
             <a:extLst xmlns:a="http://schemas.openxmlformats.org/drawingml/2006/main">
               <a:ext uri="{FF2B5EF4-FFF2-40B4-BE49-F238E27FC236}">
-                <a16:creationId xmlns:a16="http://schemas.microsoft.com/office/drawing/2014/main" id="{F6DDE110-07AD-45F2-A212-F315F5C3787B}"/>
+                <a16:creationId xmlns:a16="http://schemas.microsoft.com/office/drawing/2014/main" id="{1BC414DA-222D-4187-9017-2C72BA7408CA}"/>
               </a:ext>
             </a:extLst>
           </p:cNvPr>
@@ -6546,7 +8797,7 @@
     </p:spTree>
     <p:extLst>
       <p:ext uri="{BB962C8B-B14F-4D97-AF65-F5344CB8AC3E}">
-        <p14:creationId xmlns:p14="http://schemas.microsoft.com/office/powerpoint/2010/main" val="942602639"/>
+        <p14:creationId xmlns:p14="http://schemas.microsoft.com/office/powerpoint/2010/main" val="330434405"/>
       </p:ext>
     </p:extLst>
   </p:cSld>
@@ -6577,7 +8828,7 @@
           <p:cNvPr id="15" name="accent-line">
             <a:extLst xmlns:a="http://schemas.openxmlformats.org/drawingml/2006/main">
               <a:ext uri="{FF2B5EF4-FFF2-40B4-BE49-F238E27FC236}">
-                <a16:creationId xmlns:a16="http://schemas.microsoft.com/office/drawing/2014/main" id="{1D63E6BB-7569-4EEB-A667-A69F65AE32F9}"/>
+                <a16:creationId xmlns:a16="http://schemas.microsoft.com/office/drawing/2014/main" id="{A9E7A37C-FE47-430E-825A-A926D7AA1BC9}"/>
               </a:ext>
             </a:extLst>
           </p:cNvPr>
@@ -6610,7 +8861,7 @@
           <p:cNvPr id="2" name="chapter-label">
             <a:extLst xmlns:a="http://schemas.openxmlformats.org/drawingml/2006/main">
               <a:ext uri="{FF2B5EF4-FFF2-40B4-BE49-F238E27FC236}">
-                <a16:creationId xmlns:a16="http://schemas.microsoft.com/office/drawing/2014/main" id="{7BA0A3C4-698E-4EE7-8757-8F556E2505E5}"/>
+                <a16:creationId xmlns:a16="http://schemas.microsoft.com/office/drawing/2014/main" id="{9B363DC3-A8E1-4CE4-8296-4A8AD3B79995}"/>
               </a:ext>
             </a:extLst>
           </p:cNvPr>
@@ -6668,7 +8919,7 @@
           <p:cNvPr id="3" name="slide-number">
             <a:extLst xmlns:a="http://schemas.openxmlformats.org/drawingml/2006/main">
               <a:ext uri="{FF2B5EF4-FFF2-40B4-BE49-F238E27FC236}">
-                <a16:creationId xmlns:a16="http://schemas.microsoft.com/office/drawing/2014/main" id="{32F7987A-761B-404F-A62B-E697786F367B}"/>
+                <a16:creationId xmlns:a16="http://schemas.microsoft.com/office/drawing/2014/main" id="{28D22964-C727-47C3-B5C7-13E4CF874860}"/>
               </a:ext>
             </a:extLst>
           </p:cNvPr>
@@ -6726,7 +8977,7 @@
           <p:cNvPr id="4" name="chapter-footer">
             <a:extLst xmlns:a="http://schemas.openxmlformats.org/drawingml/2006/main">
               <a:ext uri="{FF2B5EF4-FFF2-40B4-BE49-F238E27FC236}">
-                <a16:creationId xmlns:a16="http://schemas.microsoft.com/office/drawing/2014/main" id="{729A1C08-637B-4405-A7E3-77D9A987343A}"/>
+                <a16:creationId xmlns:a16="http://schemas.microsoft.com/office/drawing/2014/main" id="{B217672F-91B2-4F2B-883C-B9179CDAE168}"/>
               </a:ext>
             </a:extLst>
           </p:cNvPr>
@@ -6784,7 +9035,7 @@
           <p:cNvPr id="5" name="section-title">
             <a:extLst xmlns:a="http://schemas.openxmlformats.org/drawingml/2006/main">
               <a:ext uri="{FF2B5EF4-FFF2-40B4-BE49-F238E27FC236}">
-                <a16:creationId xmlns:a16="http://schemas.microsoft.com/office/drawing/2014/main" id="{E0DDBE1B-F4F3-42E8-ABB9-45358544761C}"/>
+                <a16:creationId xmlns:a16="http://schemas.microsoft.com/office/drawing/2014/main" id="{22DAEAC0-5587-4CBF-9D86-034C8B3EC056}"/>
               </a:ext>
             </a:extLst>
           </p:cNvPr>
@@ -6842,7 +9093,7 @@
           <p:cNvPr id="6" name="section-explanation">
             <a:extLst xmlns:a="http://schemas.openxmlformats.org/drawingml/2006/main">
               <a:ext uri="{FF2B5EF4-FFF2-40B4-BE49-F238E27FC236}">
-                <a16:creationId xmlns:a16="http://schemas.microsoft.com/office/drawing/2014/main" id="{80161F7A-23AB-4720-B2F8-B3CBE749AAB4}"/>
+                <a16:creationId xmlns:a16="http://schemas.microsoft.com/office/drawing/2014/main" id="{773B5DF3-EE01-4F96-8237-4CA12AEE438A}"/>
               </a:ext>
             </a:extLst>
           </p:cNvPr>
@@ -6900,7 +9151,7 @@
           <p:cNvPr id="7" name="point-band-1">
             <a:extLst xmlns:a="http://schemas.openxmlformats.org/drawingml/2006/main">
               <a:ext uri="{FF2B5EF4-FFF2-40B4-BE49-F238E27FC236}">
-                <a16:creationId xmlns:a16="http://schemas.microsoft.com/office/drawing/2014/main" id="{FF1269EF-DD23-47AF-93E3-157FA6B0066A}"/>
+                <a16:creationId xmlns:a16="http://schemas.microsoft.com/office/drawing/2014/main" id="{3AC0FD9B-E227-471B-8965-8DCBA7E1BE2A}"/>
               </a:ext>
             </a:extLst>
           </p:cNvPr>
@@ -6933,7 +9184,7 @@
           <p:cNvPr id="8" name="point-1">
             <a:extLst xmlns:a="http://schemas.openxmlformats.org/drawingml/2006/main">
               <a:ext uri="{FF2B5EF4-FFF2-40B4-BE49-F238E27FC236}">
-                <a16:creationId xmlns:a16="http://schemas.microsoft.com/office/drawing/2014/main" id="{B3B2D0A6-3BF4-4479-92D2-2221F18FF397}"/>
+                <a16:creationId xmlns:a16="http://schemas.microsoft.com/office/drawing/2014/main" id="{1813D2AC-EB34-4C51-B111-8CA83BAC9F10}"/>
               </a:ext>
             </a:extLst>
           </p:cNvPr>
@@ -6991,7 +9242,7 @@
           <p:cNvPr id="9" name="point-band-2">
             <a:extLst xmlns:a="http://schemas.openxmlformats.org/drawingml/2006/main">
               <a:ext uri="{FF2B5EF4-FFF2-40B4-BE49-F238E27FC236}">
-                <a16:creationId xmlns:a16="http://schemas.microsoft.com/office/drawing/2014/main" id="{0C5AB639-86EC-4E89-8667-D91BB6BB815E}"/>
+                <a16:creationId xmlns:a16="http://schemas.microsoft.com/office/drawing/2014/main" id="{D4AF8E94-9BC9-4223-943E-3F5128E46AE3}"/>
               </a:ext>
             </a:extLst>
           </p:cNvPr>
@@ -7024,7 +9275,7 @@
           <p:cNvPr id="10" name="point-2">
             <a:extLst xmlns:a="http://schemas.openxmlformats.org/drawingml/2006/main">
               <a:ext uri="{FF2B5EF4-FFF2-40B4-BE49-F238E27FC236}">
-                <a16:creationId xmlns:a16="http://schemas.microsoft.com/office/drawing/2014/main" id="{56E2E9D6-4320-4F06-A252-6FD7AA0D7311}"/>
+                <a16:creationId xmlns:a16="http://schemas.microsoft.com/office/drawing/2014/main" id="{3B8DEBF8-4B55-46F8-8C1E-997D41284A62}"/>
               </a:ext>
             </a:extLst>
           </p:cNvPr>
@@ -7082,7 +9333,7 @@
           <p:cNvPr id="11" name="point-band-3">
             <a:extLst xmlns:a="http://schemas.openxmlformats.org/drawingml/2006/main">
               <a:ext uri="{FF2B5EF4-FFF2-40B4-BE49-F238E27FC236}">
-                <a16:creationId xmlns:a16="http://schemas.microsoft.com/office/drawing/2014/main" id="{F852339A-A391-4B83-B88B-CACF5A6B40B2}"/>
+                <a16:creationId xmlns:a16="http://schemas.microsoft.com/office/drawing/2014/main" id="{FFFF1884-6529-4C75-9058-A0796C0A3114}"/>
               </a:ext>
             </a:extLst>
           </p:cNvPr>
@@ -7115,7 +9366,7 @@
           <p:cNvPr id="12" name="point-3">
             <a:extLst xmlns:a="http://schemas.openxmlformats.org/drawingml/2006/main">
               <a:ext uri="{FF2B5EF4-FFF2-40B4-BE49-F238E27FC236}">
-                <a16:creationId xmlns:a16="http://schemas.microsoft.com/office/drawing/2014/main" id="{1ADB168C-1A35-4833-A798-0F530D1E55A8}"/>
+                <a16:creationId xmlns:a16="http://schemas.microsoft.com/office/drawing/2014/main" id="{055E24AC-9EEF-4BD7-9557-52411B3EF559}"/>
               </a:ext>
             </a:extLst>
           </p:cNvPr>
@@ -7173,7 +9424,7 @@
           <p:cNvPr id="13" name="point-band-4">
             <a:extLst xmlns:a="http://schemas.openxmlformats.org/drawingml/2006/main">
               <a:ext uri="{FF2B5EF4-FFF2-40B4-BE49-F238E27FC236}">
-                <a16:creationId xmlns:a16="http://schemas.microsoft.com/office/drawing/2014/main" id="{4AD21E32-4194-4CA4-9F98-3FFDB4F4B216}"/>
+                <a16:creationId xmlns:a16="http://schemas.microsoft.com/office/drawing/2014/main" id="{994984CC-ACCF-4DED-881B-E4327C10431F}"/>
               </a:ext>
             </a:extLst>
           </p:cNvPr>
@@ -7206,7 +9457,7 @@
           <p:cNvPr id="14" name="point-4">
             <a:extLst xmlns:a="http://schemas.openxmlformats.org/drawingml/2006/main">
               <a:ext uri="{FF2B5EF4-FFF2-40B4-BE49-F238E27FC236}">
-                <a16:creationId xmlns:a16="http://schemas.microsoft.com/office/drawing/2014/main" id="{3A0C1643-F7E6-4233-BD7C-4B6C8733E8F5}"/>
+                <a16:creationId xmlns:a16="http://schemas.microsoft.com/office/drawing/2014/main" id="{F24D8290-166E-47AA-B457-272B8228CCA5}"/>
               </a:ext>
             </a:extLst>
           </p:cNvPr>
@@ -7262,7 +9513,7 @@
     </p:spTree>
     <p:extLst>
       <p:ext uri="{BB962C8B-B14F-4D97-AF65-F5344CB8AC3E}">
-        <p14:creationId xmlns:p14="http://schemas.microsoft.com/office/powerpoint/2010/main" val="1314386929"/>
+        <p14:creationId xmlns:p14="http://schemas.microsoft.com/office/powerpoint/2010/main" val="1203552624"/>
       </p:ext>
     </p:extLst>
   </p:cSld>
@@ -7290,10 +9541,10 @@
       </p:grpSpPr>
       <p:sp>
         <p:nvSpPr>
-          <p:cNvPr id="18" name="accent-line">
-            <a:extLst xmlns:a="http://schemas.openxmlformats.org/drawingml/2006/main">
-              <a:ext uri="{FF2B5EF4-FFF2-40B4-BE49-F238E27FC236}">
-                <a16:creationId xmlns:a16="http://schemas.microsoft.com/office/drawing/2014/main" id="{68D486D1-5832-4533-988E-61E3E87CE73F}"/>
+          <p:cNvPr id="9" name="accent-line">
+            <a:extLst xmlns:a="http://schemas.openxmlformats.org/drawingml/2006/main">
+              <a:ext uri="{FF2B5EF4-FFF2-40B4-BE49-F238E27FC236}">
+                <a16:creationId xmlns:a16="http://schemas.microsoft.com/office/drawing/2014/main" id="{87C5E68B-088B-4BFE-AA8B-8B8BC792FD29}"/>
               </a:ext>
             </a:extLst>
           </p:cNvPr>
@@ -7326,7 +9577,7 @@
           <p:cNvPr id="2" name="chapter-label">
             <a:extLst xmlns:a="http://schemas.openxmlformats.org/drawingml/2006/main">
               <a:ext uri="{FF2B5EF4-FFF2-40B4-BE49-F238E27FC236}">
-                <a16:creationId xmlns:a16="http://schemas.microsoft.com/office/drawing/2014/main" id="{99F51DA1-AC16-4A5F-9DCF-FC7AA845EA85}"/>
+                <a16:creationId xmlns:a16="http://schemas.microsoft.com/office/drawing/2014/main" id="{39743073-1E6D-4E98-8024-7A2316EC5734}"/>
               </a:ext>
             </a:extLst>
           </p:cNvPr>
@@ -7374,7 +9625,7 @@
                 <a:ea typeface="Helvetica Neue"/>
                 <a:cs typeface="Helvetica Neue"/>
               </a:rPr>
-              <a:t>EXAM CHECK  /  10</a:t>
+              <a:t>CORE IDEA 07  /  10</a:t>
             </a:r>
           </a:p>
         </p:txBody>
@@ -7384,7 +9635,7 @@
           <p:cNvPr id="3" name="slide-number">
             <a:extLst xmlns:a="http://schemas.openxmlformats.org/drawingml/2006/main">
               <a:ext uri="{FF2B5EF4-FFF2-40B4-BE49-F238E27FC236}">
-                <a16:creationId xmlns:a16="http://schemas.microsoft.com/office/drawing/2014/main" id="{D28A319E-FA7E-420C-96D3-D5A79271EC5D}"/>
+                <a16:creationId xmlns:a16="http://schemas.microsoft.com/office/drawing/2014/main" id="{3C40195A-5506-4156-A570-ECE26F524A70}"/>
               </a:ext>
             </a:extLst>
           </p:cNvPr>
@@ -7442,7 +9693,7 @@
           <p:cNvPr id="4" name="chapter-footer">
             <a:extLst xmlns:a="http://schemas.openxmlformats.org/drawingml/2006/main">
               <a:ext uri="{FF2B5EF4-FFF2-40B4-BE49-F238E27FC236}">
-                <a16:creationId xmlns:a16="http://schemas.microsoft.com/office/drawing/2014/main" id="{17B27A80-701C-4E0B-A636-067E7179500D}"/>
+                <a16:creationId xmlns:a16="http://schemas.microsoft.com/office/drawing/2014/main" id="{EA4C0F5D-49F8-4C80-9FCF-BB2BD2FA7F56}"/>
               </a:ext>
             </a:extLst>
           </p:cNvPr>
@@ -7497,138 +9748,22 @@
       </p:sp>
       <p:sp>
         <p:nvSpPr>
-          <p:cNvPr id="5" name="exam-title">
-            <a:extLst xmlns:a="http://schemas.openxmlformats.org/drawingml/2006/main">
-              <a:ext uri="{FF2B5EF4-FFF2-40B4-BE49-F238E27FC236}">
-                <a16:creationId xmlns:a16="http://schemas.microsoft.com/office/drawing/2014/main" id="{B0E25729-88AD-43D2-BA9C-3CFA22D0A555}"/>
-              </a:ext>
-            </a:extLst>
-          </p:cNvPr>
-          <p:cNvSpPr>
-            <a:spLocks xmlns:a="http://schemas.openxmlformats.org/drawingml/2006/main" noGrp="1"/>
-          </p:cNvSpPr>
-          <p:nvPr/>
-        </p:nvSpPr>
-        <p:spPr>
-          <a:xfrm xmlns:a="http://schemas.openxmlformats.org/drawingml/2006/main">
-            <a:off x="390525" y="981075"/>
-            <a:ext cx="10668000" cy="781050"/>
-          </a:xfrm>
-          <a:prstGeom xmlns:a="http://schemas.openxmlformats.org/drawingml/2006/main" prst="rect">
-            <a:avLst/>
-          </a:prstGeom>
-          <a:noFill xmlns:a="http://schemas.openxmlformats.org/drawingml/2006/main"/>
-          <a:ln xmlns:a="http://schemas.openxmlformats.org/drawingml/2006/main" w="0">
-            <a:noFill/>
-            <a:prstDash val="solid"/>
-          </a:ln>
-        </p:spPr>
-        <p:txBody>
-          <a:bodyPr xmlns:a="http://schemas.openxmlformats.org/drawingml/2006/main" anchor="t">
-            <a:noAutofit/>
-          </a:bodyPr>
-          <a:lstStyle xmlns:a="http://schemas.openxmlformats.org/drawingml/2006/main"/>
-          <a:p xmlns:a="http://schemas.openxmlformats.org/drawingml/2006/main">
-            <a:pPr algn="l">
-              <a:defRPr sz="3150" b="1">
-                <a:solidFill>
-                  <a:srgbClr val="111111"/>
-                </a:solidFill>
-                <a:latin typeface="Helvetica Neue"/>
-                <a:ea typeface="Helvetica Neue"/>
-                <a:cs typeface="Helvetica Neue"/>
-              </a:defRPr>
-            </a:pPr>
-            <a:r>
-              <a:rPr sz="3150" b="1">
-                <a:solidFill>
-                  <a:srgbClr val="111111"/>
-                </a:solidFill>
-                <a:latin typeface="Helvetica Neue"/>
-                <a:ea typeface="Helvetica Neue"/>
-                <a:cs typeface="Helvetica Neue"/>
-              </a:rPr>
-              <a:t>Can you answer these without notes?</a:t>
-            </a:r>
-          </a:p>
-        </p:txBody>
-      </p:sp>
-      <p:sp>
-        <p:nvSpPr>
-          <p:cNvPr id="6" name="exam-number-1">
-            <a:extLst xmlns:a="http://schemas.openxmlformats.org/drawingml/2006/main">
-              <a:ext uri="{FF2B5EF4-FFF2-40B4-BE49-F238E27FC236}">
-                <a16:creationId xmlns:a16="http://schemas.microsoft.com/office/drawing/2014/main" id="{65379092-F19B-44A2-A853-4B2E8DCB4E94}"/>
-              </a:ext>
-            </a:extLst>
-          </p:cNvPr>
-          <p:cNvSpPr>
-            <a:spLocks xmlns:a="http://schemas.openxmlformats.org/drawingml/2006/main" noGrp="1"/>
-          </p:cNvSpPr>
-          <p:nvPr/>
-        </p:nvSpPr>
-        <p:spPr>
-          <a:xfrm xmlns:a="http://schemas.openxmlformats.org/drawingml/2006/main">
-            <a:off x="390525" y="2238375"/>
-            <a:ext cx="590550" cy="400050"/>
-          </a:xfrm>
-          <a:prstGeom xmlns:a="http://schemas.openxmlformats.org/drawingml/2006/main" prst="rect">
-            <a:avLst/>
-          </a:prstGeom>
-          <a:noFill xmlns:a="http://schemas.openxmlformats.org/drawingml/2006/main"/>
-          <a:ln xmlns:a="http://schemas.openxmlformats.org/drawingml/2006/main" w="0">
-            <a:noFill/>
-            <a:prstDash val="solid"/>
-          </a:ln>
-        </p:spPr>
-        <p:txBody>
-          <a:bodyPr xmlns:a="http://schemas.openxmlformats.org/drawingml/2006/main" anchor="t">
-            <a:noAutofit/>
-          </a:bodyPr>
-          <a:lstStyle xmlns:a="http://schemas.openxmlformats.org/drawingml/2006/main"/>
-          <a:p xmlns:a="http://schemas.openxmlformats.org/drawingml/2006/main">
-            <a:pPr algn="l">
-              <a:defRPr sz="1725" b="1">
-                <a:solidFill>
-                  <a:srgbClr val="FFB45E"/>
-                </a:solidFill>
-                <a:latin typeface="Helvetica Neue"/>
-                <a:ea typeface="Helvetica Neue"/>
-                <a:cs typeface="Helvetica Neue"/>
-              </a:defRPr>
-            </a:pPr>
-            <a:r>
-              <a:rPr sz="1725" b="1">
-                <a:solidFill>
-                  <a:srgbClr val="FFB45E"/>
-                </a:solidFill>
-                <a:latin typeface="Helvetica Neue"/>
-                <a:ea typeface="Helvetica Neue"/>
-                <a:cs typeface="Helvetica Neue"/>
-              </a:rPr>
-              <a:t>01</a:t>
-            </a:r>
-          </a:p>
-        </p:txBody>
-      </p:sp>
-      <p:sp>
-        <p:nvSpPr>
-          <p:cNvPr id="7" name="exam-question-1">
-            <a:extLst xmlns:a="http://schemas.openxmlformats.org/drawingml/2006/main">
-              <a:ext uri="{FF2B5EF4-FFF2-40B4-BE49-F238E27FC236}">
-                <a16:creationId xmlns:a16="http://schemas.microsoft.com/office/drawing/2014/main" id="{9DF6D6A0-F23B-4753-9143-E420545592D4}"/>
-              </a:ext>
-            </a:extLst>
-          </p:cNvPr>
-          <p:cNvSpPr>
-            <a:spLocks xmlns:a="http://schemas.openxmlformats.org/drawingml/2006/main" noGrp="1"/>
-          </p:cNvSpPr>
-          <p:nvPr/>
-        </p:nvSpPr>
-        <p:spPr>
-          <a:xfrm xmlns:a="http://schemas.openxmlformats.org/drawingml/2006/main">
-            <a:off x="1076325" y="2238375"/>
-            <a:ext cx="4762500" cy="895350"/>
+          <p:cNvPr id="5" name="section-title">
+            <a:extLst xmlns:a="http://schemas.openxmlformats.org/drawingml/2006/main">
+              <a:ext uri="{FF2B5EF4-FFF2-40B4-BE49-F238E27FC236}">
+                <a16:creationId xmlns:a16="http://schemas.microsoft.com/office/drawing/2014/main" id="{08A0B3ED-E27B-4FE0-B537-77F7231CEA6C}"/>
+              </a:ext>
+            </a:extLst>
+          </p:cNvPr>
+          <p:cNvSpPr>
+            <a:spLocks xmlns:a="http://schemas.openxmlformats.org/drawingml/2006/main" noGrp="1"/>
+          </p:cNvSpPr>
+          <p:nvPr/>
+        </p:nvSpPr>
+        <p:spPr>
+          <a:xfrm xmlns:a="http://schemas.openxmlformats.org/drawingml/2006/main">
+            <a:off x="390525" y="971550"/>
+            <a:ext cx="11144250" cy="971550"/>
           </a:xfrm>
           <a:prstGeom xmlns:a="http://schemas.openxmlformats.org/drawingml/2006/main" prst="rect">
             <a:avLst/>
@@ -7646,105 +9781,47 @@
           <a:lstStyle xmlns:a="http://schemas.openxmlformats.org/drawingml/2006/main"/>
           <a:p xmlns:a="http://schemas.openxmlformats.org/drawingml/2006/main">
             <a:pPr algn="l">
-              <a:defRPr sz="1575" b="1">
-                <a:solidFill>
-                  <a:srgbClr val="111111"/>
-                </a:solidFill>
-                <a:latin typeface="Helvetica Neue"/>
-                <a:ea typeface="Helvetica Neue"/>
-                <a:cs typeface="Helvetica Neue"/>
-              </a:defRPr>
-            </a:pPr>
-            <a:r>
-              <a:rPr sz="1575" b="1">
-                <a:solidFill>
-                  <a:srgbClr val="111111"/>
-                </a:solidFill>
-                <a:latin typeface="Helvetica Neue"/>
-                <a:ea typeface="Helvetica Neue"/>
-                <a:cs typeface="Helvetica Neue"/>
-              </a:rPr>
-              <a:t>Compare chain-of-thought and self-consistency.</a:t>
-            </a:r>
-          </a:p>
-        </p:txBody>
-      </p:sp>
-      <p:sp>
-        <p:nvSpPr>
-          <p:cNvPr id="8" name="exam-number-2">
-            <a:extLst xmlns:a="http://schemas.openxmlformats.org/drawingml/2006/main">
-              <a:ext uri="{FF2B5EF4-FFF2-40B4-BE49-F238E27FC236}">
-                <a16:creationId xmlns:a16="http://schemas.microsoft.com/office/drawing/2014/main" id="{2450F849-D995-49BB-BA71-7B7D729626E3}"/>
-              </a:ext>
-            </a:extLst>
-          </p:cNvPr>
-          <p:cNvSpPr>
-            <a:spLocks xmlns:a="http://schemas.openxmlformats.org/drawingml/2006/main" noGrp="1"/>
-          </p:cNvSpPr>
-          <p:nvPr/>
-        </p:nvSpPr>
-        <p:spPr>
-          <a:xfrm xmlns:a="http://schemas.openxmlformats.org/drawingml/2006/main">
-            <a:off x="6191250" y="2238375"/>
-            <a:ext cx="590550" cy="400050"/>
-          </a:xfrm>
-          <a:prstGeom xmlns:a="http://schemas.openxmlformats.org/drawingml/2006/main" prst="rect">
-            <a:avLst/>
-          </a:prstGeom>
-          <a:noFill xmlns:a="http://schemas.openxmlformats.org/drawingml/2006/main"/>
-          <a:ln xmlns:a="http://schemas.openxmlformats.org/drawingml/2006/main" w="0">
-            <a:noFill/>
-            <a:prstDash val="solid"/>
-          </a:ln>
-        </p:spPr>
-        <p:txBody>
-          <a:bodyPr xmlns:a="http://schemas.openxmlformats.org/drawingml/2006/main" anchor="t">
-            <a:noAutofit/>
-          </a:bodyPr>
-          <a:lstStyle xmlns:a="http://schemas.openxmlformats.org/drawingml/2006/main"/>
-          <a:p xmlns:a="http://schemas.openxmlformats.org/drawingml/2006/main">
-            <a:pPr algn="l">
-              <a:defRPr sz="1725" b="1">
-                <a:solidFill>
-                  <a:srgbClr val="FFB45E"/>
-                </a:solidFill>
-                <a:latin typeface="Helvetica Neue"/>
-                <a:ea typeface="Helvetica Neue"/>
-                <a:cs typeface="Helvetica Neue"/>
-              </a:defRPr>
-            </a:pPr>
-            <a:r>
-              <a:rPr sz="1725" b="1">
-                <a:solidFill>
-                  <a:srgbClr val="FFB45E"/>
-                </a:solidFill>
-                <a:latin typeface="Helvetica Neue"/>
-                <a:ea typeface="Helvetica Neue"/>
-                <a:cs typeface="Helvetica Neue"/>
-              </a:rPr>
-              <a:t>02</a:t>
-            </a:r>
-          </a:p>
-        </p:txBody>
-      </p:sp>
-      <p:sp>
-        <p:nvSpPr>
-          <p:cNvPr id="9" name="exam-question-2">
-            <a:extLst xmlns:a="http://schemas.openxmlformats.org/drawingml/2006/main">
-              <a:ext uri="{FF2B5EF4-FFF2-40B4-BE49-F238E27FC236}">
-                <a16:creationId xmlns:a16="http://schemas.microsoft.com/office/drawing/2014/main" id="{D96347A4-9816-47C8-8743-5ED736D04FE6}"/>
-              </a:ext>
-            </a:extLst>
-          </p:cNvPr>
-          <p:cNvSpPr>
-            <a:spLocks xmlns:a="http://schemas.openxmlformats.org/drawingml/2006/main" noGrp="1"/>
-          </p:cNvSpPr>
-          <p:nvPr/>
-        </p:nvSpPr>
-        <p:spPr>
-          <a:xfrm xmlns:a="http://schemas.openxmlformats.org/drawingml/2006/main">
-            <a:off x="6877050" y="2238375"/>
-            <a:ext cx="4762500" cy="895350"/>
+              <a:defRPr sz="3000" b="1">
+                <a:solidFill>
+                  <a:srgbClr val="111111"/>
+                </a:solidFill>
+                <a:latin typeface="Helvetica Neue"/>
+                <a:ea typeface="Helvetica Neue"/>
+                <a:cs typeface="Helvetica Neue"/>
+              </a:defRPr>
+            </a:pPr>
+            <a:r>
+              <a:rPr sz="3000" b="1">
+                <a:solidFill>
+                  <a:srgbClr val="111111"/>
+                </a:solidFill>
+                <a:latin typeface="Helvetica Neue"/>
+                <a:ea typeface="Helvetica Neue"/>
+                <a:cs typeface="Helvetica Neue"/>
+              </a:rPr>
+              <a:t>Reasoning strategies require controlled comparisons</a:t>
+            </a:r>
+          </a:p>
+        </p:txBody>
+      </p:sp>
+      <p:sp>
+        <p:nvSpPr>
+          <p:cNvPr id="6" name="section-explanation">
+            <a:extLst xmlns:a="http://schemas.openxmlformats.org/drawingml/2006/main">
+              <a:ext uri="{FF2B5EF4-FFF2-40B4-BE49-F238E27FC236}">
+                <a16:creationId xmlns:a16="http://schemas.microsoft.com/office/drawing/2014/main" id="{DFBE8F92-8BDC-4F59-B4C7-7D4EB7B89280}"/>
+              </a:ext>
+            </a:extLst>
+          </p:cNvPr>
+          <p:cNvSpPr>
+            <a:spLocks xmlns:a="http://schemas.openxmlformats.org/drawingml/2006/main" noGrp="1"/>
+          </p:cNvSpPr>
+          <p:nvPr/>
+        </p:nvSpPr>
+        <p:spPr>
+          <a:xfrm xmlns:a="http://schemas.openxmlformats.org/drawingml/2006/main">
+            <a:off x="390525" y="2381250"/>
+            <a:ext cx="4524375" cy="2905125"/>
           </a:xfrm>
           <a:prstGeom xmlns:a="http://schemas.openxmlformats.org/drawingml/2006/main" prst="rect">
             <a:avLst/>
@@ -7762,105 +9839,80 @@
           <a:lstStyle xmlns:a="http://schemas.openxmlformats.org/drawingml/2006/main"/>
           <a:p xmlns:a="http://schemas.openxmlformats.org/drawingml/2006/main">
             <a:pPr algn="l">
-              <a:defRPr sz="1575" b="1">
-                <a:solidFill>
-                  <a:srgbClr val="111111"/>
-                </a:solidFill>
-                <a:latin typeface="Helvetica Neue"/>
-                <a:ea typeface="Helvetica Neue"/>
-                <a:cs typeface="Helvetica Neue"/>
-              </a:defRPr>
-            </a:pPr>
-            <a:r>
-              <a:rPr sz="1575" b="1">
-                <a:solidFill>
-                  <a:srgbClr val="111111"/>
-                </a:solidFill>
-                <a:latin typeface="Helvetica Neue"/>
-                <a:ea typeface="Helvetica Neue"/>
-                <a:cs typeface="Helvetica Neue"/>
-              </a:rPr>
-              <a:t>What are generate, evaluate, and search in Tree-of-Thoughts?</a:t>
-            </a:r>
-          </a:p>
-        </p:txBody>
-      </p:sp>
-      <p:sp>
-        <p:nvSpPr>
-          <p:cNvPr id="10" name="exam-number-3">
-            <a:extLst xmlns:a="http://schemas.openxmlformats.org/drawingml/2006/main">
-              <a:ext uri="{FF2B5EF4-FFF2-40B4-BE49-F238E27FC236}">
-                <a16:creationId xmlns:a16="http://schemas.microsoft.com/office/drawing/2014/main" id="{0B2F9F9A-05E5-414A-AD1F-1F95BE2C6B68}"/>
-              </a:ext>
-            </a:extLst>
-          </p:cNvPr>
-          <p:cNvSpPr>
-            <a:spLocks xmlns:a="http://schemas.openxmlformats.org/drawingml/2006/main" noGrp="1"/>
-          </p:cNvSpPr>
-          <p:nvPr/>
-        </p:nvSpPr>
-        <p:spPr>
-          <a:xfrm xmlns:a="http://schemas.openxmlformats.org/drawingml/2006/main">
-            <a:off x="390525" y="3495675"/>
-            <a:ext cx="590550" cy="400050"/>
-          </a:xfrm>
-          <a:prstGeom xmlns:a="http://schemas.openxmlformats.org/drawingml/2006/main" prst="rect">
-            <a:avLst/>
-          </a:prstGeom>
-          <a:noFill xmlns:a="http://schemas.openxmlformats.org/drawingml/2006/main"/>
-          <a:ln xmlns:a="http://schemas.openxmlformats.org/drawingml/2006/main" w="0">
-            <a:noFill/>
-            <a:prstDash val="solid"/>
-          </a:ln>
-        </p:spPr>
-        <p:txBody>
-          <a:bodyPr xmlns:a="http://schemas.openxmlformats.org/drawingml/2006/main" anchor="t">
-            <a:noAutofit/>
-          </a:bodyPr>
-          <a:lstStyle xmlns:a="http://schemas.openxmlformats.org/drawingml/2006/main"/>
-          <a:p xmlns:a="http://schemas.openxmlformats.org/drawingml/2006/main">
-            <a:pPr algn="l">
-              <a:defRPr sz="1725" b="1">
-                <a:solidFill>
-                  <a:srgbClr val="FFB45E"/>
-                </a:solidFill>
-                <a:latin typeface="Helvetica Neue"/>
-                <a:ea typeface="Helvetica Neue"/>
-                <a:cs typeface="Helvetica Neue"/>
-              </a:defRPr>
-            </a:pPr>
-            <a:r>
-              <a:rPr sz="1725" b="1">
-                <a:solidFill>
-                  <a:srgbClr val="FFB45E"/>
-                </a:solidFill>
-                <a:latin typeface="Helvetica Neue"/>
-                <a:ea typeface="Helvetica Neue"/>
-                <a:cs typeface="Helvetica Neue"/>
-              </a:rPr>
-              <a:t>03</a:t>
-            </a:r>
-          </a:p>
-        </p:txBody>
-      </p:sp>
-      <p:sp>
-        <p:nvSpPr>
-          <p:cNvPr id="11" name="exam-question-3">
-            <a:extLst xmlns:a="http://schemas.openxmlformats.org/drawingml/2006/main">
-              <a:ext uri="{FF2B5EF4-FFF2-40B4-BE49-F238E27FC236}">
-                <a16:creationId xmlns:a16="http://schemas.microsoft.com/office/drawing/2014/main" id="{1E78E95C-2230-4AE6-B112-B5E0099E9839}"/>
-              </a:ext>
-            </a:extLst>
-          </p:cNvPr>
-          <p:cNvSpPr>
-            <a:spLocks xmlns:a="http://schemas.openxmlformats.org/drawingml/2006/main" noGrp="1"/>
-          </p:cNvSpPr>
-          <p:nvPr/>
-        </p:nvSpPr>
-        <p:spPr>
-          <a:xfrm xmlns:a="http://schemas.openxmlformats.org/drawingml/2006/main">
-            <a:off x="1076325" y="3495675"/>
-            <a:ext cx="4762500" cy="895350"/>
+              <a:defRPr sz="1875" b="0">
+                <a:solidFill>
+                  <a:srgbClr val="5B5B57"/>
+                </a:solidFill>
+                <a:latin typeface="Helvetica Neue"/>
+                <a:ea typeface="Helvetica Neue"/>
+                <a:cs typeface="Helvetica Neue"/>
+              </a:defRPr>
+            </a:pPr>
+            <a:r>
+              <a:rPr sz="1875" b="0">
+                <a:solidFill>
+                  <a:srgbClr val="5B5B57"/>
+                </a:solidFill>
+                <a:latin typeface="Helvetica Neue"/>
+                <a:ea typeface="Helvetica Neue"/>
+                <a:cs typeface="Helvetica Neue"/>
+              </a:rPr>
+              <a:t>Compare a direct baseline with sampling or review under a declared resource budget. Separate samples can share systematic errors. Counterfactual prompt edits test a behavioral claim without establishing a complete account of internal computation.</a:t>
+            </a:r>
+          </a:p>
+        </p:txBody>
+      </p:sp>
+      <p:sp>
+        <p:nvSpPr>
+          <p:cNvPr id="7" name="column-rule">
+            <a:extLst xmlns:a="http://schemas.openxmlformats.org/drawingml/2006/main">
+              <a:ext uri="{FF2B5EF4-FFF2-40B4-BE49-F238E27FC236}">
+                <a16:creationId xmlns:a16="http://schemas.microsoft.com/office/drawing/2014/main" id="{0C989D95-DBF7-470A-BCB1-A9D72DCFDEE1}"/>
+              </a:ext>
+            </a:extLst>
+          </p:cNvPr>
+          <p:cNvSpPr>
+            <a:spLocks xmlns:a="http://schemas.openxmlformats.org/drawingml/2006/main" noGrp="1"/>
+          </p:cNvSpPr>
+          <p:nvPr/>
+        </p:nvSpPr>
+        <p:spPr>
+          <a:xfrm xmlns:a="http://schemas.openxmlformats.org/drawingml/2006/main">
+            <a:off x="5334000" y="2343150"/>
+            <a:ext cx="47625" cy="3257550"/>
+          </a:xfrm>
+          <a:prstGeom xmlns:a="http://schemas.openxmlformats.org/drawingml/2006/main" prst="rect">
+            <a:avLst/>
+          </a:prstGeom>
+          <a:solidFill xmlns:a="http://schemas.openxmlformats.org/drawingml/2006/main">
+            <a:srgbClr val="FFB45E"/>
+          </a:solidFill>
+          <a:ln xmlns:a="http://schemas.openxmlformats.org/drawingml/2006/main" w="0">
+            <a:solidFill>
+              <a:srgbClr val="FFB45E"/>
+            </a:solidFill>
+            <a:prstDash val="solid"/>
+          </a:ln>
+        </p:spPr>
+      </p:sp>
+      <p:sp>
+        <p:nvSpPr>
+          <p:cNvPr id="8" name="section-points">
+            <a:extLst xmlns:a="http://schemas.openxmlformats.org/drawingml/2006/main">
+              <a:ext uri="{FF2B5EF4-FFF2-40B4-BE49-F238E27FC236}">
+                <a16:creationId xmlns:a16="http://schemas.microsoft.com/office/drawing/2014/main" id="{3F6F2D74-B295-436A-A2BF-AACC41E66BC4}"/>
+              </a:ext>
+            </a:extLst>
+          </p:cNvPr>
+          <p:cNvSpPr>
+            <a:spLocks xmlns:a="http://schemas.openxmlformats.org/drawingml/2006/main" noGrp="1"/>
+          </p:cNvSpPr>
+          <p:nvPr/>
+        </p:nvSpPr>
+        <p:spPr>
+          <a:xfrm xmlns:a="http://schemas.openxmlformats.org/drawingml/2006/main">
+            <a:off x="5857875" y="2343150"/>
+            <a:ext cx="5572125" cy="3429000"/>
           </a:xfrm>
           <a:prstGeom xmlns:a="http://schemas.openxmlformats.org/drawingml/2006/main" prst="rect">
             <a:avLst/>
@@ -7878,67 +9930,37 @@
           <a:lstStyle xmlns:a="http://schemas.openxmlformats.org/drawingml/2006/main"/>
           <a:p xmlns:a="http://schemas.openxmlformats.org/drawingml/2006/main">
             <a:pPr algn="l">
-              <a:defRPr sz="1575" b="1">
-                <a:solidFill>
-                  <a:srgbClr val="111111"/>
-                </a:solidFill>
-                <a:latin typeface="Helvetica Neue"/>
-                <a:ea typeface="Helvetica Neue"/>
-                <a:cs typeface="Helvetica Neue"/>
-              </a:defRPr>
-            </a:pPr>
-            <a:r>
-              <a:rPr sz="1575" b="1">
-                <a:solidFill>
-                  <a:srgbClr val="111111"/>
-                </a:solidFill>
-                <a:latin typeface="Helvetica Neue"/>
-                <a:ea typeface="Helvetica Neue"/>
-                <a:cs typeface="Helvetica Neue"/>
-              </a:rPr>
-              <a:t>How does Graph-of-Thoughts extend a tree?</a:t>
-            </a:r>
-          </a:p>
-        </p:txBody>
-      </p:sp>
-      <p:sp>
-        <p:nvSpPr>
-          <p:cNvPr id="12" name="exam-number-4">
-            <a:extLst xmlns:a="http://schemas.openxmlformats.org/drawingml/2006/main">
-              <a:ext uri="{FF2B5EF4-FFF2-40B4-BE49-F238E27FC236}">
-                <a16:creationId xmlns:a16="http://schemas.microsoft.com/office/drawing/2014/main" id="{E1E1D6FF-1CF7-4D5F-A347-A4BC701C775A}"/>
-              </a:ext>
-            </a:extLst>
-          </p:cNvPr>
-          <p:cNvSpPr>
-            <a:spLocks xmlns:a="http://schemas.openxmlformats.org/drawingml/2006/main" noGrp="1"/>
-          </p:cNvSpPr>
-          <p:nvPr/>
-        </p:nvSpPr>
-        <p:spPr>
-          <a:xfrm xmlns:a="http://schemas.openxmlformats.org/drawingml/2006/main">
-            <a:off x="6191250" y="3495675"/>
-            <a:ext cx="590550" cy="400050"/>
-          </a:xfrm>
-          <a:prstGeom xmlns:a="http://schemas.openxmlformats.org/drawingml/2006/main" prst="rect">
-            <a:avLst/>
-          </a:prstGeom>
-          <a:noFill xmlns:a="http://schemas.openxmlformats.org/drawingml/2006/main"/>
-          <a:ln xmlns:a="http://schemas.openxmlformats.org/drawingml/2006/main" w="0">
-            <a:noFill/>
-            <a:prstDash val="solid"/>
-          </a:ln>
-        </p:spPr>
-        <p:txBody>
-          <a:bodyPr xmlns:a="http://schemas.openxmlformats.org/drawingml/2006/main" anchor="t">
-            <a:noAutofit/>
-          </a:bodyPr>
-          <a:lstStyle xmlns:a="http://schemas.openxmlformats.org/drawingml/2006/main"/>
+              <a:defRPr sz="1725" b="1">
+                <a:solidFill>
+                  <a:srgbClr val="111111"/>
+                </a:solidFill>
+                <a:latin typeface="Helvetica Neue"/>
+                <a:ea typeface="Helvetica Neue"/>
+                <a:cs typeface="Helvetica Neue"/>
+              </a:defRPr>
+            </a:pPr>
+            <a:r>
+              <a:rPr sz="1725" b="1">
+                <a:solidFill>
+                  <a:srgbClr val="111111"/>
+                </a:solidFill>
+                <a:latin typeface="Helvetica Neue"/>
+                <a:ea typeface="Helvetica Neue"/>
+                <a:cs typeface="Helvetica Neue"/>
+              </a:rPr>
+              <a:t>01  Choose a scorer before inspecting answers.</a:t>
+            </a:r>
+          </a:p>
+          <a:p xmlns:a="http://schemas.openxmlformats.org/drawingml/2006/main">
+            <a:r>
+              <a:t/>
+            </a:r>
+          </a:p>
           <a:p xmlns:a="http://schemas.openxmlformats.org/drawingml/2006/main">
             <a:pPr algn="l">
               <a:defRPr sz="1725" b="1">
                 <a:solidFill>
-                  <a:srgbClr val="FFB45E"/>
+                  <a:srgbClr val="111111"/>
                 </a:solidFill>
                 <a:latin typeface="Helvetica Neue"/>
                 <a:ea typeface="Helvetica Neue"/>
@@ -7948,113 +9970,25 @@
             <a:r>
               <a:rPr sz="1725" b="1">
                 <a:solidFill>
-                  <a:srgbClr val="FFB45E"/>
-                </a:solidFill>
-                <a:latin typeface="Helvetica Neue"/>
-                <a:ea typeface="Helvetica Neue"/>
-                <a:cs typeface="Helvetica Neue"/>
-              </a:rPr>
-              <a:t>04</a:t>
-            </a:r>
-          </a:p>
-        </p:txBody>
-      </p:sp>
-      <p:sp>
-        <p:nvSpPr>
-          <p:cNvPr id="13" name="exam-question-4">
-            <a:extLst xmlns:a="http://schemas.openxmlformats.org/drawingml/2006/main">
-              <a:ext uri="{FF2B5EF4-FFF2-40B4-BE49-F238E27FC236}">
-                <a16:creationId xmlns:a16="http://schemas.microsoft.com/office/drawing/2014/main" id="{5ED05D75-9FDA-4690-9BA0-BD84A7BBBA0F}"/>
-              </a:ext>
-            </a:extLst>
-          </p:cNvPr>
-          <p:cNvSpPr>
-            <a:spLocks xmlns:a="http://schemas.openxmlformats.org/drawingml/2006/main" noGrp="1"/>
-          </p:cNvSpPr>
-          <p:nvPr/>
-        </p:nvSpPr>
-        <p:spPr>
-          <a:xfrm xmlns:a="http://schemas.openxmlformats.org/drawingml/2006/main">
-            <a:off x="6877050" y="3495675"/>
-            <a:ext cx="4762500" cy="895350"/>
-          </a:xfrm>
-          <a:prstGeom xmlns:a="http://schemas.openxmlformats.org/drawingml/2006/main" prst="rect">
-            <a:avLst/>
-          </a:prstGeom>
-          <a:noFill xmlns:a="http://schemas.openxmlformats.org/drawingml/2006/main"/>
-          <a:ln xmlns:a="http://schemas.openxmlformats.org/drawingml/2006/main" w="0">
-            <a:noFill/>
-            <a:prstDash val="solid"/>
-          </a:ln>
-        </p:spPr>
-        <p:txBody>
-          <a:bodyPr xmlns:a="http://schemas.openxmlformats.org/drawingml/2006/main" anchor="t">
-            <a:normAutofit fontScale="100000"/>
-          </a:bodyPr>
-          <a:lstStyle xmlns:a="http://schemas.openxmlformats.org/drawingml/2006/main"/>
-          <a:p xmlns:a="http://schemas.openxmlformats.org/drawingml/2006/main">
-            <a:pPr algn="l">
-              <a:defRPr sz="1575" b="1">
-                <a:solidFill>
-                  <a:srgbClr val="111111"/>
-                </a:solidFill>
-                <a:latin typeface="Helvetica Neue"/>
-                <a:ea typeface="Helvetica Neue"/>
-                <a:cs typeface="Helvetica Neue"/>
-              </a:defRPr>
-            </a:pPr>
-            <a:r>
-              <a:rPr sz="1575" b="1">
-                <a:solidFill>
-                  <a:srgbClr val="111111"/>
-                </a:solidFill>
-                <a:latin typeface="Helvetica Neue"/>
-                <a:ea typeface="Helvetica Neue"/>
-                <a:cs typeface="Helvetica Neue"/>
-              </a:rPr>
-              <a:t>Compare reflection with search.</a:t>
-            </a:r>
-          </a:p>
-        </p:txBody>
-      </p:sp>
-      <p:sp>
-        <p:nvSpPr>
-          <p:cNvPr id="14" name="exam-number-5">
-            <a:extLst xmlns:a="http://schemas.openxmlformats.org/drawingml/2006/main">
-              <a:ext uri="{FF2B5EF4-FFF2-40B4-BE49-F238E27FC236}">
-                <a16:creationId xmlns:a16="http://schemas.microsoft.com/office/drawing/2014/main" id="{C6C8CF3B-1A4E-4259-9BDE-572662B72916}"/>
-              </a:ext>
-            </a:extLst>
-          </p:cNvPr>
-          <p:cNvSpPr>
-            <a:spLocks xmlns:a="http://schemas.openxmlformats.org/drawingml/2006/main" noGrp="1"/>
-          </p:cNvSpPr>
-          <p:nvPr/>
-        </p:nvSpPr>
-        <p:spPr>
-          <a:xfrm xmlns:a="http://schemas.openxmlformats.org/drawingml/2006/main">
-            <a:off x="390525" y="4752975"/>
-            <a:ext cx="590550" cy="400050"/>
-          </a:xfrm>
-          <a:prstGeom xmlns:a="http://schemas.openxmlformats.org/drawingml/2006/main" prst="rect">
-            <a:avLst/>
-          </a:prstGeom>
-          <a:noFill xmlns:a="http://schemas.openxmlformats.org/drawingml/2006/main"/>
-          <a:ln xmlns:a="http://schemas.openxmlformats.org/drawingml/2006/main" w="0">
-            <a:noFill/>
-            <a:prstDash val="solid"/>
-          </a:ln>
-        </p:spPr>
-        <p:txBody>
-          <a:bodyPr xmlns:a="http://schemas.openxmlformats.org/drawingml/2006/main" anchor="t">
-            <a:noAutofit/>
-          </a:bodyPr>
-          <a:lstStyle xmlns:a="http://schemas.openxmlformats.org/drawingml/2006/main"/>
+                  <a:srgbClr val="111111"/>
+                </a:solidFill>
+                <a:latin typeface="Helvetica Neue"/>
+                <a:ea typeface="Helvetica Neue"/>
+                <a:cs typeface="Helvetica Neue"/>
+              </a:rPr>
+              <a:t>02  Keep held-out cases out of prompt development.</a:t>
+            </a:r>
+          </a:p>
+          <a:p xmlns:a="http://schemas.openxmlformats.org/drawingml/2006/main">
+            <a:r>
+              <a:t/>
+            </a:r>
+          </a:p>
           <a:p xmlns:a="http://schemas.openxmlformats.org/drawingml/2006/main">
             <a:pPr algn="l">
               <a:defRPr sz="1725" b="1">
                 <a:solidFill>
-                  <a:srgbClr val="FFB45E"/>
+                  <a:srgbClr val="111111"/>
                 </a:solidFill>
                 <a:latin typeface="Helvetica Neue"/>
                 <a:ea typeface="Helvetica Neue"/>
@@ -8064,187 +9998,13 @@
             <a:r>
               <a:rPr sz="1725" b="1">
                 <a:solidFill>
-                  <a:srgbClr val="FFB45E"/>
-                </a:solidFill>
-                <a:latin typeface="Helvetica Neue"/>
-                <a:ea typeface="Helvetica Neue"/>
-                <a:cs typeface="Helvetica Neue"/>
-              </a:rPr>
-              <a:t>05</a:t>
-            </a:r>
-          </a:p>
-        </p:txBody>
-      </p:sp>
-      <p:sp>
-        <p:nvSpPr>
-          <p:cNvPr id="15" name="exam-question-5">
-            <a:extLst xmlns:a="http://schemas.openxmlformats.org/drawingml/2006/main">
-              <a:ext uri="{FF2B5EF4-FFF2-40B4-BE49-F238E27FC236}">
-                <a16:creationId xmlns:a16="http://schemas.microsoft.com/office/drawing/2014/main" id="{C54516E8-DA2E-4026-9FAA-8BA14BB42C5F}"/>
-              </a:ext>
-            </a:extLst>
-          </p:cNvPr>
-          <p:cNvSpPr>
-            <a:spLocks xmlns:a="http://schemas.openxmlformats.org/drawingml/2006/main" noGrp="1"/>
-          </p:cNvSpPr>
-          <p:nvPr/>
-        </p:nvSpPr>
-        <p:spPr>
-          <a:xfrm xmlns:a="http://schemas.openxmlformats.org/drawingml/2006/main">
-            <a:off x="1076325" y="4752975"/>
-            <a:ext cx="4762500" cy="895350"/>
-          </a:xfrm>
-          <a:prstGeom xmlns:a="http://schemas.openxmlformats.org/drawingml/2006/main" prst="rect">
-            <a:avLst/>
-          </a:prstGeom>
-          <a:noFill xmlns:a="http://schemas.openxmlformats.org/drawingml/2006/main"/>
-          <a:ln xmlns:a="http://schemas.openxmlformats.org/drawingml/2006/main" w="0">
-            <a:noFill/>
-            <a:prstDash val="solid"/>
-          </a:ln>
-        </p:spPr>
-        <p:txBody>
-          <a:bodyPr xmlns:a="http://schemas.openxmlformats.org/drawingml/2006/main" anchor="t">
-            <a:normAutofit fontScale="100000"/>
-          </a:bodyPr>
-          <a:lstStyle xmlns:a="http://schemas.openxmlformats.org/drawingml/2006/main"/>
-          <a:p xmlns:a="http://schemas.openxmlformats.org/drawingml/2006/main">
-            <a:pPr algn="l">
-              <a:defRPr sz="1575" b="1">
-                <a:solidFill>
-                  <a:srgbClr val="111111"/>
-                </a:solidFill>
-                <a:latin typeface="Helvetica Neue"/>
-                <a:ea typeface="Helvetica Neue"/>
-                <a:cs typeface="Helvetica Neue"/>
-              </a:defRPr>
-            </a:pPr>
-            <a:r>
-              <a:rPr sz="1575" b="1">
-                <a:solidFill>
-                  <a:srgbClr val="111111"/>
-                </a:solidFill>
-                <a:latin typeface="Helvetica Neue"/>
-                <a:ea typeface="Helvetica Neue"/>
-                <a:cs typeface="Helvetica Neue"/>
-              </a:rPr>
-              <a:t>When should an agent use ReAct, plan-and-execute, or parallel planning?</a:t>
-            </a:r>
-          </a:p>
-        </p:txBody>
-      </p:sp>
-      <p:sp>
-        <p:nvSpPr>
-          <p:cNvPr id="16" name="exam-number-6">
-            <a:extLst xmlns:a="http://schemas.openxmlformats.org/drawingml/2006/main">
-              <a:ext uri="{FF2B5EF4-FFF2-40B4-BE49-F238E27FC236}">
-                <a16:creationId xmlns:a16="http://schemas.microsoft.com/office/drawing/2014/main" id="{44449175-460A-4E84-991B-73C92361503B}"/>
-              </a:ext>
-            </a:extLst>
-          </p:cNvPr>
-          <p:cNvSpPr>
-            <a:spLocks xmlns:a="http://schemas.openxmlformats.org/drawingml/2006/main" noGrp="1"/>
-          </p:cNvSpPr>
-          <p:nvPr/>
-        </p:nvSpPr>
-        <p:spPr>
-          <a:xfrm xmlns:a="http://schemas.openxmlformats.org/drawingml/2006/main">
-            <a:off x="6191250" y="4752975"/>
-            <a:ext cx="590550" cy="400050"/>
-          </a:xfrm>
-          <a:prstGeom xmlns:a="http://schemas.openxmlformats.org/drawingml/2006/main" prst="rect">
-            <a:avLst/>
-          </a:prstGeom>
-          <a:noFill xmlns:a="http://schemas.openxmlformats.org/drawingml/2006/main"/>
-          <a:ln xmlns:a="http://schemas.openxmlformats.org/drawingml/2006/main" w="0">
-            <a:noFill/>
-            <a:prstDash val="solid"/>
-          </a:ln>
-        </p:spPr>
-        <p:txBody>
-          <a:bodyPr xmlns:a="http://schemas.openxmlformats.org/drawingml/2006/main" anchor="t">
-            <a:noAutofit/>
-          </a:bodyPr>
-          <a:lstStyle xmlns:a="http://schemas.openxmlformats.org/drawingml/2006/main"/>
-          <a:p xmlns:a="http://schemas.openxmlformats.org/drawingml/2006/main">
-            <a:pPr algn="l">
-              <a:defRPr sz="1725" b="1">
-                <a:solidFill>
-                  <a:srgbClr val="FFB45E"/>
-                </a:solidFill>
-                <a:latin typeface="Helvetica Neue"/>
-                <a:ea typeface="Helvetica Neue"/>
-                <a:cs typeface="Helvetica Neue"/>
-              </a:defRPr>
-            </a:pPr>
-            <a:r>
-              <a:rPr sz="1725" b="1">
-                <a:solidFill>
-                  <a:srgbClr val="FFB45E"/>
-                </a:solidFill>
-                <a:latin typeface="Helvetica Neue"/>
-                <a:ea typeface="Helvetica Neue"/>
-                <a:cs typeface="Helvetica Neue"/>
-              </a:rPr>
-              <a:t>06</a:t>
-            </a:r>
-          </a:p>
-        </p:txBody>
-      </p:sp>
-      <p:sp>
-        <p:nvSpPr>
-          <p:cNvPr id="17" name="exam-question-6">
-            <a:extLst xmlns:a="http://schemas.openxmlformats.org/drawingml/2006/main">
-              <a:ext uri="{FF2B5EF4-FFF2-40B4-BE49-F238E27FC236}">
-                <a16:creationId xmlns:a16="http://schemas.microsoft.com/office/drawing/2014/main" id="{765DE684-04E3-4C4D-8891-EC943DFFB47E}"/>
-              </a:ext>
-            </a:extLst>
-          </p:cNvPr>
-          <p:cNvSpPr>
-            <a:spLocks xmlns:a="http://schemas.openxmlformats.org/drawingml/2006/main" noGrp="1"/>
-          </p:cNvSpPr>
-          <p:nvPr/>
-        </p:nvSpPr>
-        <p:spPr>
-          <a:xfrm xmlns:a="http://schemas.openxmlformats.org/drawingml/2006/main">
-            <a:off x="6877050" y="4752975"/>
-            <a:ext cx="4762500" cy="895350"/>
-          </a:xfrm>
-          <a:prstGeom xmlns:a="http://schemas.openxmlformats.org/drawingml/2006/main" prst="rect">
-            <a:avLst/>
-          </a:prstGeom>
-          <a:noFill xmlns:a="http://schemas.openxmlformats.org/drawingml/2006/main"/>
-          <a:ln xmlns:a="http://schemas.openxmlformats.org/drawingml/2006/main" w="0">
-            <a:noFill/>
-            <a:prstDash val="solid"/>
-          </a:ln>
-        </p:spPr>
-        <p:txBody>
-          <a:bodyPr xmlns:a="http://schemas.openxmlformats.org/drawingml/2006/main" anchor="t">
-            <a:normAutofit fontScale="100000"/>
-          </a:bodyPr>
-          <a:lstStyle xmlns:a="http://schemas.openxmlformats.org/drawingml/2006/main"/>
-          <a:p xmlns:a="http://schemas.openxmlformats.org/drawingml/2006/main">
-            <a:pPr algn="l">
-              <a:defRPr sz="1575" b="1">
-                <a:solidFill>
-                  <a:srgbClr val="111111"/>
-                </a:solidFill>
-                <a:latin typeface="Helvetica Neue"/>
-                <a:ea typeface="Helvetica Neue"/>
-                <a:cs typeface="Helvetica Neue"/>
-              </a:defRPr>
-            </a:pPr>
-            <a:r>
-              <a:rPr sz="1575" b="1">
-                <a:solidFill>
-                  <a:srgbClr val="111111"/>
-                </a:solidFill>
-                <a:latin typeface="Helvetica Neue"/>
-                <a:ea typeface="Helvetica Neue"/>
-                <a:cs typeface="Helvetica Neue"/>
-              </a:rPr>
-              <a:t>Why can more reasoning hurt?</a:t>
+                  <a:srgbClr val="111111"/>
+                </a:solidFill>
+                <a:latin typeface="Helvetica Neue"/>
+                <a:ea typeface="Helvetica Neue"/>
+                <a:cs typeface="Helvetica Neue"/>
+              </a:rPr>
+              <a:t>03  Report when extra reasoning fails to help.</a:t>
             </a:r>
           </a:p>
         </p:txBody>
@@ -8252,7 +10012,7 @@
     </p:spTree>
     <p:extLst>
       <p:ext uri="{BB962C8B-B14F-4D97-AF65-F5344CB8AC3E}">
-        <p14:creationId xmlns:p14="http://schemas.microsoft.com/office/powerpoint/2010/main" val="1751060027"/>
+        <p14:creationId xmlns:p14="http://schemas.microsoft.com/office/powerpoint/2010/main" val="447211933"/>
       </p:ext>
     </p:extLst>
   </p:cSld>
@@ -8260,9 +10020,9 @@
 </file>
 
 <file path=ppt/theme/theme1.xml><?xml version="1.0" encoding="utf-8"?>
-<a:theme xmlns:a="http://schemas.openxmlformats.org/drawingml/2006/main" name="ChatGPT">
+<a:theme xmlns:a="http://schemas.openxmlformats.org/drawingml/2006/main" name="Course">
   <a:themeElements>
-    <a:clrScheme name="ChatGPT">
+    <a:clrScheme name="Course">
       <a:dk1>
         <a:srgbClr val="000000"/>
       </a:dk1>
@@ -8312,7 +10072,7 @@
         <a:cs typeface="Calibri"/>
       </a:minorFont>
     </a:fontScheme>
-    <a:fmtScheme name="ChatGPT">
+    <a:fmtScheme name="Course">
       <a:fillStyleLst>
         <a:solidFill>
           <a:schemeClr val="phClr"/>
